--- a/CoworkPlaybook/Cowork_教育訓練簡報_金融版.pptx
+++ b/CoworkPlaybook/Cowork_教育訓練簡報_金融版.pptx
@@ -11651,7 +11651,7 @@
                 <a:ea typeface="Microsoft JhengHei" pitchFamily="34" charset="-122"/>
                 <a:cs typeface="Microsoft JhengHei" pitchFamily="34" charset="-120"/>
               </a:rPr>
-              <a:t>不能存取本機檔案、刪除 OneDrive/SharePoint 檔案或讀取加密檔；附件 &lt;200MB，自訂技能未驗證需審閱。</a:t>
+              <a:t>不能存取本機檔案、刪除 OneDrive/SharePoint 檔案或讀取加密檔；附件 &lt;200MB；自訂技能與第三方 plugin 未經 Microsoft 驗證，需自行審閱。官方明列不適用於「免人工審查即需保證正確」的用途。</a:t>
             </a:r>
             <a:endParaRPr lang="en-US" sz="1300" dirty="0"/>
           </a:p>
@@ -12522,7 +12522,7 @@
                 <a:ea typeface="Microsoft JhengHei" pitchFamily="34" charset="-122"/>
                 <a:cs typeface="Microsoft JhengHei" pitchFamily="34" charset="-120"/>
               </a:rPr>
-              <a:t>開始前請確認：M365 Copilot 授權、已啟用用量計費（Cowork 現已正式開放）、租戶已啟用 Anthropic 子處理者；可在 Web/桌面/行動/Outlook/Teams 使用（本機瀏覽器工作僅限網頁版＋最新版 Edge）。</a:t>
+              <a:t>開始前請確認：每位使用者一張 M365 Copilot 授權、管理員已啟用用量計費（Copilot Credits，未啟用則無法存取）、租戶位於 Anthropic 支援地區；可在 Web/桌面/行動/Outlook/Teams 使用（本機瀏覽器工作僅限網頁版＋Edge 150 以上，且預設停用需管理員開啟）。</a:t>
             </a:r>
             <a:endParaRPr lang="en-US" sz="1500" dirty="0"/>
           </a:p>
@@ -12853,7 +12853,7 @@
                 <a:ea typeface="Microsoft JhengHei" pitchFamily="34" charset="-122"/>
                 <a:cs typeface="Microsoft JhengHei" pitchFamily="34" charset="-120"/>
               </a:rPr>
-              <a:t>模型選擇器支援 Auto、Claude Opus/Sonnet、Sonnet+Opus 顧問配對、Fable 5 preview、GPT 5.5</a:t>
+              <a:t>模型選擇器：Auto（預設）、GPT 5.5 Frontier、GPT 5.6 Sol／Terra、Opus 5、Sonnet 5、Fable 5（預覽・預設關閉）</a:t>
             </a:r>
             <a:endParaRPr lang="en-US" sz="1400" dirty="0"/>
           </a:p>
@@ -12916,7 +12916,7 @@
                 <a:ea typeface="Microsoft JhengHei" pitchFamily="34" charset="-122"/>
                 <a:cs typeface="Microsoft JhengHei" pitchFamily="34" charset="-120"/>
               </a:rPr>
-              <a:t>想要自動觸發？到「排程」頁設定事件驅動任務（收到指定信件／被 @提及時自動執行）</a:t>
+              <a:t>想要自動觸發？到「Automations」頁設定排程提示（上限 5 個）或事件觸發任務（收信／被 @提及）</a:t>
             </a:r>
             <a:endParaRPr lang="en-US" sz="1400" dirty="0"/>
           </a:p>
@@ -14029,8 +14029,8 @@
         </p:nvSpPr>
         <p:spPr>
           <a:xfrm>
-            <a:off x="640080" y="1828800"/>
-            <a:ext cx="2743200" cy="786384"/>
+            <a:off x="640080" y="1737360"/>
+            <a:ext cx="2743200" cy="457200"/>
           </a:xfrm>
           <a:prstGeom prst="rect">
             <a:avLst/>
@@ -14049,8 +14049,8 @@
         </p:nvSpPr>
         <p:spPr>
           <a:xfrm>
-            <a:off x="3383280" y="1828800"/>
-            <a:ext cx="4023360" cy="786384"/>
+            <a:off x="3383280" y="1737360"/>
+            <a:ext cx="4023360" cy="457200"/>
           </a:xfrm>
           <a:prstGeom prst="rect">
             <a:avLst/>
@@ -14069,8 +14069,8 @@
         </p:nvSpPr>
         <p:spPr>
           <a:xfrm>
-            <a:off x="7406640" y="1828800"/>
-            <a:ext cx="4142232" cy="786384"/>
+            <a:off x="7406640" y="1737360"/>
+            <a:ext cx="4142232" cy="457200"/>
           </a:xfrm>
           <a:prstGeom prst="rect">
             <a:avLst/>
@@ -14089,8 +14089,8 @@
         </p:nvSpPr>
         <p:spPr>
           <a:xfrm>
-            <a:off x="640080" y="1828800"/>
-            <a:ext cx="2743200" cy="786384"/>
+            <a:off x="640080" y="1737360"/>
+            <a:ext cx="2743200" cy="457200"/>
           </a:xfrm>
           <a:prstGeom prst="rect">
             <a:avLst/>
@@ -14117,8 +14117,8 @@
         </p:nvSpPr>
         <p:spPr>
           <a:xfrm>
-            <a:off x="3383280" y="1828800"/>
-            <a:ext cx="4023360" cy="786384"/>
+            <a:off x="3383280" y="1737360"/>
+            <a:ext cx="4023360" cy="457200"/>
           </a:xfrm>
           <a:prstGeom prst="rect">
             <a:avLst/>
@@ -14134,7 +14134,7 @@
               <a:buNone/>
             </a:pPr>
             <a:r>
-              <a:rPr lang="en-US" sz="1500" b="1" dirty="0">
+              <a:rPr lang="en-US" sz="1400" b="1" dirty="0">
                 <a:solidFill>
                   <a:srgbClr val="FFFFFF"/>
                 </a:solidFill>
@@ -14144,7 +14144,7 @@
               </a:rPr>
               <a:t>一般 Copilot Chat</a:t>
             </a:r>
-            <a:endParaRPr lang="en-US" sz="1500" dirty="0"/>
+            <a:endParaRPr lang="en-US" sz="1400" dirty="0"/>
           </a:p>
         </p:txBody>
       </p:sp>
@@ -14156,8 +14156,8 @@
         </p:nvSpPr>
         <p:spPr>
           <a:xfrm>
-            <a:off x="7406640" y="1828800"/>
-            <a:ext cx="4142232" cy="786384"/>
+            <a:off x="7406640" y="1737360"/>
+            <a:ext cx="4142232" cy="457200"/>
           </a:xfrm>
           <a:prstGeom prst="rect">
             <a:avLst/>
@@ -14173,7 +14173,7 @@
               <a:buNone/>
             </a:pPr>
             <a:r>
-              <a:rPr lang="en-US" sz="1500" b="1" dirty="0">
+              <a:rPr lang="en-US" sz="1400" b="1" dirty="0">
                 <a:solidFill>
                   <a:srgbClr val="FFFFFF"/>
                 </a:solidFill>
@@ -14183,7 +14183,7 @@
               </a:rPr>
               <a:t>Copilot Cowork</a:t>
             </a:r>
-            <a:endParaRPr lang="en-US" sz="1500" dirty="0"/>
+            <a:endParaRPr lang="en-US" sz="1400" dirty="0"/>
           </a:p>
         </p:txBody>
       </p:sp>
@@ -14195,8 +14195,8 @@
         </p:nvSpPr>
         <p:spPr>
           <a:xfrm>
-            <a:off x="640080" y="2615184"/>
-            <a:ext cx="10908792" cy="786384"/>
+            <a:off x="640080" y="2194560"/>
+            <a:ext cx="10908792" cy="457200"/>
           </a:xfrm>
           <a:prstGeom prst="rect">
             <a:avLst/>
@@ -14215,8 +14215,8 @@
         </p:nvSpPr>
         <p:spPr>
           <a:xfrm>
-            <a:off x="822960" y="2615184"/>
-            <a:ext cx="2468880" cy="786384"/>
+            <a:off x="822960" y="2194560"/>
+            <a:ext cx="2468880" cy="457200"/>
           </a:xfrm>
           <a:prstGeom prst="rect">
             <a:avLst/>
@@ -14232,7 +14232,7 @@
               <a:buNone/>
             </a:pPr>
             <a:r>
-              <a:rPr lang="en-US" sz="1400" b="1" dirty="0">
+              <a:rPr lang="en-US" sz="1250" b="1" dirty="0">
                 <a:solidFill>
                   <a:srgbClr val="1E2235"/>
                 </a:solidFill>
@@ -14242,7 +14242,7 @@
               </a:rPr>
               <a:t>互動方式</a:t>
             </a:r>
-            <a:endParaRPr lang="en-US" sz="1400" dirty="0"/>
+            <a:endParaRPr lang="en-US" sz="1250" dirty="0"/>
           </a:p>
         </p:txBody>
       </p:sp>
@@ -14254,8 +14254,8 @@
         </p:nvSpPr>
         <p:spPr>
           <a:xfrm>
-            <a:off x="3566160" y="2615184"/>
-            <a:ext cx="3657600" cy="786384"/>
+            <a:off x="3566160" y="2194560"/>
+            <a:ext cx="3657600" cy="457200"/>
           </a:xfrm>
           <a:prstGeom prst="rect">
             <a:avLst/>
@@ -14271,7 +14271,7 @@
               <a:buNone/>
             </a:pPr>
             <a:r>
-              <a:rPr lang="en-US" sz="1400" dirty="0">
+              <a:rPr lang="en-US" sz="1250" dirty="0">
                 <a:solidFill>
                   <a:srgbClr val="5B6079"/>
                 </a:solidFill>
@@ -14281,7 +14281,7 @@
               </a:rPr>
               <a:t>快速單輪問答</a:t>
             </a:r>
-            <a:endParaRPr lang="en-US" sz="1400" dirty="0"/>
+            <a:endParaRPr lang="en-US" sz="1250" dirty="0"/>
           </a:p>
         </p:txBody>
       </p:sp>
@@ -14293,8 +14293,8 @@
         </p:nvSpPr>
         <p:spPr>
           <a:xfrm>
-            <a:off x="7589520" y="2615184"/>
-            <a:ext cx="3776472" cy="786384"/>
+            <a:off x="7589520" y="2194560"/>
+            <a:ext cx="3776472" cy="457200"/>
           </a:xfrm>
           <a:prstGeom prst="rect">
             <a:avLst/>
@@ -14310,7 +14310,7 @@
               <a:buNone/>
             </a:pPr>
             <a:r>
-              <a:rPr lang="en-US" sz="1400" dirty="0">
+              <a:rPr lang="en-US" sz="1250" dirty="0">
                 <a:solidFill>
                   <a:srgbClr val="1E2235"/>
                 </a:solidFill>
@@ -14320,7 +14320,7 @@
               </a:rPr>
               <a:t>交付目標，跨 App 自主多步執行</a:t>
             </a:r>
-            <a:endParaRPr lang="en-US" sz="1400" dirty="0"/>
+            <a:endParaRPr lang="en-US" sz="1250" dirty="0"/>
           </a:p>
         </p:txBody>
       </p:sp>
@@ -14332,8 +14332,8 @@
         </p:nvSpPr>
         <p:spPr>
           <a:xfrm>
-            <a:off x="640080" y="3401568"/>
-            <a:ext cx="10908792" cy="786384"/>
+            <a:off x="640080" y="2651760"/>
+            <a:ext cx="10908792" cy="457200"/>
           </a:xfrm>
           <a:prstGeom prst="rect">
             <a:avLst/>
@@ -14352,8 +14352,8 @@
         </p:nvSpPr>
         <p:spPr>
           <a:xfrm>
-            <a:off x="822960" y="3401568"/>
-            <a:ext cx="2468880" cy="786384"/>
+            <a:off x="822960" y="2651760"/>
+            <a:ext cx="2468880" cy="457200"/>
           </a:xfrm>
           <a:prstGeom prst="rect">
             <a:avLst/>
@@ -14369,7 +14369,7 @@
               <a:buNone/>
             </a:pPr>
             <a:r>
-              <a:rPr lang="en-US" sz="1400" b="1" dirty="0">
+              <a:rPr lang="en-US" sz="1250" b="1" dirty="0">
                 <a:solidFill>
                   <a:srgbClr val="1E2235"/>
                 </a:solidFill>
@@ -14377,9 +14377,9 @@
                 <a:ea typeface="Microsoft JhengHei" pitchFamily="34" charset="-122"/>
                 <a:cs typeface="Microsoft JhengHei" pitchFamily="34" charset="-120"/>
               </a:rPr>
-              <a:t>檔案處理</a:t>
-            </a:r>
-            <a:endParaRPr lang="en-US" sz="1400" dirty="0"/>
+              <a:t>速度</a:t>
+            </a:r>
+            <a:endParaRPr lang="en-US" sz="1250" dirty="0"/>
           </a:p>
         </p:txBody>
       </p:sp>
@@ -14391,8 +14391,8 @@
         </p:nvSpPr>
         <p:spPr>
           <a:xfrm>
-            <a:off x="3566160" y="3401568"/>
-            <a:ext cx="3657600" cy="786384"/>
+            <a:off x="3566160" y="2651760"/>
+            <a:ext cx="3657600" cy="457200"/>
           </a:xfrm>
           <a:prstGeom prst="rect">
             <a:avLst/>
@@ -14408,7 +14408,7 @@
               <a:buNone/>
             </a:pPr>
             <a:r>
-              <a:rPr lang="en-US" sz="1400" dirty="0">
+              <a:rPr lang="en-US" sz="1250" dirty="0">
                 <a:solidFill>
                   <a:srgbClr val="5B6079"/>
                 </a:solidFill>
@@ -14416,9 +14416,9 @@
                 <a:ea typeface="Microsoft JhengHei" pitchFamily="34" charset="-122"/>
                 <a:cs typeface="Microsoft JhengHei" pitchFamily="34" charset="-120"/>
               </a:rPr>
-              <a:t>貼上片段內容</a:t>
-            </a:r>
-            <a:endParaRPr lang="en-US" sz="1400" dirty="0"/>
+              <a:t>秒～分鐘</a:t>
+            </a:r>
+            <a:endParaRPr lang="en-US" sz="1250" dirty="0"/>
           </a:p>
         </p:txBody>
       </p:sp>
@@ -14430,8 +14430,8 @@
         </p:nvSpPr>
         <p:spPr>
           <a:xfrm>
-            <a:off x="7589520" y="3401568"/>
-            <a:ext cx="3776472" cy="786384"/>
+            <a:off x="7589520" y="2651760"/>
+            <a:ext cx="3776472" cy="457200"/>
           </a:xfrm>
           <a:prstGeom prst="rect">
             <a:avLst/>
@@ -14447,7 +14447,7 @@
               <a:buNone/>
             </a:pPr>
             <a:r>
-              <a:rPr lang="en-US" sz="1400" dirty="0">
+              <a:rPr lang="en-US" sz="1250" dirty="0">
                 <a:solidFill>
                   <a:srgbClr val="1E2235"/>
                 </a:solidFill>
@@ -14455,9 +14455,9 @@
                 <a:ea typeface="Microsoft JhengHei" pitchFamily="34" charset="-122"/>
                 <a:cs typeface="Microsoft JhengHei" pitchFamily="34" charset="-120"/>
               </a:rPr>
-              <a:t>讀取雲端附件、產出新檔案；不存取本機檔案</a:t>
-            </a:r>
-            <a:endParaRPr lang="en-US" sz="1400" dirty="0"/>
+              <a:t>分鐘～數小時（自主執行）</a:t>
+            </a:r>
+            <a:endParaRPr lang="en-US" sz="1250" dirty="0"/>
           </a:p>
         </p:txBody>
       </p:sp>
@@ -14469,8 +14469,8 @@
         </p:nvSpPr>
         <p:spPr>
           <a:xfrm>
-            <a:off x="640080" y="4187952"/>
-            <a:ext cx="10908792" cy="786384"/>
+            <a:off x="640080" y="3108960"/>
+            <a:ext cx="10908792" cy="457200"/>
           </a:xfrm>
           <a:prstGeom prst="rect">
             <a:avLst/>
@@ -14489,8 +14489,8 @@
         </p:nvSpPr>
         <p:spPr>
           <a:xfrm>
-            <a:off x="822960" y="4187952"/>
-            <a:ext cx="2468880" cy="786384"/>
+            <a:off x="822960" y="3108960"/>
+            <a:ext cx="2468880" cy="457200"/>
           </a:xfrm>
           <a:prstGeom prst="rect">
             <a:avLst/>
@@ -14506,7 +14506,7 @@
               <a:buNone/>
             </a:pPr>
             <a:r>
-              <a:rPr lang="en-US" sz="1400" b="1" dirty="0">
+              <a:rPr lang="en-US" sz="1250" b="1" dirty="0">
                 <a:solidFill>
                   <a:srgbClr val="1E2235"/>
                 </a:solidFill>
@@ -14514,9 +14514,9 @@
                 <a:ea typeface="Microsoft JhengHei" pitchFamily="34" charset="-122"/>
                 <a:cs typeface="Microsoft JhengHei" pitchFamily="34" charset="-120"/>
               </a:rPr>
-              <a:t>技能運用</a:t>
-            </a:r>
-            <a:endParaRPr lang="en-US" sz="1400" dirty="0"/>
+              <a:t>任務複雜度</a:t>
+            </a:r>
+            <a:endParaRPr lang="en-US" sz="1250" dirty="0"/>
           </a:p>
         </p:txBody>
       </p:sp>
@@ -14528,8 +14528,8 @@
         </p:nvSpPr>
         <p:spPr>
           <a:xfrm>
-            <a:off x="3566160" y="4187952"/>
-            <a:ext cx="3657600" cy="786384"/>
+            <a:off x="3566160" y="3108960"/>
+            <a:ext cx="3657600" cy="457200"/>
           </a:xfrm>
           <a:prstGeom prst="rect">
             <a:avLst/>
@@ -14545,7 +14545,7 @@
               <a:buNone/>
             </a:pPr>
             <a:r>
-              <a:rPr lang="en-US" sz="1400" dirty="0">
+              <a:rPr lang="en-US" sz="1250" dirty="0">
                 <a:solidFill>
                   <a:srgbClr val="5B6079"/>
                 </a:solidFill>
@@ -14553,9 +14553,9 @@
                 <a:ea typeface="Microsoft JhengHei" pitchFamily="34" charset="-122"/>
                 <a:cs typeface="Microsoft JhengHei" pitchFamily="34" charset="-120"/>
               </a:rPr>
-              <a:t>單一對話能力</a:t>
-            </a:r>
-            <a:endParaRPr lang="en-US" sz="1400" dirty="0"/>
+              <a:t>單步驟、單一工作階段</a:t>
+            </a:r>
+            <a:endParaRPr lang="en-US" sz="1250" dirty="0"/>
           </a:p>
         </p:txBody>
       </p:sp>
@@ -14567,8 +14567,8 @@
         </p:nvSpPr>
         <p:spPr>
           <a:xfrm>
-            <a:off x="7589520" y="4187952"/>
-            <a:ext cx="3776472" cy="786384"/>
+            <a:off x="7589520" y="3108960"/>
+            <a:ext cx="3776472" cy="457200"/>
           </a:xfrm>
           <a:prstGeom prst="rect">
             <a:avLst/>
@@ -14584,7 +14584,7 @@
               <a:buNone/>
             </a:pPr>
             <a:r>
-              <a:rPr lang="en-US" sz="1400" dirty="0">
+              <a:rPr lang="en-US" sz="1250" dirty="0">
                 <a:solidFill>
                   <a:srgbClr val="1E2235"/>
                 </a:solidFill>
@@ -14592,9 +14592,9 @@
                 <a:ea typeface="Microsoft JhengHei" pitchFamily="34" charset="-122"/>
                 <a:cs typeface="Microsoft JhengHei" pitchFamily="34" charset="-120"/>
               </a:rPr>
-              <a:t>自動載入 13 個內建技能與自訂技能</a:t>
-            </a:r>
-            <a:endParaRPr lang="en-US" sz="1400" dirty="0"/>
+              <a:t>跨任務與來源的多步驟工作流</a:t>
+            </a:r>
+            <a:endParaRPr lang="en-US" sz="1250" dirty="0"/>
           </a:p>
         </p:txBody>
       </p:sp>
@@ -14606,8 +14606,8 @@
         </p:nvSpPr>
         <p:spPr>
           <a:xfrm>
-            <a:off x="640080" y="4974336"/>
-            <a:ext cx="10908792" cy="786384"/>
+            <a:off x="640080" y="3566160"/>
+            <a:ext cx="10908792" cy="457200"/>
           </a:xfrm>
           <a:prstGeom prst="rect">
             <a:avLst/>
@@ -14626,8 +14626,8 @@
         </p:nvSpPr>
         <p:spPr>
           <a:xfrm>
-            <a:off x="822960" y="4974336"/>
-            <a:ext cx="2468880" cy="786384"/>
+            <a:off x="822960" y="3566160"/>
+            <a:ext cx="2468880" cy="457200"/>
           </a:xfrm>
           <a:prstGeom prst="rect">
             <a:avLst/>
@@ -14643,7 +14643,7 @@
               <a:buNone/>
             </a:pPr>
             <a:r>
-              <a:rPr lang="en-US" sz="1400" b="1" dirty="0">
+              <a:rPr lang="en-US" sz="1250" b="1" dirty="0">
                 <a:solidFill>
                   <a:srgbClr val="1E2235"/>
                 </a:solidFill>
@@ -14651,9 +14651,9 @@
                 <a:ea typeface="Microsoft JhengHei" pitchFamily="34" charset="-122"/>
                 <a:cs typeface="Microsoft JhengHei" pitchFamily="34" charset="-120"/>
               </a:rPr>
-              <a:t>產出</a:t>
-            </a:r>
-            <a:endParaRPr lang="en-US" sz="1400" dirty="0"/>
+              <a:t>檔案處理</a:t>
+            </a:r>
+            <a:endParaRPr lang="en-US" sz="1250" dirty="0"/>
           </a:p>
         </p:txBody>
       </p:sp>
@@ -14665,8 +14665,8 @@
         </p:nvSpPr>
         <p:spPr>
           <a:xfrm>
-            <a:off x="3566160" y="4974336"/>
-            <a:ext cx="3657600" cy="786384"/>
+            <a:off x="3566160" y="3566160"/>
+            <a:ext cx="3657600" cy="457200"/>
           </a:xfrm>
           <a:prstGeom prst="rect">
             <a:avLst/>
@@ -14682,7 +14682,7 @@
               <a:buNone/>
             </a:pPr>
             <a:r>
-              <a:rPr lang="en-US" sz="1400" dirty="0">
+              <a:rPr lang="en-US" sz="1250" dirty="0">
                 <a:solidFill>
                   <a:srgbClr val="5B6079"/>
                 </a:solidFill>
@@ -14690,9 +14690,9 @@
                 <a:ea typeface="Microsoft JhengHei" pitchFamily="34" charset="-122"/>
                 <a:cs typeface="Microsoft JhengHei" pitchFamily="34" charset="-120"/>
               </a:rPr>
-              <a:t>聊天視窗的文字</a:t>
-            </a:r>
-            <a:endParaRPr lang="en-US" sz="1400" dirty="0"/>
+              <a:t>貼上片段內容</a:t>
+            </a:r>
+            <a:endParaRPr lang="en-US" sz="1250" dirty="0"/>
           </a:p>
         </p:txBody>
       </p:sp>
@@ -14704,8 +14704,8 @@
         </p:nvSpPr>
         <p:spPr>
           <a:xfrm>
-            <a:off x="7589520" y="4974336"/>
-            <a:ext cx="3776472" cy="786384"/>
+            <a:off x="7589520" y="3566160"/>
+            <a:ext cx="3776472" cy="457200"/>
           </a:xfrm>
           <a:prstGeom prst="rect">
             <a:avLst/>
@@ -14721,7 +14721,7 @@
               <a:buNone/>
             </a:pPr>
             <a:r>
-              <a:rPr lang="en-US" sz="1400" dirty="0">
+              <a:rPr lang="en-US" sz="1250" dirty="0">
                 <a:solidFill>
                   <a:srgbClr val="1E2235"/>
                 </a:solidFill>
@@ -14729,9 +14729,9 @@
                 <a:ea typeface="Microsoft JhengHei" pitchFamily="34" charset="-122"/>
                 <a:cs typeface="Microsoft JhengHei" pitchFamily="34" charset="-120"/>
               </a:rPr>
-              <a:t>OneDrive 中真實的文件、試算表、簡報</a:t>
-            </a:r>
-            <a:endParaRPr lang="en-US" sz="1400" dirty="0"/>
+              <a:t>讀取雲端附件、產出新檔案；不存取本機檔案</a:t>
+            </a:r>
+            <a:endParaRPr lang="en-US" sz="1250" dirty="0"/>
           </a:p>
         </p:txBody>
       </p:sp>
@@ -14743,8 +14743,8 @@
         </p:nvSpPr>
         <p:spPr>
           <a:xfrm>
-            <a:off x="640080" y="5760720"/>
-            <a:ext cx="10908792" cy="786384"/>
+            <a:off x="640080" y="4023360"/>
+            <a:ext cx="10908792" cy="457200"/>
           </a:xfrm>
           <a:prstGeom prst="rect">
             <a:avLst/>
@@ -14763,8 +14763,8 @@
         </p:nvSpPr>
         <p:spPr>
           <a:xfrm>
-            <a:off x="822960" y="5760720"/>
-            <a:ext cx="2468880" cy="786384"/>
+            <a:off x="822960" y="4023360"/>
+            <a:ext cx="2468880" cy="457200"/>
           </a:xfrm>
           <a:prstGeom prst="rect">
             <a:avLst/>
@@ -14780,7 +14780,7 @@
               <a:buNone/>
             </a:pPr>
             <a:r>
-              <a:rPr lang="en-US" sz="1400" b="1" dirty="0">
+              <a:rPr lang="en-US" sz="1250" b="1" dirty="0">
                 <a:solidFill>
                   <a:srgbClr val="1E2235"/>
                 </a:solidFill>
@@ -14788,22 +14788,570 @@
                 <a:ea typeface="Microsoft JhengHei" pitchFamily="34" charset="-122"/>
                 <a:cs typeface="Microsoft JhengHei" pitchFamily="34" charset="-120"/>
               </a:rPr>
+              <a:t>技能運用</a:t>
+            </a:r>
+            <a:endParaRPr lang="en-US" sz="1250" dirty="0"/>
+          </a:p>
+        </p:txBody>
+      </p:sp>
+      <p:sp>
+        <p:nvSpPr>
+          <p:cNvPr id="29" name="Text 27"/>
+          <p:cNvSpPr/>
+          <p:nvPr/>
+        </p:nvSpPr>
+        <p:spPr>
+          <a:xfrm>
+            <a:off x="3566160" y="4023360"/>
+            <a:ext cx="3657600" cy="457200"/>
+          </a:xfrm>
+          <a:prstGeom prst="rect">
+            <a:avLst/>
+          </a:prstGeom>
+          <a:noFill/>
+          <a:ln/>
+        </p:spPr>
+        <p:txBody>
+          <a:bodyPr wrap="square" rtlCol="0" anchor="ctr"/>
+          <a:lstStyle/>
+          <a:p>
+            <a:pPr indent="0" marL="0">
+              <a:buNone/>
+            </a:pPr>
+            <a:r>
+              <a:rPr lang="en-US" sz="1250" dirty="0">
+                <a:solidFill>
+                  <a:srgbClr val="5B6079"/>
+                </a:solidFill>
+                <a:latin typeface="Microsoft JhengHei" pitchFamily="34" charset="0"/>
+                <a:ea typeface="Microsoft JhengHei" pitchFamily="34" charset="-122"/>
+                <a:cs typeface="Microsoft JhengHei" pitchFamily="34" charset="-120"/>
+              </a:rPr>
+              <a:t>單一對話能力</a:t>
+            </a:r>
+            <a:endParaRPr lang="en-US" sz="1250" dirty="0"/>
+          </a:p>
+        </p:txBody>
+      </p:sp>
+      <p:sp>
+        <p:nvSpPr>
+          <p:cNvPr id="30" name="Text 28"/>
+          <p:cNvSpPr/>
+          <p:nvPr/>
+        </p:nvSpPr>
+        <p:spPr>
+          <a:xfrm>
+            <a:off x="7589520" y="4023360"/>
+            <a:ext cx="3776472" cy="457200"/>
+          </a:xfrm>
+          <a:prstGeom prst="rect">
+            <a:avLst/>
+          </a:prstGeom>
+          <a:noFill/>
+          <a:ln/>
+        </p:spPr>
+        <p:txBody>
+          <a:bodyPr wrap="square" rtlCol="0" anchor="ctr"/>
+          <a:lstStyle/>
+          <a:p>
+            <a:pPr indent="0" marL="0">
+              <a:buNone/>
+            </a:pPr>
+            <a:r>
+              <a:rPr lang="en-US" sz="1250" dirty="0">
+                <a:solidFill>
+                  <a:srgbClr val="1E2235"/>
+                </a:solidFill>
+                <a:latin typeface="Microsoft JhengHei" pitchFamily="34" charset="0"/>
+                <a:ea typeface="Microsoft JhengHei" pitchFamily="34" charset="-122"/>
+                <a:cs typeface="Microsoft JhengHei" pitchFamily="34" charset="-120"/>
+              </a:rPr>
+              <a:t>自動載入 13 個內建技能與自訂技能</a:t>
+            </a:r>
+            <a:endParaRPr lang="en-US" sz="1250" dirty="0"/>
+          </a:p>
+        </p:txBody>
+      </p:sp>
+      <p:sp>
+        <p:nvSpPr>
+          <p:cNvPr id="31" name="Shape 29"/>
+          <p:cNvSpPr/>
+          <p:nvPr/>
+        </p:nvSpPr>
+        <p:spPr>
+          <a:xfrm>
+            <a:off x="640080" y="4480560"/>
+            <a:ext cx="10908792" cy="457200"/>
+          </a:xfrm>
+          <a:prstGeom prst="rect">
+            <a:avLst/>
+          </a:prstGeom>
+          <a:solidFill>
+            <a:srgbClr val="FFFFFF"/>
+          </a:solidFill>
+          <a:ln/>
+        </p:spPr>
+      </p:sp>
+      <p:sp>
+        <p:nvSpPr>
+          <p:cNvPr id="32" name="Text 30"/>
+          <p:cNvSpPr/>
+          <p:nvPr/>
+        </p:nvSpPr>
+        <p:spPr>
+          <a:xfrm>
+            <a:off x="822960" y="4480560"/>
+            <a:ext cx="2468880" cy="457200"/>
+          </a:xfrm>
+          <a:prstGeom prst="rect">
+            <a:avLst/>
+          </a:prstGeom>
+          <a:noFill/>
+          <a:ln/>
+        </p:spPr>
+        <p:txBody>
+          <a:bodyPr wrap="square" rtlCol="0" anchor="ctr"/>
+          <a:lstStyle/>
+          <a:p>
+            <a:pPr indent="0" marL="0">
+              <a:buNone/>
+            </a:pPr>
+            <a:r>
+              <a:rPr lang="en-US" sz="1250" b="1" dirty="0">
+                <a:solidFill>
+                  <a:srgbClr val="1E2235"/>
+                </a:solidFill>
+                <a:latin typeface="Microsoft JhengHei" pitchFamily="34" charset="0"/>
+                <a:ea typeface="Microsoft JhengHei" pitchFamily="34" charset="-122"/>
+                <a:cs typeface="Microsoft JhengHei" pitchFamily="34" charset="-120"/>
+              </a:rPr>
+              <a:t>產出</a:t>
+            </a:r>
+            <a:endParaRPr lang="en-US" sz="1250" dirty="0"/>
+          </a:p>
+        </p:txBody>
+      </p:sp>
+      <p:sp>
+        <p:nvSpPr>
+          <p:cNvPr id="33" name="Text 31"/>
+          <p:cNvSpPr/>
+          <p:nvPr/>
+        </p:nvSpPr>
+        <p:spPr>
+          <a:xfrm>
+            <a:off x="3566160" y="4480560"/>
+            <a:ext cx="3657600" cy="457200"/>
+          </a:xfrm>
+          <a:prstGeom prst="rect">
+            <a:avLst/>
+          </a:prstGeom>
+          <a:noFill/>
+          <a:ln/>
+        </p:spPr>
+        <p:txBody>
+          <a:bodyPr wrap="square" rtlCol="0" anchor="ctr"/>
+          <a:lstStyle/>
+          <a:p>
+            <a:pPr indent="0" marL="0">
+              <a:buNone/>
+            </a:pPr>
+            <a:r>
+              <a:rPr lang="en-US" sz="1250" dirty="0">
+                <a:solidFill>
+                  <a:srgbClr val="5B6079"/>
+                </a:solidFill>
+                <a:latin typeface="Microsoft JhengHei" pitchFamily="34" charset="0"/>
+                <a:ea typeface="Microsoft JhengHei" pitchFamily="34" charset="-122"/>
+                <a:cs typeface="Microsoft JhengHei" pitchFamily="34" charset="-120"/>
+              </a:rPr>
+              <a:t>聊天視窗的文字</a:t>
+            </a:r>
+            <a:endParaRPr lang="en-US" sz="1250" dirty="0"/>
+          </a:p>
+        </p:txBody>
+      </p:sp>
+      <p:sp>
+        <p:nvSpPr>
+          <p:cNvPr id="34" name="Text 32"/>
+          <p:cNvSpPr/>
+          <p:nvPr/>
+        </p:nvSpPr>
+        <p:spPr>
+          <a:xfrm>
+            <a:off x="7589520" y="4480560"/>
+            <a:ext cx="3776472" cy="457200"/>
+          </a:xfrm>
+          <a:prstGeom prst="rect">
+            <a:avLst/>
+          </a:prstGeom>
+          <a:noFill/>
+          <a:ln/>
+        </p:spPr>
+        <p:txBody>
+          <a:bodyPr wrap="square" rtlCol="0" anchor="ctr"/>
+          <a:lstStyle/>
+          <a:p>
+            <a:pPr indent="0" marL="0">
+              <a:buNone/>
+            </a:pPr>
+            <a:r>
+              <a:rPr lang="en-US" sz="1250" dirty="0">
+                <a:solidFill>
+                  <a:srgbClr val="1E2235"/>
+                </a:solidFill>
+                <a:latin typeface="Microsoft JhengHei" pitchFamily="34" charset="0"/>
+                <a:ea typeface="Microsoft JhengHei" pitchFamily="34" charset="-122"/>
+                <a:cs typeface="Microsoft JhengHei" pitchFamily="34" charset="-120"/>
+              </a:rPr>
+              <a:t>OneDrive 中真實的文件、試算表、簡報</a:t>
+            </a:r>
+            <a:endParaRPr lang="en-US" sz="1250" dirty="0"/>
+          </a:p>
+        </p:txBody>
+      </p:sp>
+      <p:sp>
+        <p:nvSpPr>
+          <p:cNvPr id="35" name="Shape 33"/>
+          <p:cNvSpPr/>
+          <p:nvPr/>
+        </p:nvSpPr>
+        <p:spPr>
+          <a:xfrm>
+            <a:off x="640080" y="4937760"/>
+            <a:ext cx="10908792" cy="457200"/>
+          </a:xfrm>
+          <a:prstGeom prst="rect">
+            <a:avLst/>
+          </a:prstGeom>
+          <a:solidFill>
+            <a:srgbClr val="F2F4FB"/>
+          </a:solidFill>
+          <a:ln/>
+        </p:spPr>
+      </p:sp>
+      <p:sp>
+        <p:nvSpPr>
+          <p:cNvPr id="36" name="Text 34"/>
+          <p:cNvSpPr/>
+          <p:nvPr/>
+        </p:nvSpPr>
+        <p:spPr>
+          <a:xfrm>
+            <a:off x="822960" y="4937760"/>
+            <a:ext cx="2468880" cy="457200"/>
+          </a:xfrm>
+          <a:prstGeom prst="rect">
+            <a:avLst/>
+          </a:prstGeom>
+          <a:noFill/>
+          <a:ln/>
+        </p:spPr>
+        <p:txBody>
+          <a:bodyPr wrap="square" rtlCol="0" anchor="ctr"/>
+          <a:lstStyle/>
+          <a:p>
+            <a:pPr indent="0" marL="0">
+              <a:buNone/>
+            </a:pPr>
+            <a:r>
+              <a:rPr lang="en-US" sz="1250" b="1" dirty="0">
+                <a:solidFill>
+                  <a:srgbClr val="1E2235"/>
+                </a:solidFill>
+                <a:latin typeface="Microsoft JhengHei" pitchFamily="34" charset="0"/>
+                <a:ea typeface="Microsoft JhengHei" pitchFamily="34" charset="-122"/>
+                <a:cs typeface="Microsoft JhengHei" pitchFamily="34" charset="-120"/>
+              </a:rPr>
+              <a:t>自動啟動</a:t>
+            </a:r>
+            <a:endParaRPr lang="en-US" sz="1250" dirty="0"/>
+          </a:p>
+        </p:txBody>
+      </p:sp>
+      <p:sp>
+        <p:nvSpPr>
+          <p:cNvPr id="37" name="Text 35"/>
+          <p:cNvSpPr/>
+          <p:nvPr/>
+        </p:nvSpPr>
+        <p:spPr>
+          <a:xfrm>
+            <a:off x="3566160" y="4937760"/>
+            <a:ext cx="3657600" cy="457200"/>
+          </a:xfrm>
+          <a:prstGeom prst="rect">
+            <a:avLst/>
+          </a:prstGeom>
+          <a:noFill/>
+          <a:ln/>
+        </p:spPr>
+        <p:txBody>
+          <a:bodyPr wrap="square" rtlCol="0" anchor="ctr"/>
+          <a:lstStyle/>
+          <a:p>
+            <a:pPr indent="0" marL="0">
+              <a:buNone/>
+            </a:pPr>
+            <a:r>
+              <a:rPr lang="en-US" sz="1250" dirty="0">
+                <a:solidFill>
+                  <a:srgbClr val="5B6079"/>
+                </a:solidFill>
+                <a:latin typeface="Microsoft JhengHei" pitchFamily="34" charset="0"/>
+                <a:ea typeface="Microsoft JhengHei" pitchFamily="34" charset="-122"/>
+                <a:cs typeface="Microsoft JhengHei" pitchFamily="34" charset="-120"/>
+              </a:rPr>
+              <a:t>每次都要你開啟並下指令</a:t>
+            </a:r>
+            <a:endParaRPr lang="en-US" sz="1250" dirty="0"/>
+          </a:p>
+        </p:txBody>
+      </p:sp>
+      <p:sp>
+        <p:nvSpPr>
+          <p:cNvPr id="38" name="Text 36"/>
+          <p:cNvSpPr/>
+          <p:nvPr/>
+        </p:nvSpPr>
+        <p:spPr>
+          <a:xfrm>
+            <a:off x="7589520" y="4937760"/>
+            <a:ext cx="3776472" cy="457200"/>
+          </a:xfrm>
+          <a:prstGeom prst="rect">
+            <a:avLst/>
+          </a:prstGeom>
+          <a:noFill/>
+          <a:ln/>
+        </p:spPr>
+        <p:txBody>
+          <a:bodyPr wrap="square" rtlCol="0" anchor="ctr"/>
+          <a:lstStyle/>
+          <a:p>
+            <a:pPr indent="0" marL="0">
+              <a:buNone/>
+            </a:pPr>
+            <a:r>
+              <a:rPr lang="en-US" sz="1250" dirty="0">
+                <a:solidFill>
+                  <a:srgbClr val="1E2235"/>
+                </a:solidFill>
+                <a:latin typeface="Microsoft JhengHei" pitchFamily="34" charset="0"/>
+                <a:ea typeface="Microsoft JhengHei" pitchFamily="34" charset="-122"/>
+                <a:cs typeface="Microsoft JhengHei" pitchFamily="34" charset="-120"/>
+              </a:rPr>
+              <a:t>排程提示／事件觸發：收信或被 @提及時自動執行</a:t>
+            </a:r>
+            <a:endParaRPr lang="en-US" sz="1250" dirty="0"/>
+          </a:p>
+        </p:txBody>
+      </p:sp>
+      <p:sp>
+        <p:nvSpPr>
+          <p:cNvPr id="39" name="Shape 37"/>
+          <p:cNvSpPr/>
+          <p:nvPr/>
+        </p:nvSpPr>
+        <p:spPr>
+          <a:xfrm>
+            <a:off x="640080" y="5394960"/>
+            <a:ext cx="10908792" cy="457200"/>
+          </a:xfrm>
+          <a:prstGeom prst="rect">
+            <a:avLst/>
+          </a:prstGeom>
+          <a:solidFill>
+            <a:srgbClr val="FFFFFF"/>
+          </a:solidFill>
+          <a:ln/>
+        </p:spPr>
+      </p:sp>
+      <p:sp>
+        <p:nvSpPr>
+          <p:cNvPr id="40" name="Text 38"/>
+          <p:cNvSpPr/>
+          <p:nvPr/>
+        </p:nvSpPr>
+        <p:spPr>
+          <a:xfrm>
+            <a:off x="822960" y="5394960"/>
+            <a:ext cx="2468880" cy="457200"/>
+          </a:xfrm>
+          <a:prstGeom prst="rect">
+            <a:avLst/>
+          </a:prstGeom>
+          <a:noFill/>
+          <a:ln/>
+        </p:spPr>
+        <p:txBody>
+          <a:bodyPr wrap="square" rtlCol="0" anchor="ctr"/>
+          <a:lstStyle/>
+          <a:p>
+            <a:pPr indent="0" marL="0">
+              <a:buNone/>
+            </a:pPr>
+            <a:r>
+              <a:rPr lang="en-US" sz="1250" b="1" dirty="0">
+                <a:solidFill>
+                  <a:srgbClr val="1E2235"/>
+                </a:solidFill>
+                <a:latin typeface="Microsoft JhengHei" pitchFamily="34" charset="0"/>
+                <a:ea typeface="Microsoft JhengHei" pitchFamily="34" charset="-122"/>
+                <a:cs typeface="Microsoft JhengHei" pitchFamily="34" charset="-120"/>
+              </a:rPr>
+              <a:t>外部系統</a:t>
+            </a:r>
+            <a:endParaRPr lang="en-US" sz="1250" dirty="0"/>
+          </a:p>
+        </p:txBody>
+      </p:sp>
+      <p:sp>
+        <p:nvSpPr>
+          <p:cNvPr id="41" name="Text 39"/>
+          <p:cNvSpPr/>
+          <p:nvPr/>
+        </p:nvSpPr>
+        <p:spPr>
+          <a:xfrm>
+            <a:off x="3566160" y="5394960"/>
+            <a:ext cx="3657600" cy="457200"/>
+          </a:xfrm>
+          <a:prstGeom prst="rect">
+            <a:avLst/>
+          </a:prstGeom>
+          <a:noFill/>
+          <a:ln/>
+        </p:spPr>
+        <p:txBody>
+          <a:bodyPr wrap="square" rtlCol="0" anchor="ctr"/>
+          <a:lstStyle/>
+          <a:p>
+            <a:pPr indent="0" marL="0">
+              <a:buNone/>
+            </a:pPr>
+            <a:r>
+              <a:rPr lang="en-US" sz="1250" dirty="0">
+                <a:solidFill>
+                  <a:srgbClr val="5B6079"/>
+                </a:solidFill>
+                <a:latin typeface="Microsoft JhengHei" pitchFamily="34" charset="0"/>
+                <a:ea typeface="Microsoft JhengHei" pitchFamily="34" charset="-122"/>
+                <a:cs typeface="Microsoft JhengHei" pitchFamily="34" charset="-120"/>
+              </a:rPr>
+              <a:t>接地於 M365 資料</a:t>
+            </a:r>
+            <a:endParaRPr lang="en-US" sz="1250" dirty="0"/>
+          </a:p>
+        </p:txBody>
+      </p:sp>
+      <p:sp>
+        <p:nvSpPr>
+          <p:cNvPr id="42" name="Text 40"/>
+          <p:cNvSpPr/>
+          <p:nvPr/>
+        </p:nvSpPr>
+        <p:spPr>
+          <a:xfrm>
+            <a:off x="7589520" y="5394960"/>
+            <a:ext cx="3776472" cy="457200"/>
+          </a:xfrm>
+          <a:prstGeom prst="rect">
+            <a:avLst/>
+          </a:prstGeom>
+          <a:noFill/>
+          <a:ln/>
+        </p:spPr>
+        <p:txBody>
+          <a:bodyPr wrap="square" rtlCol="0" anchor="ctr"/>
+          <a:lstStyle/>
+          <a:p>
+            <a:pPr indent="0" marL="0">
+              <a:buNone/>
+            </a:pPr>
+            <a:r>
+              <a:rPr lang="en-US" sz="1250" dirty="0">
+                <a:solidFill>
+                  <a:srgbClr val="1E2235"/>
+                </a:solidFill>
+                <a:latin typeface="Microsoft JhengHei" pitchFamily="34" charset="0"/>
+                <a:ea typeface="Microsoft JhengHei" pitchFamily="34" charset="-122"/>
+                <a:cs typeface="Microsoft JhengHei" pitchFamily="34" charset="-120"/>
+              </a:rPr>
+              <a:t>可透過 Plugins／MCP 連 D365、SAP、Fabric 等</a:t>
+            </a:r>
+            <a:endParaRPr lang="en-US" sz="1250" dirty="0"/>
+          </a:p>
+        </p:txBody>
+      </p:sp>
+      <p:sp>
+        <p:nvSpPr>
+          <p:cNvPr id="43" name="Shape 41"/>
+          <p:cNvSpPr/>
+          <p:nvPr/>
+        </p:nvSpPr>
+        <p:spPr>
+          <a:xfrm>
+            <a:off x="640080" y="5852160"/>
+            <a:ext cx="10908792" cy="457200"/>
+          </a:xfrm>
+          <a:prstGeom prst="rect">
+            <a:avLst/>
+          </a:prstGeom>
+          <a:solidFill>
+            <a:srgbClr val="F2F4FB"/>
+          </a:solidFill>
+          <a:ln/>
+        </p:spPr>
+      </p:sp>
+      <p:sp>
+        <p:nvSpPr>
+          <p:cNvPr id="44" name="Text 42"/>
+          <p:cNvSpPr/>
+          <p:nvPr/>
+        </p:nvSpPr>
+        <p:spPr>
+          <a:xfrm>
+            <a:off x="822960" y="5852160"/>
+            <a:ext cx="2468880" cy="457200"/>
+          </a:xfrm>
+          <a:prstGeom prst="rect">
+            <a:avLst/>
+          </a:prstGeom>
+          <a:noFill/>
+          <a:ln/>
+        </p:spPr>
+        <p:txBody>
+          <a:bodyPr wrap="square" rtlCol="0" anchor="ctr"/>
+          <a:lstStyle/>
+          <a:p>
+            <a:pPr indent="0" marL="0">
+              <a:buNone/>
+            </a:pPr>
+            <a:r>
+              <a:rPr lang="en-US" sz="1250" b="1" dirty="0">
+                <a:solidFill>
+                  <a:srgbClr val="1E2235"/>
+                </a:solidFill>
+                <a:latin typeface="Microsoft JhengHei" pitchFamily="34" charset="0"/>
+                <a:ea typeface="Microsoft JhengHei" pitchFamily="34" charset="-122"/>
+                <a:cs typeface="Microsoft JhengHei" pitchFamily="34" charset="-120"/>
+              </a:rPr>
               <a:t>把關</a:t>
             </a:r>
-            <a:endParaRPr lang="en-US" sz="1400" dirty="0"/>
-          </a:p>
-        </p:txBody>
-      </p:sp>
-      <p:sp>
-        <p:nvSpPr>
-          <p:cNvPr id="29" name="Text 27"/>
-          <p:cNvSpPr/>
-          <p:nvPr/>
-        </p:nvSpPr>
-        <p:spPr>
-          <a:xfrm>
-            <a:off x="3566160" y="5760720"/>
-            <a:ext cx="3657600" cy="786384"/>
+            <a:endParaRPr lang="en-US" sz="1250" dirty="0"/>
+          </a:p>
+        </p:txBody>
+      </p:sp>
+      <p:sp>
+        <p:nvSpPr>
+          <p:cNvPr id="45" name="Text 43"/>
+          <p:cNvSpPr/>
+          <p:nvPr/>
+        </p:nvSpPr>
+        <p:spPr>
+          <a:xfrm>
+            <a:off x="3566160" y="5852160"/>
+            <a:ext cx="3657600" cy="457200"/>
           </a:xfrm>
           <a:prstGeom prst="rect">
             <a:avLst/>
@@ -14819,7 +15367,7 @@
               <a:buNone/>
             </a:pPr>
             <a:r>
-              <a:rPr lang="en-US" sz="1400" dirty="0">
+              <a:rPr lang="en-US" sz="1250" dirty="0">
                 <a:solidFill>
                   <a:srgbClr val="5B6079"/>
                 </a:solidFill>
@@ -14829,20 +15377,20 @@
               </a:rPr>
               <a:t>你自行判斷</a:t>
             </a:r>
-            <a:endParaRPr lang="en-US" sz="1400" dirty="0"/>
-          </a:p>
-        </p:txBody>
-      </p:sp>
-      <p:sp>
-        <p:nvSpPr>
-          <p:cNvPr id="30" name="Text 28"/>
-          <p:cNvSpPr/>
-          <p:nvPr/>
-        </p:nvSpPr>
-        <p:spPr>
-          <a:xfrm>
-            <a:off x="7589520" y="5760720"/>
-            <a:ext cx="3776472" cy="786384"/>
+            <a:endParaRPr lang="en-US" sz="1250" dirty="0"/>
+          </a:p>
+        </p:txBody>
+      </p:sp>
+      <p:sp>
+        <p:nvSpPr>
+          <p:cNvPr id="46" name="Text 44"/>
+          <p:cNvSpPr/>
+          <p:nvPr/>
+        </p:nvSpPr>
+        <p:spPr>
+          <a:xfrm>
+            <a:off x="7589520" y="5852160"/>
+            <a:ext cx="3776472" cy="457200"/>
           </a:xfrm>
           <a:prstGeom prst="rect">
             <a:avLst/>
@@ -14858,7 +15406,7 @@
               <a:buNone/>
             </a:pPr>
             <a:r>
-              <a:rPr lang="en-US" sz="1400" dirty="0">
+              <a:rPr lang="en-US" sz="1250" dirty="0">
                 <a:solidFill>
                   <a:srgbClr val="1E2235"/>
                 </a:solidFill>
@@ -14868,13 +15416,13 @@
               </a:rPr>
               <a:t>中高風險動作顯示風險等級，核准後才執行</a:t>
             </a:r>
-            <a:endParaRPr lang="en-US" sz="1400" dirty="0"/>
-          </a:p>
-        </p:txBody>
-      </p:sp>
-      <p:sp>
-        <p:nvSpPr>
-          <p:cNvPr id="31" name="Text 29"/>
+            <a:endParaRPr lang="en-US" sz="1250" dirty="0"/>
+          </a:p>
+        </p:txBody>
+      </p:sp>
+      <p:sp>
+        <p:nvSpPr>
+          <p:cNvPr id="47" name="Text 45"/>
           <p:cNvSpPr/>
           <p:nvPr/>
         </p:nvSpPr>
@@ -14913,7 +15461,7 @@
       </p:sp>
       <p:sp>
         <p:nvSpPr>
-          <p:cNvPr id="32" name="Text 30"/>
+          <p:cNvPr id="48" name="Text 46"/>
           <p:cNvSpPr/>
           <p:nvPr/>
         </p:nvSpPr>
@@ -15392,7 +15940,7 @@
                 <a:ea typeface="Microsoft JhengHei" pitchFamily="34" charset="-122"/>
                 <a:cs typeface="Microsoft JhengHei" pitchFamily="34" charset="-120"/>
               </a:rPr>
-              <a:t>右側面板同時呈現「參考」輸入檔、「輸出」產出檔與「技能」，過程透明可追。</a:t>
+              <a:t>右側面板同時呈現進度、輸入檔、輸出檔、已載入技能、排程與已核准權限，過程透明可追。</a:t>
             </a:r>
             <a:endParaRPr lang="en-US" sz="1300" dirty="0"/>
           </a:p>
@@ -15551,7 +16099,7 @@
                 <a:ea typeface="Microsoft JhengHei" pitchFamily="34" charset="-122"/>
                 <a:cs typeface="Microsoft JhengHei" pitchFamily="34" charset="-120"/>
               </a:rPr>
-              <a:t>中高風險動作顯示 RISK-LEVEL；可核准、取消，或設定 per-recipient／per-domain／always 的 don’t ask again。</a:t>
+              <a:t>中高風險動作顯示 RISK-LEVEL；可核准、取消，或設定 per-recipient／per-domain／always 的 don’t ask again；多筆待審可「Approve All」。</a:t>
             </a:r>
             <a:endParaRPr lang="en-US" sz="1300" dirty="0"/>
           </a:p>
@@ -15710,7 +16258,7 @@
                 <a:ea typeface="Microsoft JhengHei" pitchFamily="34" charset="-122"/>
                 <a:cs typeface="Microsoft JhengHei" pitchFamily="34" charset="-120"/>
               </a:rPr>
-              <a:t>本機 Edge 瀏覽器（預覽・僅限網頁版）、Imagen 2 影像生成、模型選擇器新增 Sonnet+Opus 顧問配對、排程提示／事件驅動任務（信件或 @提及自動觸發）、Download-All zip（50 檔／500MB）。</a:t>
+              <a:t>本機 Edge 瀏覽器（預設停用，需管理員開啟＋Edge 150 以上）、ChatGPT Images 2.0 影像生成、品牌範本自動套用簡報、Plugins／MCP 連外部系統、排程與事件觸發任務。</a:t>
             </a:r>
             <a:endParaRPr lang="en-US" sz="1300" dirty="0"/>
           </a:p>

--- a/CoworkPlaybook/Cowork_教育訓練簡報_金融版.pptx
+++ b/CoworkPlaybook/Cowork_教育訓練簡報_金融版.pptx
@@ -26,9 +26,10 @@
     <p:sldId id="274" r:id="rId20"/>
     <p:sldId id="275" r:id="rId21"/>
     <p:sldId id="276" r:id="rId22"/>
+    <p:sldId id="277" r:id="rId23"/>
   </p:sldIdLst>
   <p:notesMasterIdLst>
-    <p:notesMasterId r:id="rId23"/>
+    <p:notesMasterId r:id="rId24"/>
   </p:notesMasterIdLst>
   <p:sldSz cx="12191695" cy="6858000"/>
   <p:notesSz cx="6858000" cy="12191695"/>
@@ -1690,6 +1691,94 @@
             <a:fld id="{F7021451-1387-4CA6-816F-3879F97B5CBC}" type="slidenum">
               <a:rPr lang="en-US"/>
               <a:t>21</a:t>
+            </a:fld>
+            <a:endParaRPr lang="en-US"/>
+          </a:p>
+        </p:txBody>
+      </p:sp>
+    </p:spTree>
+    <p:extLst>
+      <p:ext uri="{BB962C8B-B14F-4D97-AF65-F5344CB8AC3E}">
+        <p14:creationId xmlns:p14="http://schemas.microsoft.com/office/powerpoint/2010/main" val="1024086991"/>
+      </p:ext>
+    </p:extLst>
+  </p:cSld>
+  <p:clrMapOvr>
+    <a:masterClrMapping/>
+  </p:clrMapOvr>
+</p:notes>
+</file>
+
+<file path=ppt/notesSlides/notesSlide22.xml><?xml version="1.0" encoding="utf-8"?>
+<p:notes xmlns:a="http://schemas.openxmlformats.org/drawingml/2006/main" xmlns:r="http://schemas.openxmlformats.org/officeDocument/2006/relationships" xmlns:p="http://schemas.openxmlformats.org/presentationml/2006/main">
+  <p:cSld>
+    <p:spTree>
+      <p:nvGrpSpPr>
+        <p:cNvPr id="1" name=""/>
+        <p:cNvGrpSpPr/>
+        <p:nvPr/>
+      </p:nvGrpSpPr>
+      <p:grpSpPr>
+        <a:xfrm>
+          <a:off x="0" y="0"/>
+          <a:ext cx="0" cy="0"/>
+          <a:chOff x="0" y="0"/>
+          <a:chExt cx="0" cy="0"/>
+        </a:xfrm>
+      </p:grpSpPr>
+      <p:sp>
+        <p:nvSpPr>
+          <p:cNvPr id="2" name="Slide Image Placeholder 1"/>
+          <p:cNvSpPr>
+            <a:spLocks noGrp="1" noRot="1" noChangeAspect="1"/>
+          </p:cNvSpPr>
+          <p:nvPr>
+            <p:ph type="sldImg"/>
+          </p:nvPr>
+        </p:nvSpPr>
+        <p:spPr/>
+      </p:sp>
+      <p:sp>
+        <p:nvSpPr>
+          <p:cNvPr id="3" name="Notes Placeholder 2"/>
+          <p:cNvSpPr>
+            <a:spLocks noGrp="1"/>
+          </p:cNvSpPr>
+          <p:nvPr>
+            <p:ph type="body" idx="1"/>
+          </p:nvPr>
+        </p:nvSpPr>
+        <p:spPr/>
+        <p:txBody>
+          <a:bodyPr/>
+          <a:lstStyle/>
+          <a:p>
+            <a:r>
+              <a:rPr lang="en-US" dirty="0"/>
+              <a:t/>
+            </a:r>
+            <a:endParaRPr lang="en-US" dirty="0"/>
+          </a:p>
+        </p:txBody>
+      </p:sp>
+      <p:sp>
+        <p:nvSpPr>
+          <p:cNvPr id="4" name="Slide Number Placeholder 3"/>
+          <p:cNvSpPr>
+            <a:spLocks noGrp="1"/>
+          </p:cNvSpPr>
+          <p:nvPr>
+            <p:ph type="sldNum" sz="quarter" idx="10"/>
+          </p:nvPr>
+        </p:nvSpPr>
+        <p:spPr/>
+        <p:txBody>
+          <a:bodyPr/>
+          <a:lstStyle/>
+          <a:p>
+            <a:fld id="{F7021451-1387-4CA6-816F-3879F97B5CBC}" type="slidenum">
+              <a:rPr lang="en-US"/>
+              <a:t>22</a:t>
             </a:fld>
             <a:endParaRPr lang="en-US"/>
           </a:p>
@@ -2951,6 +3040,677 @@
     <p:bg>
       <p:bgPr>
         <a:solidFill>
+          <a:srgbClr val="F7F8FC"/>
+        </a:solidFill>
+      </p:bgPr>
+    </p:bg>
+    <p:spTree>
+      <p:nvGrpSpPr>
+        <p:cNvPr id="1" name=""/>
+        <p:cNvGrpSpPr/>
+        <p:nvPr/>
+      </p:nvGrpSpPr>
+      <p:grpSpPr>
+        <a:xfrm>
+          <a:off x="0" y="0"/>
+          <a:ext cx="0" cy="0"/>
+          <a:chOff x="0" y="0"/>
+          <a:chExt cx="0" cy="0"/>
+        </a:xfrm>
+      </p:grpSpPr>
+      <p:sp>
+        <p:nvSpPr>
+          <p:cNvPr id="2" name="Shape 0"/>
+          <p:cNvSpPr/>
+          <p:nvPr/>
+        </p:nvSpPr>
+        <p:spPr>
+          <a:xfrm>
+            <a:off x="640080" y="566928"/>
+            <a:ext cx="384048" cy="128016"/>
+          </a:xfrm>
+          <a:prstGeom prst="rect">
+            <a:avLst/>
+          </a:prstGeom>
+          <a:solidFill>
+            <a:srgbClr val="0A7C4A"/>
+          </a:solidFill>
+          <a:ln/>
+        </p:spPr>
+      </p:sp>
+      <p:sp>
+        <p:nvSpPr>
+          <p:cNvPr id="3" name="Text 1"/>
+          <p:cNvSpPr/>
+          <p:nvPr/>
+        </p:nvSpPr>
+        <p:spPr>
+          <a:xfrm>
+            <a:off x="1143000" y="457200"/>
+            <a:ext cx="8229600" cy="310896"/>
+          </a:xfrm>
+          <a:prstGeom prst="rect">
+            <a:avLst/>
+          </a:prstGeom>
+          <a:noFill/>
+          <a:ln/>
+        </p:spPr>
+        <p:txBody>
+          <a:bodyPr wrap="square" rtlCol="0" anchor="ctr"/>
+          <a:lstStyle/>
+          <a:p>
+            <a:pPr indent="0" marL="0">
+              <a:buNone/>
+            </a:pPr>
+            <a:r>
+              <a:rPr lang="en-US" sz="1200" b="1" spc="200" kern="0" dirty="0">
+                <a:solidFill>
+                  <a:srgbClr val="0A7C4A"/>
+                </a:solidFill>
+                <a:latin typeface="Microsoft JhengHei" pitchFamily="34" charset="0"/>
+                <a:ea typeface="Microsoft JhengHei" pitchFamily="34" charset="-122"/>
+                <a:cs typeface="Microsoft JhengHei" pitchFamily="34" charset="-120"/>
+              </a:rPr>
+              <a:t>情境 01 · 實機示範</a:t>
+            </a:r>
+            <a:endParaRPr lang="en-US" sz="1200" dirty="0"/>
+          </a:p>
+        </p:txBody>
+      </p:sp>
+      <p:sp>
+        <p:nvSpPr>
+          <p:cNvPr id="4" name="Text 2"/>
+          <p:cNvSpPr/>
+          <p:nvPr/>
+        </p:nvSpPr>
+        <p:spPr>
+          <a:xfrm>
+            <a:off x="640080" y="786384"/>
+            <a:ext cx="10972800" cy="640080"/>
+          </a:xfrm>
+          <a:prstGeom prst="rect">
+            <a:avLst/>
+          </a:prstGeom>
+          <a:noFill/>
+          <a:ln/>
+        </p:spPr>
+        <p:txBody>
+          <a:bodyPr wrap="square" rtlCol="0" anchor="ctr"/>
+          <a:lstStyle/>
+          <a:p>
+            <a:pPr indent="0" marL="0">
+              <a:buNone/>
+            </a:pPr>
+            <a:r>
+              <a:rPr lang="en-US" sz="3000" b="1" dirty="0">
+                <a:solidFill>
+                  <a:srgbClr val="1E2235"/>
+                </a:solidFill>
+                <a:latin typeface="Microsoft JhengHei" pitchFamily="34" charset="0"/>
+                <a:ea typeface="Microsoft JhengHei" pitchFamily="34" charset="-122"/>
+                <a:cs typeface="Microsoft JhengHei" pitchFamily="34" charset="-120"/>
+              </a:rPr>
+              <a:t>看 Cowork 怎麼做、產出什麼</a:t>
+            </a:r>
+            <a:endParaRPr lang="en-US" sz="3000" dirty="0"/>
+          </a:p>
+        </p:txBody>
+      </p:sp>
+      <p:sp>
+        <p:nvSpPr>
+          <p:cNvPr id="5" name="Shape 3"/>
+          <p:cNvSpPr/>
+          <p:nvPr/>
+        </p:nvSpPr>
+        <p:spPr>
+          <a:xfrm>
+            <a:off x="585216" y="1773936"/>
+            <a:ext cx="5184648" cy="3433186"/>
+          </a:xfrm>
+          <a:prstGeom prst="rect">
+            <a:avLst/>
+          </a:prstGeom>
+          <a:solidFill>
+            <a:srgbClr val="FFFFFF"/>
+          </a:solidFill>
+          <a:ln w="12700">
+            <a:solidFill>
+              <a:srgbClr val="E4E7F2"/>
+            </a:solidFill>
+            <a:prstDash val="solid"/>
+          </a:ln>
+          <a:effectLst>
+            <a:outerShdw sx="100000" sy="100000" kx="0" ky="0" algn="bl" rotWithShape="0" blurRad="114300" dist="38100" dir="5400000">
+              <a:srgbClr val="8A90B5">
+                <a:alpha val="22000"/>
+              </a:srgbClr>
+            </a:outerShdw>
+          </a:effectLst>
+        </p:spPr>
+      </p:sp>
+      <p:pic>
+        <p:nvPicPr>
+          <p:cNvPr id="6" name="Image 0" descr="C:\temp\CoworkLab\v2\_working\screenshots\fin1_01_input.png">    </p:cNvPr>
+          <p:cNvPicPr>
+            <a:picLocks noChangeAspect="1"/>
+          </p:cNvPicPr>
+          <p:nvPr/>
+        </p:nvPicPr>
+        <p:blipFill>
+          <a:blip r:embed="rId1"/>
+          <a:stretch>
+            <a:fillRect/>
+          </a:stretch>
+        </p:blipFill>
+        <p:spPr>
+          <a:xfrm>
+            <a:off x="640080" y="1828800"/>
+            <a:ext cx="5074920" cy="3323458"/>
+          </a:xfrm>
+          <a:prstGeom prst="rect">
+            <a:avLst/>
+          </a:prstGeom>
+        </p:spPr>
+      </p:pic>
+      <p:sp>
+        <p:nvSpPr>
+          <p:cNvPr id="7" name="Text 4"/>
+          <p:cNvSpPr/>
+          <p:nvPr/>
+        </p:nvSpPr>
+        <p:spPr>
+          <a:xfrm>
+            <a:off x="640080" y="5261986"/>
+            <a:ext cx="5074920" cy="320040"/>
+          </a:xfrm>
+          <a:prstGeom prst="rect">
+            <a:avLst/>
+          </a:prstGeom>
+          <a:noFill/>
+          <a:ln/>
+        </p:spPr>
+        <p:txBody>
+          <a:bodyPr wrap="square" rtlCol="0" anchor="ctr"/>
+          <a:lstStyle/>
+          <a:p>
+            <a:pPr algn="ctr" indent="0" marL="0">
+              <a:buNone/>
+            </a:pPr>
+            <a:r>
+              <a:rPr lang="en-US" sz="1350" b="1" dirty="0">
+                <a:solidFill>
+                  <a:srgbClr val="0A7C4A"/>
+                </a:solidFill>
+                <a:latin typeface="Microsoft JhengHei" pitchFamily="34" charset="0"/>
+                <a:ea typeface="Microsoft JhengHei" pitchFamily="34" charset="-122"/>
+                <a:cs typeface="Microsoft JhengHei" pitchFamily="34" charset="-120"/>
+              </a:rPr>
+              <a:t>① 你的輸入與指令</a:t>
+            </a:r>
+            <a:endParaRPr lang="en-US" sz="1350" dirty="0"/>
+          </a:p>
+        </p:txBody>
+      </p:sp>
+      <p:sp>
+        <p:nvSpPr>
+          <p:cNvPr id="8" name="Shape 5"/>
+          <p:cNvSpPr/>
+          <p:nvPr/>
+        </p:nvSpPr>
+        <p:spPr>
+          <a:xfrm>
+            <a:off x="6163056" y="1773936"/>
+            <a:ext cx="5184648" cy="3433186"/>
+          </a:xfrm>
+          <a:prstGeom prst="rect">
+            <a:avLst/>
+          </a:prstGeom>
+          <a:solidFill>
+            <a:srgbClr val="FFFFFF"/>
+          </a:solidFill>
+          <a:ln w="12700">
+            <a:solidFill>
+              <a:srgbClr val="E4E7F2"/>
+            </a:solidFill>
+            <a:prstDash val="solid"/>
+          </a:ln>
+          <a:effectLst>
+            <a:outerShdw sx="100000" sy="100000" kx="0" ky="0" algn="bl" rotWithShape="0" blurRad="114300" dist="38100" dir="5400000">
+              <a:srgbClr val="8A90B5">
+                <a:alpha val="22000"/>
+              </a:srgbClr>
+            </a:outerShdw>
+          </a:effectLst>
+        </p:spPr>
+      </p:sp>
+      <p:pic>
+        <p:nvPicPr>
+          <p:cNvPr id="9" name="Image 1" descr="C:\temp\CoworkLab\v2\_working\screenshots\fin1_03_deck_done.png">    </p:cNvPr>
+          <p:cNvPicPr>
+            <a:picLocks noChangeAspect="1"/>
+          </p:cNvPicPr>
+          <p:nvPr/>
+        </p:nvPicPr>
+        <p:blipFill>
+          <a:blip r:embed="rId2"/>
+          <a:stretch>
+            <a:fillRect/>
+          </a:stretch>
+        </p:blipFill>
+        <p:spPr>
+          <a:xfrm>
+            <a:off x="6217920" y="1828800"/>
+            <a:ext cx="5074920" cy="3323458"/>
+          </a:xfrm>
+          <a:prstGeom prst="rect">
+            <a:avLst/>
+          </a:prstGeom>
+        </p:spPr>
+      </p:pic>
+      <p:sp>
+        <p:nvSpPr>
+          <p:cNvPr id="10" name="Text 6"/>
+          <p:cNvSpPr/>
+          <p:nvPr/>
+        </p:nvSpPr>
+        <p:spPr>
+          <a:xfrm>
+            <a:off x="6217920" y="5261986"/>
+            <a:ext cx="5074920" cy="320040"/>
+          </a:xfrm>
+          <a:prstGeom prst="rect">
+            <a:avLst/>
+          </a:prstGeom>
+          <a:noFill/>
+          <a:ln/>
+        </p:spPr>
+        <p:txBody>
+          <a:bodyPr wrap="square" rtlCol="0" anchor="ctr"/>
+          <a:lstStyle/>
+          <a:p>
+            <a:pPr algn="ctr" indent="0" marL="0">
+              <a:buNone/>
+            </a:pPr>
+            <a:r>
+              <a:rPr lang="en-US" sz="1350" b="1" dirty="0">
+                <a:solidFill>
+                  <a:srgbClr val="0A7C4A"/>
+                </a:solidFill>
+                <a:latin typeface="Microsoft JhengHei" pitchFamily="34" charset="0"/>
+                <a:ea typeface="Microsoft JhengHei" pitchFamily="34" charset="-122"/>
+                <a:cs typeface="Microsoft JhengHei" pitchFamily="34" charset="-120"/>
+              </a:rPr>
+              <a:t>② 產出成果</a:t>
+            </a:r>
+            <a:endParaRPr lang="en-US" sz="1350" dirty="0"/>
+          </a:p>
+        </p:txBody>
+      </p:sp>
+      <p:sp>
+        <p:nvSpPr>
+          <p:cNvPr id="11" name="Shape 7"/>
+          <p:cNvSpPr/>
+          <p:nvPr/>
+        </p:nvSpPr>
+        <p:spPr>
+          <a:xfrm>
+            <a:off x="640080" y="5074920"/>
+            <a:ext cx="10911535" cy="1143000"/>
+          </a:xfrm>
+          <a:prstGeom prst="rect">
+            <a:avLst/>
+          </a:prstGeom>
+          <a:solidFill>
+            <a:srgbClr val="FFFFFF"/>
+          </a:solidFill>
+          <a:ln w="12700">
+            <a:solidFill>
+              <a:srgbClr val="E4E7F2"/>
+            </a:solidFill>
+            <a:prstDash val="solid"/>
+          </a:ln>
+        </p:spPr>
+      </p:sp>
+      <p:sp>
+        <p:nvSpPr>
+          <p:cNvPr id="12" name="Shape 8"/>
+          <p:cNvSpPr/>
+          <p:nvPr/>
+        </p:nvSpPr>
+        <p:spPr>
+          <a:xfrm>
+            <a:off x="640080" y="5074920"/>
+            <a:ext cx="91440" cy="1143000"/>
+          </a:xfrm>
+          <a:prstGeom prst="rect">
+            <a:avLst/>
+          </a:prstGeom>
+          <a:solidFill>
+            <a:srgbClr val="0A7C4A"/>
+          </a:solidFill>
+          <a:ln/>
+        </p:spPr>
+      </p:sp>
+      <p:sp>
+        <p:nvSpPr>
+          <p:cNvPr id="13" name="Text 9"/>
+          <p:cNvSpPr/>
+          <p:nvPr/>
+        </p:nvSpPr>
+        <p:spPr>
+          <a:xfrm>
+            <a:off x="914400" y="5184648"/>
+            <a:ext cx="1828800" cy="320040"/>
+          </a:xfrm>
+          <a:prstGeom prst="rect">
+            <a:avLst/>
+          </a:prstGeom>
+          <a:noFill/>
+          <a:ln/>
+        </p:spPr>
+        <p:txBody>
+          <a:bodyPr wrap="square" rtlCol="0" anchor="ctr"/>
+          <a:lstStyle/>
+          <a:p>
+            <a:pPr indent="0" marL="0">
+              <a:buNone/>
+            </a:pPr>
+            <a:r>
+              <a:rPr lang="en-US" sz="1400" b="1" dirty="0">
+                <a:solidFill>
+                  <a:srgbClr val="1E2235"/>
+                </a:solidFill>
+                <a:latin typeface="Microsoft JhengHei" pitchFamily="34" charset="0"/>
+                <a:ea typeface="Microsoft JhengHei" pitchFamily="34" charset="-122"/>
+                <a:cs typeface="Microsoft JhengHei" pitchFamily="34" charset="-120"/>
+              </a:rPr>
+              <a:t>產出驗收</a:t>
+            </a:r>
+            <a:endParaRPr lang="en-US" sz="1400" dirty="0"/>
+          </a:p>
+        </p:txBody>
+      </p:sp>
+      <p:pic>
+        <p:nvPicPr>
+          <p:cNvPr id="14" name="Image 2" descr="preencoded.png">    </p:cNvPr>
+          <p:cNvPicPr>
+            <a:picLocks noChangeAspect="1"/>
+          </p:cNvPicPr>
+          <p:nvPr/>
+        </p:nvPicPr>
+        <p:blipFill>
+          <a:blip r:embed="rId3"/>
+          <a:stretch>
+            <a:fillRect/>
+          </a:stretch>
+        </p:blipFill>
+        <p:spPr>
+          <a:xfrm>
+            <a:off x="2834640" y="5221224"/>
+            <a:ext cx="182880" cy="182880"/>
+          </a:xfrm>
+          <a:prstGeom prst="rect">
+            <a:avLst/>
+          </a:prstGeom>
+        </p:spPr>
+      </p:pic>
+      <p:sp>
+        <p:nvSpPr>
+          <p:cNvPr id="15" name="Text 10"/>
+          <p:cNvSpPr/>
+          <p:nvPr/>
+        </p:nvSpPr>
+        <p:spPr>
+          <a:xfrm>
+            <a:off x="3108960" y="5166360"/>
+            <a:ext cx="8168335" cy="310896"/>
+          </a:xfrm>
+          <a:prstGeom prst="rect">
+            <a:avLst/>
+          </a:prstGeom>
+          <a:noFill/>
+          <a:ln/>
+        </p:spPr>
+        <p:txBody>
+          <a:bodyPr wrap="square" rtlCol="0" anchor="ctr"/>
+          <a:lstStyle/>
+          <a:p>
+            <a:pPr indent="0" marL="0">
+              <a:buNone/>
+            </a:pPr>
+            <a:r>
+              <a:rPr lang="en-US" sz="1300" dirty="0">
+                <a:solidFill>
+                  <a:srgbClr val="1E2235"/>
+                </a:solidFill>
+                <a:latin typeface="Microsoft JhengHei" pitchFamily="34" charset="0"/>
+                <a:ea typeface="Microsoft JhengHei" pitchFamily="34" charset="-122"/>
+                <a:cs typeface="Microsoft JhengHei" pitchFamily="34" charset="-120"/>
+              </a:rPr>
+              <a:t>Cowork 先執行 Deep Research，再由 PowerPoint 技能接手完成簡報</a:t>
+            </a:r>
+            <a:endParaRPr lang="en-US" sz="1300" dirty="0"/>
+          </a:p>
+        </p:txBody>
+      </p:sp>
+      <p:pic>
+        <p:nvPicPr>
+          <p:cNvPr id="16" name="Image 3" descr="preencoded.png">    </p:cNvPr>
+          <p:cNvPicPr>
+            <a:picLocks noChangeAspect="1"/>
+          </p:cNvPicPr>
+          <p:nvPr/>
+        </p:nvPicPr>
+        <p:blipFill>
+          <a:blip r:embed="rId4"/>
+          <a:stretch>
+            <a:fillRect/>
+          </a:stretch>
+        </p:blipFill>
+        <p:spPr>
+          <a:xfrm>
+            <a:off x="2834640" y="5559552"/>
+            <a:ext cx="182880" cy="182880"/>
+          </a:xfrm>
+          <a:prstGeom prst="rect">
+            <a:avLst/>
+          </a:prstGeom>
+        </p:spPr>
+      </p:pic>
+      <p:sp>
+        <p:nvSpPr>
+          <p:cNvPr id="17" name="Text 11"/>
+          <p:cNvSpPr/>
+          <p:nvPr/>
+        </p:nvSpPr>
+        <p:spPr>
+          <a:xfrm>
+            <a:off x="3108960" y="5504688"/>
+            <a:ext cx="8168335" cy="310896"/>
+          </a:xfrm>
+          <a:prstGeom prst="rect">
+            <a:avLst/>
+          </a:prstGeom>
+          <a:noFill/>
+          <a:ln/>
+        </p:spPr>
+        <p:txBody>
+          <a:bodyPr wrap="square" rtlCol="0" anchor="ctr"/>
+          <a:lstStyle/>
+          <a:p>
+            <a:pPr indent="0" marL="0">
+              <a:buNone/>
+            </a:pPr>
+            <a:r>
+              <a:rPr lang="en-US" sz="1300" dirty="0">
+                <a:solidFill>
+                  <a:srgbClr val="1E2235"/>
+                </a:solidFill>
+                <a:latin typeface="Microsoft JhengHei" pitchFamily="34" charset="0"/>
+                <a:ea typeface="Microsoft JhengHei" pitchFamily="34" charset="-122"/>
+                <a:cs typeface="Microsoft JhengHei" pitchFamily="34" charset="-120"/>
+              </a:rPr>
+              <a:t>產出為 8 頁季度投資展望簡報，內容對應附件大綱</a:t>
+            </a:r>
+            <a:endParaRPr lang="en-US" sz="1300" dirty="0"/>
+          </a:p>
+        </p:txBody>
+      </p:sp>
+      <p:pic>
+        <p:nvPicPr>
+          <p:cNvPr id="18" name="Image 4" descr="preencoded.png">    </p:cNvPr>
+          <p:cNvPicPr>
+            <a:picLocks noChangeAspect="1"/>
+          </p:cNvPicPr>
+          <p:nvPr/>
+        </p:nvPicPr>
+        <p:blipFill>
+          <a:blip r:embed="rId5"/>
+          <a:stretch>
+            <a:fillRect/>
+          </a:stretch>
+        </p:blipFill>
+        <p:spPr>
+          <a:xfrm>
+            <a:off x="2834640" y="5897880"/>
+            <a:ext cx="182880" cy="182880"/>
+          </a:xfrm>
+          <a:prstGeom prst="rect">
+            <a:avLst/>
+          </a:prstGeom>
+        </p:spPr>
+      </p:pic>
+      <p:sp>
+        <p:nvSpPr>
+          <p:cNvPr id="19" name="Text 12"/>
+          <p:cNvSpPr/>
+          <p:nvPr/>
+        </p:nvSpPr>
+        <p:spPr>
+          <a:xfrm>
+            <a:off x="3108960" y="5843016"/>
+            <a:ext cx="8168335" cy="310896"/>
+          </a:xfrm>
+          <a:prstGeom prst="rect">
+            <a:avLst/>
+          </a:prstGeom>
+          <a:noFill/>
+          <a:ln/>
+        </p:spPr>
+        <p:txBody>
+          <a:bodyPr wrap="square" rtlCol="0" anchor="ctr"/>
+          <a:lstStyle/>
+          <a:p>
+            <a:pPr indent="0" marL="0">
+              <a:buNone/>
+            </a:pPr>
+            <a:r>
+              <a:rPr lang="en-US" sz="1300" dirty="0">
+                <a:solidFill>
+                  <a:srgbClr val="1E2235"/>
+                </a:solidFill>
+                <a:latin typeface="Microsoft JhengHei" pitchFamily="34" charset="0"/>
+                <a:ea typeface="Microsoft JhengHei" pitchFamily="34" charset="-122"/>
+                <a:cs typeface="Microsoft JhengHei" pitchFamily="34" charset="-120"/>
+              </a:rPr>
+              <a:t>簡報用語維持合規安全，未出現保證報酬或過度確定陳述</a:t>
+            </a:r>
+            <a:endParaRPr lang="en-US" sz="1300" dirty="0"/>
+          </a:p>
+        </p:txBody>
+      </p:sp>
+      <p:sp>
+        <p:nvSpPr>
+          <p:cNvPr id="20" name="Text 13"/>
+          <p:cNvSpPr/>
+          <p:nvPr/>
+        </p:nvSpPr>
+        <p:spPr>
+          <a:xfrm>
+            <a:off x="640080" y="6473952"/>
+            <a:ext cx="5486400" cy="274320"/>
+          </a:xfrm>
+          <a:prstGeom prst="rect">
+            <a:avLst/>
+          </a:prstGeom>
+          <a:noFill/>
+          <a:ln/>
+        </p:spPr>
+        <p:txBody>
+          <a:bodyPr wrap="square" rtlCol="0" anchor="ctr"/>
+          <a:lstStyle/>
+          <a:p>
+            <a:pPr algn="l" indent="0" marL="0">
+              <a:buNone/>
+            </a:pPr>
+            <a:r>
+              <a:rPr lang="en-US" sz="900" dirty="0">
+                <a:solidFill>
+                  <a:srgbClr val="5B6079"/>
+                </a:solidFill>
+                <a:latin typeface="Microsoft JhengHei" pitchFamily="34" charset="0"/>
+                <a:ea typeface="Microsoft JhengHei" pitchFamily="34" charset="-122"/>
+                <a:cs typeface="Microsoft JhengHei" pitchFamily="34" charset="-120"/>
+              </a:rPr>
+              <a:t>Microsoft 365 Copilot Cowork</a:t>
+            </a:r>
+            <a:endParaRPr lang="en-US" sz="900" dirty="0"/>
+          </a:p>
+        </p:txBody>
+      </p:sp>
+      <p:sp>
+        <p:nvSpPr>
+          <p:cNvPr id="21" name="Text 14"/>
+          <p:cNvSpPr/>
+          <p:nvPr/>
+        </p:nvSpPr>
+        <p:spPr>
+          <a:xfrm>
+            <a:off x="11002975" y="6473952"/>
+            <a:ext cx="548640" cy="274320"/>
+          </a:xfrm>
+          <a:prstGeom prst="rect">
+            <a:avLst/>
+          </a:prstGeom>
+          <a:noFill/>
+          <a:ln/>
+        </p:spPr>
+        <p:txBody>
+          <a:bodyPr wrap="square" rtlCol="0" anchor="ctr"/>
+          <a:lstStyle/>
+          <a:p>
+            <a:pPr algn="r" indent="0" marL="0">
+              <a:buNone/>
+            </a:pPr>
+            <a:r>
+              <a:rPr lang="en-US" sz="900" dirty="0">
+                <a:solidFill>
+                  <a:srgbClr val="5B6079"/>
+                </a:solidFill>
+                <a:latin typeface="Microsoft JhengHei" pitchFamily="34" charset="0"/>
+                <a:ea typeface="Microsoft JhengHei" pitchFamily="34" charset="-122"/>
+                <a:cs typeface="Microsoft JhengHei" pitchFamily="34" charset="-120"/>
+              </a:rPr>
+              <a:t>9</a:t>
+            </a:r>
+            <a:endParaRPr lang="en-US" sz="900" dirty="0"/>
+          </a:p>
+        </p:txBody>
+      </p:sp>
+    </p:spTree>
+  </p:cSld>
+  <p:clrMapOvr>
+    <a:masterClrMapping/>
+  </p:clrMapOvr>
+</p:sld>
+</file>
+
+<file path=ppt/slides/slide11.xml><?xml version="1.0" encoding="utf-8"?>
+<p:sld xmlns:a="http://schemas.openxmlformats.org/drawingml/2006/main" xmlns:r="http://schemas.openxmlformats.org/officeDocument/2006/relationships" xmlns:p="http://schemas.openxmlformats.org/presentationml/2006/main">
+  <p:cSld name="Slide 11">
+    <p:bg>
+      <p:bgPr>
+        <a:solidFill>
           <a:srgbClr val="0F1031"/>
         </a:solidFill>
       </p:bgPr>
@@ -3553,7 +4313,7 @@
                 <a:ea typeface="Microsoft JhengHei" pitchFamily="34" charset="-122"/>
                 <a:cs typeface="Microsoft JhengHei" pitchFamily="34" charset="-120"/>
               </a:rPr>
-              <a:t>把案件背景 docx 上傳後，不要只說「幫我整理」；要直接指定銀行常見的授信摘要結構，例如借款人概況、額度用途…</a:t>
+              <a:t>把 F2_授信案件背景_鴻運智慧科技.docx 上傳到聊天框，送出下面的提示詞。</a:t>
             </a:r>
             <a:endParaRPr lang="en-US" sz="1300" dirty="0"/>
           </a:p>
@@ -3700,7 +4460,7 @@
                 <a:ea typeface="Microsoft JhengHei" pitchFamily="34" charset="-122"/>
                 <a:cs typeface="Microsoft JhengHei" pitchFamily="34" charset="-120"/>
               </a:rPr>
-              <a:t>完成後，重點不是看它寫得多長，而是看結構是否適合往上審：借款人與額度有沒有先說清楚…</a:t>
+              <a:t>打開產出的 Word memo，逐段對照下面四個檢查點。</a:t>
             </a:r>
             <a:endParaRPr lang="en-US" sz="1300" dirty="0"/>
           </a:p>
@@ -3847,7 +4607,7 @@
                 <a:ea typeface="Microsoft JhengHei" pitchFamily="34" charset="-122"/>
                 <a:cs typeface="Microsoft JhengHei" pitchFamily="34" charset="-120"/>
               </a:rPr>
-              <a:t>摘要初稿只是第一步；真正要推進案件，還要通知主管審閱。</a:t>
+              <a:t>接著送出下面的提示詞，請它把 memo 重點改寫成一則 Teams 訊息，通知信用主管審閱。</a:t>
             </a:r>
             <a:endParaRPr lang="en-US" sz="1300" dirty="0"/>
           </a:p>
@@ -4057,7 +4817,7 @@
                 <a:ea typeface="Microsoft JhengHei" pitchFamily="34" charset="-122"/>
                 <a:cs typeface="Microsoft JhengHei" pitchFamily="34" charset="-120"/>
               </a:rPr>
-              <a:t>9</a:t>
+              <a:t>10</a:t>
             </a:r>
             <a:endParaRPr lang="en-US" sz="900" dirty="0"/>
           </a:p>
@@ -4071,9 +4831,9 @@
 </p:sld>
 </file>
 
-<file path=ppt/slides/slide11.xml><?xml version="1.0" encoding="utf-8"?>
+<file path=ppt/slides/slide12.xml><?xml version="1.0" encoding="utf-8"?>
 <p:sld xmlns:a="http://schemas.openxmlformats.org/drawingml/2006/main" xmlns:r="http://schemas.openxmlformats.org/officeDocument/2006/relationships" xmlns:p="http://schemas.openxmlformats.org/presentationml/2006/main">
-  <p:cSld name="Slide 11">
+  <p:cSld name="Slide 12">
     <p:bg>
       <p:bgPr>
         <a:solidFill>
@@ -4728,7 +5488,7 @@
                 <a:ea typeface="Microsoft JhengHei" pitchFamily="34" charset="-122"/>
                 <a:cs typeface="Microsoft JhengHei" pitchFamily="34" charset="-120"/>
               </a:rPr>
-              <a:t>10</a:t>
+              <a:t>11</a:t>
             </a:r>
             <a:endParaRPr lang="en-US" sz="900" dirty="0"/>
           </a:p>
@@ -4742,9 +5502,9 @@
 </p:sld>
 </file>
 
-<file path=ppt/slides/slide12.xml><?xml version="1.0" encoding="utf-8"?>
+<file path=ppt/slides/slide13.xml><?xml version="1.0" encoding="utf-8"?>
 <p:sld xmlns:a="http://schemas.openxmlformats.org/drawingml/2006/main" xmlns:r="http://schemas.openxmlformats.org/officeDocument/2006/relationships" xmlns:p="http://schemas.openxmlformats.org/presentationml/2006/main">
-  <p:cSld name="Slide 12">
+  <p:cSld name="Slide 13">
     <p:bg>
       <p:bgPr>
         <a:solidFill>
@@ -5289,7 +6049,7 @@
                 <a:ea typeface="Microsoft JhengHei" pitchFamily="34" charset="-122"/>
                 <a:cs typeface="Microsoft JhengHei" pitchFamily="34" charset="-120"/>
               </a:rPr>
-              <a:t>把原始 xlsx 上傳時，直接說清楚你要怎麼看：以分行與月份做樞紐、AUM 與手續費要小計、財管滲透率要保留…</a:t>
+              <a:t>把 F3_分行業績原始數據_2026下半年.xlsx 上傳到聊天框，送出下面的提示詞。</a:t>
             </a:r>
             <a:endParaRPr lang="en-US" sz="1300" dirty="0"/>
           </a:p>
@@ -5436,7 +6196,7 @@
                 <a:ea typeface="Microsoft JhengHei" pitchFamily="34" charset="-122"/>
                 <a:cs typeface="Microsoft JhengHei" pitchFamily="34" charset="-120"/>
               </a:rPr>
-              <a:t>Cowork 會先理解欄位結構，再建立彙總表、指標區與標示規則。</a:t>
+              <a:t>這一步不必再下指令，觀察它建立彙總表與指標區的過程。</a:t>
             </a:r>
             <a:endParaRPr lang="en-US" sz="1300" dirty="0"/>
           </a:p>
@@ -5583,7 +6343,7 @@
                 <a:ea typeface="Microsoft JhengHei" pitchFamily="34" charset="-122"/>
                 <a:cs typeface="Microsoft JhengHei" pitchFamily="34" charset="-120"/>
               </a:rPr>
-              <a:t>最後打開產出的 Excel 預覽，檢查它是否真的有分行與月份兩個視角、是否保留 KPI 關聯…</a:t>
+              <a:t>打開產出的 Excel 預覽。</a:t>
             </a:r>
             <a:endParaRPr lang="en-US" sz="1300" dirty="0"/>
           </a:p>
@@ -5793,7 +6553,7 @@
                 <a:ea typeface="Microsoft JhengHei" pitchFamily="34" charset="-122"/>
                 <a:cs typeface="Microsoft JhengHei" pitchFamily="34" charset="-120"/>
               </a:rPr>
-              <a:t>11</a:t>
+              <a:t>12</a:t>
             </a:r>
             <a:endParaRPr lang="en-US" sz="900" dirty="0"/>
           </a:p>
@@ -5807,9 +6567,9 @@
 </p:sld>
 </file>
 
-<file path=ppt/slides/slide13.xml><?xml version="1.0" encoding="utf-8"?>
+<file path=ppt/slides/slide14.xml><?xml version="1.0" encoding="utf-8"?>
 <p:sld xmlns:a="http://schemas.openxmlformats.org/drawingml/2006/main" xmlns:r="http://schemas.openxmlformats.org/officeDocument/2006/relationships" xmlns:p="http://schemas.openxmlformats.org/presentationml/2006/main">
-  <p:cSld name="Slide 13">
+  <p:cSld name="Slide 14">
     <p:bg>
       <p:bgPr>
         <a:solidFill>
@@ -6464,7 +7224,7 @@
                 <a:ea typeface="Microsoft JhengHei" pitchFamily="34" charset="-122"/>
                 <a:cs typeface="Microsoft JhengHei" pitchFamily="34" charset="-120"/>
               </a:rPr>
-              <a:t>12</a:t>
+              <a:t>13</a:t>
             </a:r>
             <a:endParaRPr lang="en-US" sz="900" dirty="0"/>
           </a:p>
@@ -6478,9 +7238,9 @@
 </p:sld>
 </file>
 
-<file path=ppt/slides/slide14.xml><?xml version="1.0" encoding="utf-8"?>
+<file path=ppt/slides/slide15.xml><?xml version="1.0" encoding="utf-8"?>
 <p:sld xmlns:a="http://schemas.openxmlformats.org/drawingml/2006/main" xmlns:r="http://schemas.openxmlformats.org/officeDocument/2006/relationships" xmlns:p="http://schemas.openxmlformats.org/presentationml/2006/main">
-  <p:cSld name="Slide 14">
+  <p:cSld name="Slide 15">
     <p:bg>
       <p:bgPr>
         <a:solidFill>
@@ -7086,7 +7846,7 @@
                 <a:ea typeface="Microsoft JhengHei" pitchFamily="34" charset="-122"/>
                 <a:cs typeface="Microsoft JhengHei" pitchFamily="34" charset="-120"/>
               </a:rPr>
-              <a:t>把案件背景 md 上傳後，請 Cowork 專注於「通報敘事」而不是法律結論：說明帳戶輪廓、異常交易的先後順序…</a:t>
+              <a:t>把 F4_可疑交易案件背景.md 上傳到聊天框，送出下面的提示詞。</a:t>
             </a:r>
             <a:endParaRPr lang="en-US" sz="1300" dirty="0"/>
           </a:p>
@@ -7233,7 +7993,7 @@
                 <a:ea typeface="Microsoft JhengHei" pitchFamily="34" charset="-122"/>
                 <a:cs typeface="Microsoft JhengHei" pitchFamily="34" charset="-120"/>
               </a:rPr>
-              <a:t>當 Cowork 只是在 Word 中整理 SAR 草稿時，不涉及對外送出…</a:t>
+              <a:t>檢視 Word 中的 SAR 草稿。</a:t>
             </a:r>
             <a:endParaRPr lang="en-US" sz="1300" dirty="0"/>
           </a:p>
@@ -7380,7 +8140,7 @@
                 <a:ea typeface="Microsoft JhengHei" pitchFamily="34" charset="-122"/>
                 <a:cs typeface="Microsoft JhengHei" pitchFamily="34" charset="-120"/>
               </a:rPr>
-              <a:t>SAR 草稿完成後，實務上通常要把文件轉成正式格式（Word 或 PDF）附加在郵件中，寄給法遵主管排定審閱。</a:t>
+              <a:t>送出下面的提示詞，請它把草稿轉存成 Word 或 PDF 附件，並寄給法遵主管。</a:t>
             </a:r>
             <a:endParaRPr lang="en-US" sz="1300" dirty="0"/>
           </a:p>
@@ -7590,7 +8350,7 @@
                 <a:ea typeface="Microsoft JhengHei" pitchFamily="34" charset="-122"/>
                 <a:cs typeface="Microsoft JhengHei" pitchFamily="34" charset="-120"/>
               </a:rPr>
-              <a:t>13</a:t>
+              <a:t>14</a:t>
             </a:r>
             <a:endParaRPr lang="en-US" sz="900" dirty="0"/>
           </a:p>
@@ -7604,9 +8364,9 @@
 </p:sld>
 </file>
 
-<file path=ppt/slides/slide15.xml><?xml version="1.0" encoding="utf-8"?>
+<file path=ppt/slides/slide16.xml><?xml version="1.0" encoding="utf-8"?>
 <p:sld xmlns:a="http://schemas.openxmlformats.org/drawingml/2006/main" xmlns:r="http://schemas.openxmlformats.org/officeDocument/2006/relationships" xmlns:p="http://schemas.openxmlformats.org/presentationml/2006/main">
-  <p:cSld name="Slide 15">
+  <p:cSld name="Slide 16">
     <p:bg>
       <p:bgPr>
         <a:solidFill>
@@ -8261,7 +9021,7 @@
                 <a:ea typeface="Microsoft JhengHei" pitchFamily="34" charset="-122"/>
                 <a:cs typeface="Microsoft JhengHei" pitchFamily="34" charset="-120"/>
               </a:rPr>
-              <a:t>14</a:t>
+              <a:t>15</a:t>
             </a:r>
             <a:endParaRPr lang="en-US" sz="900" dirty="0"/>
           </a:p>
@@ -8275,9 +9035,9 @@
 </p:sld>
 </file>
 
-<file path=ppt/slides/slide16.xml><?xml version="1.0" encoding="utf-8"?>
+<file path=ppt/slides/slide17.xml><?xml version="1.0" encoding="utf-8"?>
 <p:sld xmlns:a="http://schemas.openxmlformats.org/drawingml/2006/main" xmlns:r="http://schemas.openxmlformats.org/officeDocument/2006/relationships" xmlns:p="http://schemas.openxmlformats.org/presentationml/2006/main">
-  <p:cSld name="Slide 16">
+  <p:cSld name="Slide 17">
     <p:bg>
       <p:bgPr>
         <a:solidFill>
@@ -8822,7 +9582,7 @@
                 <a:ea typeface="Microsoft JhengHei" pitchFamily="34" charset="-122"/>
                 <a:cs typeface="Microsoft JhengHei" pitchFamily="34" charset="-120"/>
               </a:rPr>
-              <a:t>和一般 prompt 不同，自訂技能是會長期留在 OneDrive 的資產，所以先問 Cowork 技能命名…</a:t>
+              <a:t>先不要急著建立技能。</a:t>
             </a:r>
             <a:endParaRPr lang="en-US" sz="1300" dirty="0"/>
           </a:p>
@@ -8969,7 +9729,7 @@
                 <a:ea typeface="Microsoft JhengHei" pitchFamily="34" charset="-122"/>
                 <a:cs typeface="Microsoft JhengHei" pitchFamily="34" charset="-120"/>
               </a:rPr>
-              <a:t>接著把技能定義檔一起交給 Cowork，要求它建立 skill。</a:t>
+              <a:t>把 F5_SKILL.md 上傳到聊天框，送出下面的提示詞，請它直接建立技能。</a:t>
             </a:r>
             <a:endParaRPr lang="en-US" sz="1300" dirty="0"/>
           </a:p>
@@ -9116,7 +9876,7 @@
                 <a:ea typeface="Microsoft JhengHei" pitchFamily="34" charset="-122"/>
                 <a:cs typeface="Microsoft JhengHei" pitchFamily="34" charset="-120"/>
               </a:rPr>
-              <a:t>技能建立後，開一個新工作階段，上傳原始接觸與持倉紀錄，再用一句觸發語要求它做「客戶月報」或「email 版」。</a:t>
+              <a:t>開一個新的工作階段，上傳 F5_客戶接觸與持倉紀錄_原始.md，用下面這一句話觸發技能。</a:t>
             </a:r>
             <a:endParaRPr lang="en-US" sz="1300" dirty="0"/>
           </a:p>
@@ -9263,7 +10023,7 @@
                 <a:ea typeface="Microsoft JhengHei" pitchFamily="34" charset="-122"/>
                 <a:cs typeface="Microsoft JhengHei" pitchFamily="34" charset="-120"/>
               </a:rPr>
-              <a:t>點開產出的 client-monthly-report.html 預覽，你會看到深藍品牌色標頭、客戶資訊卡…</a:t>
+              <a:t>點開產出的 client-monthly-report.html 預覽。</a:t>
             </a:r>
             <a:endParaRPr lang="en-US" sz="1300" dirty="0"/>
           </a:p>
@@ -9336,677 +10096,6 @@
               <a:rPr lang="en-US" sz="900" dirty="0">
                 <a:solidFill>
                   <a:srgbClr val="8A8FB5"/>
-                </a:solidFill>
-                <a:latin typeface="Microsoft JhengHei" pitchFamily="34" charset="0"/>
-                <a:ea typeface="Microsoft JhengHei" pitchFamily="34" charset="-122"/>
-                <a:cs typeface="Microsoft JhengHei" pitchFamily="34" charset="-120"/>
-              </a:rPr>
-              <a:t>15</a:t>
-            </a:r>
-            <a:endParaRPr lang="en-US" sz="900" dirty="0"/>
-          </a:p>
-        </p:txBody>
-      </p:sp>
-    </p:spTree>
-  </p:cSld>
-  <p:clrMapOvr>
-    <a:masterClrMapping/>
-  </p:clrMapOvr>
-</p:sld>
-</file>
-
-<file path=ppt/slides/slide17.xml><?xml version="1.0" encoding="utf-8"?>
-<p:sld xmlns:a="http://schemas.openxmlformats.org/drawingml/2006/main" xmlns:r="http://schemas.openxmlformats.org/officeDocument/2006/relationships" xmlns:p="http://schemas.openxmlformats.org/presentationml/2006/main">
-  <p:cSld name="Slide 17">
-    <p:bg>
-      <p:bgPr>
-        <a:solidFill>
-          <a:srgbClr val="F7F8FC"/>
-        </a:solidFill>
-      </p:bgPr>
-    </p:bg>
-    <p:spTree>
-      <p:nvGrpSpPr>
-        <p:cNvPr id="1" name=""/>
-        <p:cNvGrpSpPr/>
-        <p:nvPr/>
-      </p:nvGrpSpPr>
-      <p:grpSpPr>
-        <a:xfrm>
-          <a:off x="0" y="0"/>
-          <a:ext cx="0" cy="0"/>
-          <a:chOff x="0" y="0"/>
-          <a:chExt cx="0" cy="0"/>
-        </a:xfrm>
-      </p:grpSpPr>
-      <p:sp>
-        <p:nvSpPr>
-          <p:cNvPr id="2" name="Shape 0"/>
-          <p:cNvSpPr/>
-          <p:nvPr/>
-        </p:nvSpPr>
-        <p:spPr>
-          <a:xfrm>
-            <a:off x="640080" y="566928"/>
-            <a:ext cx="384048" cy="128016"/>
-          </a:xfrm>
-          <a:prstGeom prst="rect">
-            <a:avLst/>
-          </a:prstGeom>
-          <a:solidFill>
-            <a:srgbClr val="8A4DDB"/>
-          </a:solidFill>
-          <a:ln/>
-        </p:spPr>
-      </p:sp>
-      <p:sp>
-        <p:nvSpPr>
-          <p:cNvPr id="3" name="Text 1"/>
-          <p:cNvSpPr/>
-          <p:nvPr/>
-        </p:nvSpPr>
-        <p:spPr>
-          <a:xfrm>
-            <a:off x="1143000" y="457200"/>
-            <a:ext cx="8229600" cy="310896"/>
-          </a:xfrm>
-          <a:prstGeom prst="rect">
-            <a:avLst/>
-          </a:prstGeom>
-          <a:noFill/>
-          <a:ln/>
-        </p:spPr>
-        <p:txBody>
-          <a:bodyPr wrap="square" rtlCol="0" anchor="ctr"/>
-          <a:lstStyle/>
-          <a:p>
-            <a:pPr indent="0" marL="0">
-              <a:buNone/>
-            </a:pPr>
-            <a:r>
-              <a:rPr lang="en-US" sz="1200" b="1" spc="200" kern="0" dirty="0">
-                <a:solidFill>
-                  <a:srgbClr val="8A4DDB"/>
-                </a:solidFill>
-                <a:latin typeface="Microsoft JhengHei" pitchFamily="34" charset="0"/>
-                <a:ea typeface="Microsoft JhengHei" pitchFamily="34" charset="-122"/>
-                <a:cs typeface="Microsoft JhengHei" pitchFamily="34" charset="-120"/>
-              </a:rPr>
-              <a:t>情境 05 · 實機示範</a:t>
-            </a:r>
-            <a:endParaRPr lang="en-US" sz="1200" dirty="0"/>
-          </a:p>
-        </p:txBody>
-      </p:sp>
-      <p:sp>
-        <p:nvSpPr>
-          <p:cNvPr id="4" name="Text 2"/>
-          <p:cNvSpPr/>
-          <p:nvPr/>
-        </p:nvSpPr>
-        <p:spPr>
-          <a:xfrm>
-            <a:off x="640080" y="786384"/>
-            <a:ext cx="10972800" cy="640080"/>
-          </a:xfrm>
-          <a:prstGeom prst="rect">
-            <a:avLst/>
-          </a:prstGeom>
-          <a:noFill/>
-          <a:ln/>
-        </p:spPr>
-        <p:txBody>
-          <a:bodyPr wrap="square" rtlCol="0" anchor="ctr"/>
-          <a:lstStyle/>
-          <a:p>
-            <a:pPr indent="0" marL="0">
-              <a:buNone/>
-            </a:pPr>
-            <a:r>
-              <a:rPr lang="en-US" sz="3000" b="1" dirty="0">
-                <a:solidFill>
-                  <a:srgbClr val="1E2235"/>
-                </a:solidFill>
-                <a:latin typeface="Microsoft JhengHei" pitchFamily="34" charset="0"/>
-                <a:ea typeface="Microsoft JhengHei" pitchFamily="34" charset="-122"/>
-                <a:cs typeface="Microsoft JhengHei" pitchFamily="34" charset="-120"/>
-              </a:rPr>
-              <a:t>看 Cowork 怎麼做、產出什麼</a:t>
-            </a:r>
-            <a:endParaRPr lang="en-US" sz="3000" dirty="0"/>
-          </a:p>
-        </p:txBody>
-      </p:sp>
-      <p:sp>
-        <p:nvSpPr>
-          <p:cNvPr id="5" name="Shape 3"/>
-          <p:cNvSpPr/>
-          <p:nvPr/>
-        </p:nvSpPr>
-        <p:spPr>
-          <a:xfrm>
-            <a:off x="585216" y="1773936"/>
-            <a:ext cx="5184648" cy="3433186"/>
-          </a:xfrm>
-          <a:prstGeom prst="rect">
-            <a:avLst/>
-          </a:prstGeom>
-          <a:solidFill>
-            <a:srgbClr val="FFFFFF"/>
-          </a:solidFill>
-          <a:ln w="12700">
-            <a:solidFill>
-              <a:srgbClr val="E4E7F2"/>
-            </a:solidFill>
-            <a:prstDash val="solid"/>
-          </a:ln>
-          <a:effectLst>
-            <a:outerShdw sx="100000" sy="100000" kx="0" ky="0" algn="bl" rotWithShape="0" blurRad="114300" dist="38100" dir="5400000">
-              <a:srgbClr val="8A90B5">
-                <a:alpha val="22000"/>
-              </a:srgbClr>
-            </a:outerShdw>
-          </a:effectLst>
-        </p:spPr>
-      </p:sp>
-      <p:pic>
-        <p:nvPicPr>
-          <p:cNvPr id="6" name="Image 0" descr="C:\temp\CoworkLab\v2\_working\screenshots\fin5_01_howto.png">    </p:cNvPr>
-          <p:cNvPicPr>
-            <a:picLocks noChangeAspect="1"/>
-          </p:cNvPicPr>
-          <p:nvPr/>
-        </p:nvPicPr>
-        <p:blipFill>
-          <a:blip r:embed="rId1"/>
-          <a:stretch>
-            <a:fillRect/>
-          </a:stretch>
-        </p:blipFill>
-        <p:spPr>
-          <a:xfrm>
-            <a:off x="640080" y="1828800"/>
-            <a:ext cx="5074920" cy="3323458"/>
-          </a:xfrm>
-          <a:prstGeom prst="rect">
-            <a:avLst/>
-          </a:prstGeom>
-        </p:spPr>
-      </p:pic>
-      <p:sp>
-        <p:nvSpPr>
-          <p:cNvPr id="7" name="Text 4"/>
-          <p:cNvSpPr/>
-          <p:nvPr/>
-        </p:nvSpPr>
-        <p:spPr>
-          <a:xfrm>
-            <a:off x="640080" y="5261986"/>
-            <a:ext cx="5074920" cy="320040"/>
-          </a:xfrm>
-          <a:prstGeom prst="rect">
-            <a:avLst/>
-          </a:prstGeom>
-          <a:noFill/>
-          <a:ln/>
-        </p:spPr>
-        <p:txBody>
-          <a:bodyPr wrap="square" rtlCol="0" anchor="ctr"/>
-          <a:lstStyle/>
-          <a:p>
-            <a:pPr algn="ctr" indent="0" marL="0">
-              <a:buNone/>
-            </a:pPr>
-            <a:r>
-              <a:rPr lang="en-US" sz="1350" b="1" dirty="0">
-                <a:solidFill>
-                  <a:srgbClr val="8A4DDB"/>
-                </a:solidFill>
-                <a:latin typeface="Microsoft JhengHei" pitchFamily="34" charset="0"/>
-                <a:ea typeface="Microsoft JhengHei" pitchFamily="34" charset="-122"/>
-                <a:cs typeface="Microsoft JhengHei" pitchFamily="34" charset="-120"/>
-              </a:rPr>
-              <a:t>① 你的輸入與指令</a:t>
-            </a:r>
-            <a:endParaRPr lang="en-US" sz="1350" dirty="0"/>
-          </a:p>
-        </p:txBody>
-      </p:sp>
-      <p:sp>
-        <p:nvSpPr>
-          <p:cNvPr id="8" name="Shape 5"/>
-          <p:cNvSpPr/>
-          <p:nvPr/>
-        </p:nvSpPr>
-        <p:spPr>
-          <a:xfrm>
-            <a:off x="6163056" y="1773936"/>
-            <a:ext cx="5184648" cy="3433186"/>
-          </a:xfrm>
-          <a:prstGeom prst="rect">
-            <a:avLst/>
-          </a:prstGeom>
-          <a:solidFill>
-            <a:srgbClr val="FFFFFF"/>
-          </a:solidFill>
-          <a:ln w="12700">
-            <a:solidFill>
-              <a:srgbClr val="E4E7F2"/>
-            </a:solidFill>
-            <a:prstDash val="solid"/>
-          </a:ln>
-          <a:effectLst>
-            <a:outerShdw sx="100000" sy="100000" kx="0" ky="0" algn="bl" rotWithShape="0" blurRad="114300" dist="38100" dir="5400000">
-              <a:srgbClr val="8A90B5">
-                <a:alpha val="22000"/>
-              </a:srgbClr>
-            </a:outerShdw>
-          </a:effectLst>
-        </p:spPr>
-      </p:sp>
-      <p:pic>
-        <p:nvPicPr>
-          <p:cNvPr id="9" name="Image 1" descr="C:\temp\CoworkLab\v2\_working\screenshots\fin5_04_html_preview.png">    </p:cNvPr>
-          <p:cNvPicPr>
-            <a:picLocks noChangeAspect="1"/>
-          </p:cNvPicPr>
-          <p:nvPr/>
-        </p:nvPicPr>
-        <p:blipFill>
-          <a:blip r:embed="rId2"/>
-          <a:stretch>
-            <a:fillRect/>
-          </a:stretch>
-        </p:blipFill>
-        <p:spPr>
-          <a:xfrm>
-            <a:off x="6217920" y="1828800"/>
-            <a:ext cx="5074920" cy="3323458"/>
-          </a:xfrm>
-          <a:prstGeom prst="rect">
-            <a:avLst/>
-          </a:prstGeom>
-        </p:spPr>
-      </p:pic>
-      <p:sp>
-        <p:nvSpPr>
-          <p:cNvPr id="10" name="Text 6"/>
-          <p:cNvSpPr/>
-          <p:nvPr/>
-        </p:nvSpPr>
-        <p:spPr>
-          <a:xfrm>
-            <a:off x="6217920" y="5261986"/>
-            <a:ext cx="5074920" cy="320040"/>
-          </a:xfrm>
-          <a:prstGeom prst="rect">
-            <a:avLst/>
-          </a:prstGeom>
-          <a:noFill/>
-          <a:ln/>
-        </p:spPr>
-        <p:txBody>
-          <a:bodyPr wrap="square" rtlCol="0" anchor="ctr"/>
-          <a:lstStyle/>
-          <a:p>
-            <a:pPr algn="ctr" indent="0" marL="0">
-              <a:buNone/>
-            </a:pPr>
-            <a:r>
-              <a:rPr lang="en-US" sz="1350" b="1" dirty="0">
-                <a:solidFill>
-                  <a:srgbClr val="8A4DDB"/>
-                </a:solidFill>
-                <a:latin typeface="Microsoft JhengHei" pitchFamily="34" charset="0"/>
-                <a:ea typeface="Microsoft JhengHei" pitchFamily="34" charset="-122"/>
-                <a:cs typeface="Microsoft JhengHei" pitchFamily="34" charset="-120"/>
-              </a:rPr>
-              <a:t>② 產出成果</a:t>
-            </a:r>
-            <a:endParaRPr lang="en-US" sz="1350" dirty="0"/>
-          </a:p>
-        </p:txBody>
-      </p:sp>
-      <p:sp>
-        <p:nvSpPr>
-          <p:cNvPr id="11" name="Shape 7"/>
-          <p:cNvSpPr/>
-          <p:nvPr/>
-        </p:nvSpPr>
-        <p:spPr>
-          <a:xfrm>
-            <a:off x="640080" y="5074920"/>
-            <a:ext cx="10911535" cy="1143000"/>
-          </a:xfrm>
-          <a:prstGeom prst="rect">
-            <a:avLst/>
-          </a:prstGeom>
-          <a:solidFill>
-            <a:srgbClr val="FFFFFF"/>
-          </a:solidFill>
-          <a:ln w="12700">
-            <a:solidFill>
-              <a:srgbClr val="E4E7F2"/>
-            </a:solidFill>
-            <a:prstDash val="solid"/>
-          </a:ln>
-        </p:spPr>
-      </p:sp>
-      <p:sp>
-        <p:nvSpPr>
-          <p:cNvPr id="12" name="Shape 8"/>
-          <p:cNvSpPr/>
-          <p:nvPr/>
-        </p:nvSpPr>
-        <p:spPr>
-          <a:xfrm>
-            <a:off x="640080" y="5074920"/>
-            <a:ext cx="91440" cy="1143000"/>
-          </a:xfrm>
-          <a:prstGeom prst="rect">
-            <a:avLst/>
-          </a:prstGeom>
-          <a:solidFill>
-            <a:srgbClr val="8A4DDB"/>
-          </a:solidFill>
-          <a:ln/>
-        </p:spPr>
-      </p:sp>
-      <p:sp>
-        <p:nvSpPr>
-          <p:cNvPr id="13" name="Text 9"/>
-          <p:cNvSpPr/>
-          <p:nvPr/>
-        </p:nvSpPr>
-        <p:spPr>
-          <a:xfrm>
-            <a:off x="914400" y="5184648"/>
-            <a:ext cx="1828800" cy="320040"/>
-          </a:xfrm>
-          <a:prstGeom prst="rect">
-            <a:avLst/>
-          </a:prstGeom>
-          <a:noFill/>
-          <a:ln/>
-        </p:spPr>
-        <p:txBody>
-          <a:bodyPr wrap="square" rtlCol="0" anchor="ctr"/>
-          <a:lstStyle/>
-          <a:p>
-            <a:pPr indent="0" marL="0">
-              <a:buNone/>
-            </a:pPr>
-            <a:r>
-              <a:rPr lang="en-US" sz="1400" b="1" dirty="0">
-                <a:solidFill>
-                  <a:srgbClr val="1E2235"/>
-                </a:solidFill>
-                <a:latin typeface="Microsoft JhengHei" pitchFamily="34" charset="0"/>
-                <a:ea typeface="Microsoft JhengHei" pitchFamily="34" charset="-122"/>
-                <a:cs typeface="Microsoft JhengHei" pitchFamily="34" charset="-120"/>
-              </a:rPr>
-              <a:t>產出驗收</a:t>
-            </a:r>
-            <a:endParaRPr lang="en-US" sz="1400" dirty="0"/>
-          </a:p>
-        </p:txBody>
-      </p:sp>
-      <p:pic>
-        <p:nvPicPr>
-          <p:cNvPr id="14" name="Image 2" descr="preencoded.png">    </p:cNvPr>
-          <p:cNvPicPr>
-            <a:picLocks noChangeAspect="1"/>
-          </p:cNvPicPr>
-          <p:nvPr/>
-        </p:nvPicPr>
-        <p:blipFill>
-          <a:blip r:embed="rId3"/>
-          <a:stretch>
-            <a:fillRect/>
-          </a:stretch>
-        </p:blipFill>
-        <p:spPr>
-          <a:xfrm>
-            <a:off x="2834640" y="5221224"/>
-            <a:ext cx="182880" cy="182880"/>
-          </a:xfrm>
-          <a:prstGeom prst="rect">
-            <a:avLst/>
-          </a:prstGeom>
-        </p:spPr>
-      </p:pic>
-      <p:sp>
-        <p:nvSpPr>
-          <p:cNvPr id="15" name="Text 10"/>
-          <p:cNvSpPr/>
-          <p:nvPr/>
-        </p:nvSpPr>
-        <p:spPr>
-          <a:xfrm>
-            <a:off x="3108960" y="5166360"/>
-            <a:ext cx="8168335" cy="310896"/>
-          </a:xfrm>
-          <a:prstGeom prst="rect">
-            <a:avLst/>
-          </a:prstGeom>
-          <a:noFill/>
-          <a:ln/>
-        </p:spPr>
-        <p:txBody>
-          <a:bodyPr wrap="square" rtlCol="0" anchor="ctr"/>
-          <a:lstStyle/>
-          <a:p>
-            <a:pPr indent="0" marL="0">
-              <a:buNone/>
-            </a:pPr>
-            <a:r>
-              <a:rPr lang="en-US" sz="1300" dirty="0">
-                <a:solidFill>
-                  <a:srgbClr val="1E2235"/>
-                </a:solidFill>
-                <a:latin typeface="Microsoft JhengHei" pitchFamily="34" charset="0"/>
-                <a:ea typeface="Microsoft JhengHei" pitchFamily="34" charset="-122"/>
-                <a:cs typeface="Microsoft JhengHei" pitchFamily="34" charset="-120"/>
-              </a:rPr>
-              <a:t>client-monthly-report 技能已建立，且規則包含格式判斷、過濾、遮罩與免責聲明</a:t>
-            </a:r>
-            <a:endParaRPr lang="en-US" sz="1300" dirty="0"/>
-          </a:p>
-        </p:txBody>
-      </p:sp>
-      <p:pic>
-        <p:nvPicPr>
-          <p:cNvPr id="16" name="Image 3" descr="preencoded.png">    </p:cNvPr>
-          <p:cNvPicPr>
-            <a:picLocks noChangeAspect="1"/>
-          </p:cNvPicPr>
-          <p:nvPr/>
-        </p:nvPicPr>
-        <p:blipFill>
-          <a:blip r:embed="rId4"/>
-          <a:stretch>
-            <a:fillRect/>
-          </a:stretch>
-        </p:blipFill>
-        <p:spPr>
-          <a:xfrm>
-            <a:off x="2834640" y="5559552"/>
-            <a:ext cx="182880" cy="182880"/>
-          </a:xfrm>
-          <a:prstGeom prst="rect">
-            <a:avLst/>
-          </a:prstGeom>
-        </p:spPr>
-      </p:pic>
-      <p:sp>
-        <p:nvSpPr>
-          <p:cNvPr id="17" name="Text 11"/>
-          <p:cNvSpPr/>
-          <p:nvPr/>
-        </p:nvSpPr>
-        <p:spPr>
-          <a:xfrm>
-            <a:off x="3108960" y="5504688"/>
-            <a:ext cx="8168335" cy="310896"/>
-          </a:xfrm>
-          <a:prstGeom prst="rect">
-            <a:avLst/>
-          </a:prstGeom>
-          <a:noFill/>
-          <a:ln/>
-        </p:spPr>
-        <p:txBody>
-          <a:bodyPr wrap="square" rtlCol="0" anchor="ctr"/>
-          <a:lstStyle/>
-          <a:p>
-            <a:pPr indent="0" marL="0">
-              <a:buNone/>
-            </a:pPr>
-            <a:r>
-              <a:rPr lang="en-US" sz="1300" dirty="0">
-                <a:solidFill>
-                  <a:srgbClr val="1E2235"/>
-                </a:solidFill>
-                <a:latin typeface="Microsoft JhengHei" pitchFamily="34" charset="0"/>
-                <a:ea typeface="Microsoft JhengHei" pitchFamily="34" charset="-122"/>
-                <a:cs typeface="Microsoft JhengHei" pitchFamily="34" charset="-120"/>
-              </a:rPr>
-              <a:t>新工作階段能用一句話觸發技能，不必重述規則</a:t>
-            </a:r>
-            <a:endParaRPr lang="en-US" sz="1300" dirty="0"/>
-          </a:p>
-        </p:txBody>
-      </p:sp>
-      <p:pic>
-        <p:nvPicPr>
-          <p:cNvPr id="18" name="Image 4" descr="preencoded.png">    </p:cNvPr>
-          <p:cNvPicPr>
-            <a:picLocks noChangeAspect="1"/>
-          </p:cNvPicPr>
-          <p:nvPr/>
-        </p:nvPicPr>
-        <p:blipFill>
-          <a:blip r:embed="rId5"/>
-          <a:stretch>
-            <a:fillRect/>
-          </a:stretch>
-        </p:blipFill>
-        <p:spPr>
-          <a:xfrm>
-            <a:off x="2834640" y="5897880"/>
-            <a:ext cx="182880" cy="182880"/>
-          </a:xfrm>
-          <a:prstGeom prst="rect">
-            <a:avLst/>
-          </a:prstGeom>
-        </p:spPr>
-      </p:pic>
-      <p:sp>
-        <p:nvSpPr>
-          <p:cNvPr id="19" name="Text 12"/>
-          <p:cNvSpPr/>
-          <p:nvPr/>
-        </p:nvSpPr>
-        <p:spPr>
-          <a:xfrm>
-            <a:off x="3108960" y="5843016"/>
-            <a:ext cx="8168335" cy="310896"/>
-          </a:xfrm>
-          <a:prstGeom prst="rect">
-            <a:avLst/>
-          </a:prstGeom>
-          <a:noFill/>
-          <a:ln/>
-        </p:spPr>
-        <p:txBody>
-          <a:bodyPr wrap="square" rtlCol="0" anchor="ctr"/>
-          <a:lstStyle/>
-          <a:p>
-            <a:pPr indent="0" marL="0">
-              <a:buNone/>
-            </a:pPr>
-            <a:r>
-              <a:rPr lang="en-US" sz="1300" dirty="0">
-                <a:solidFill>
-                  <a:srgbClr val="1E2235"/>
-                </a:solidFill>
-                <a:latin typeface="Microsoft JhengHei" pitchFamily="34" charset="0"/>
-                <a:ea typeface="Microsoft JhengHei" pitchFamily="34" charset="-122"/>
-                <a:cs typeface="Microsoft JhengHei" pitchFamily="34" charset="-120"/>
-              </a:rPr>
-              <a:t>技能可依措辭輸出視覺化單檔 HTML 月報或 Outlook-ready HTML Email</a:t>
-            </a:r>
-            <a:endParaRPr lang="en-US" sz="1300" dirty="0"/>
-          </a:p>
-        </p:txBody>
-      </p:sp>
-      <p:sp>
-        <p:nvSpPr>
-          <p:cNvPr id="20" name="Text 13"/>
-          <p:cNvSpPr/>
-          <p:nvPr/>
-        </p:nvSpPr>
-        <p:spPr>
-          <a:xfrm>
-            <a:off x="640080" y="6473952"/>
-            <a:ext cx="5486400" cy="274320"/>
-          </a:xfrm>
-          <a:prstGeom prst="rect">
-            <a:avLst/>
-          </a:prstGeom>
-          <a:noFill/>
-          <a:ln/>
-        </p:spPr>
-        <p:txBody>
-          <a:bodyPr wrap="square" rtlCol="0" anchor="ctr"/>
-          <a:lstStyle/>
-          <a:p>
-            <a:pPr algn="l" indent="0" marL="0">
-              <a:buNone/>
-            </a:pPr>
-            <a:r>
-              <a:rPr lang="en-US" sz="900" dirty="0">
-                <a:solidFill>
-                  <a:srgbClr val="5B6079"/>
-                </a:solidFill>
-                <a:latin typeface="Microsoft JhengHei" pitchFamily="34" charset="0"/>
-                <a:ea typeface="Microsoft JhengHei" pitchFamily="34" charset="-122"/>
-                <a:cs typeface="Microsoft JhengHei" pitchFamily="34" charset="-120"/>
-              </a:rPr>
-              <a:t>Microsoft 365 Copilot Cowork</a:t>
-            </a:r>
-            <a:endParaRPr lang="en-US" sz="900" dirty="0"/>
-          </a:p>
-        </p:txBody>
-      </p:sp>
-      <p:sp>
-        <p:nvSpPr>
-          <p:cNvPr id="21" name="Text 14"/>
-          <p:cNvSpPr/>
-          <p:nvPr/>
-        </p:nvSpPr>
-        <p:spPr>
-          <a:xfrm>
-            <a:off x="11002975" y="6473952"/>
-            <a:ext cx="548640" cy="274320"/>
-          </a:xfrm>
-          <a:prstGeom prst="rect">
-            <a:avLst/>
-          </a:prstGeom>
-          <a:noFill/>
-          <a:ln/>
-        </p:spPr>
-        <p:txBody>
-          <a:bodyPr wrap="square" rtlCol="0" anchor="ctr"/>
-          <a:lstStyle/>
-          <a:p>
-            <a:pPr algn="r" indent="0" marL="0">
-              <a:buNone/>
-            </a:pPr>
-            <a:r>
-              <a:rPr lang="en-US" sz="900" dirty="0">
-                <a:solidFill>
-                  <a:srgbClr val="5B6079"/>
                 </a:solidFill>
                 <a:latin typeface="Microsoft JhengHei" pitchFamily="34" charset="0"/>
                 <a:ea typeface="Microsoft JhengHei" pitchFamily="34" charset="-122"/>
@@ -10065,7 +10154,7 @@
             <a:avLst/>
           </a:prstGeom>
           <a:solidFill>
-            <a:srgbClr val="6366F1"/>
+            <a:srgbClr val="8A4DDB"/>
           </a:solidFill>
           <a:ln/>
         </p:spPr>
@@ -10097,13 +10186,13 @@
             <a:r>
               <a:rPr lang="en-US" sz="1200" b="1" spc="200" kern="0" dirty="0">
                 <a:solidFill>
-                  <a:srgbClr val="6366F1"/>
-                </a:solidFill>
-                <a:latin typeface="Microsoft JhengHei" pitchFamily="34" charset="0"/>
-                <a:ea typeface="Microsoft JhengHei" pitchFamily="34" charset="-122"/>
-                <a:cs typeface="Microsoft JhengHei" pitchFamily="34" charset="-120"/>
-              </a:rPr>
-              <a:t>MAKE IT YOURS</a:t>
+                  <a:srgbClr val="8A4DDB"/>
+                </a:solidFill>
+                <a:latin typeface="Microsoft JhengHei" pitchFamily="34" charset="0"/>
+                <a:ea typeface="Microsoft JhengHei" pitchFamily="34" charset="-122"/>
+                <a:cs typeface="Microsoft JhengHei" pitchFamily="34" charset="-120"/>
+              </a:rPr>
+              <a:t>情境 05 · 實機示範</a:t>
             </a:r>
             <a:endParaRPr lang="en-US" sz="1200" dirty="0"/>
           </a:p>
@@ -10142,7 +10231,7 @@
                 <a:ea typeface="Microsoft JhengHei" pitchFamily="34" charset="-122"/>
                 <a:cs typeface="Microsoft JhengHei" pitchFamily="34" charset="-120"/>
               </a:rPr>
-              <a:t>把情境延伸到你的日常</a:t>
+              <a:t>看 Cowork 怎麼做、產出什麼</a:t>
             </a:r>
             <a:endParaRPr lang="en-US" sz="3000" dirty="0"/>
           </a:p>
@@ -10156,8 +10245,8 @@
         </p:nvSpPr>
         <p:spPr>
           <a:xfrm>
-            <a:off x="640080" y="1783080"/>
-            <a:ext cx="10911535" cy="731520"/>
+            <a:off x="585216" y="1773936"/>
+            <a:ext cx="5184648" cy="3433186"/>
           </a:xfrm>
           <a:prstGeom prst="rect">
             <a:avLst/>
@@ -10171,38 +10260,88 @@
             </a:solidFill>
             <a:prstDash val="solid"/>
           </a:ln>
-        </p:spPr>
-      </p:sp>
-      <p:sp>
-        <p:nvSpPr>
-          <p:cNvPr id="6" name="Shape 4"/>
-          <p:cNvSpPr/>
-          <p:nvPr/>
-        </p:nvSpPr>
-        <p:spPr>
-          <a:xfrm>
-            <a:off x="841248" y="1929384"/>
-            <a:ext cx="438912" cy="438912"/>
-          </a:xfrm>
-          <a:prstGeom prst="ellipse">
-            <a:avLst/>
-          </a:prstGeom>
-          <a:solidFill>
-            <a:srgbClr val="0A7C4A"/>
-          </a:solidFill>
-          <a:ln/>
-        </p:spPr>
-      </p:sp>
-      <p:sp>
-        <p:nvSpPr>
-          <p:cNvPr id="7" name="Shape 5"/>
-          <p:cNvSpPr/>
-          <p:nvPr/>
-        </p:nvSpPr>
-        <p:spPr>
-          <a:xfrm>
-            <a:off x="640080" y="2624328"/>
-            <a:ext cx="10911535" cy="731520"/>
+          <a:effectLst>
+            <a:outerShdw sx="100000" sy="100000" kx="0" ky="0" algn="bl" rotWithShape="0" blurRad="114300" dist="38100" dir="5400000">
+              <a:srgbClr val="8A90B5">
+                <a:alpha val="22000"/>
+              </a:srgbClr>
+            </a:outerShdw>
+          </a:effectLst>
+        </p:spPr>
+      </p:sp>
+      <p:pic>
+        <p:nvPicPr>
+          <p:cNvPr id="6" name="Image 0" descr="C:\temp\CoworkLab\v2\_working\screenshots\fin5_01_howto.png">    </p:cNvPr>
+          <p:cNvPicPr>
+            <a:picLocks noChangeAspect="1"/>
+          </p:cNvPicPr>
+          <p:nvPr/>
+        </p:nvPicPr>
+        <p:blipFill>
+          <a:blip r:embed="rId1"/>
+          <a:stretch>
+            <a:fillRect/>
+          </a:stretch>
+        </p:blipFill>
+        <p:spPr>
+          <a:xfrm>
+            <a:off x="640080" y="1828800"/>
+            <a:ext cx="5074920" cy="3323458"/>
+          </a:xfrm>
+          <a:prstGeom prst="rect">
+            <a:avLst/>
+          </a:prstGeom>
+        </p:spPr>
+      </p:pic>
+      <p:sp>
+        <p:nvSpPr>
+          <p:cNvPr id="7" name="Text 4"/>
+          <p:cNvSpPr/>
+          <p:nvPr/>
+        </p:nvSpPr>
+        <p:spPr>
+          <a:xfrm>
+            <a:off x="640080" y="5261986"/>
+            <a:ext cx="5074920" cy="320040"/>
+          </a:xfrm>
+          <a:prstGeom prst="rect">
+            <a:avLst/>
+          </a:prstGeom>
+          <a:noFill/>
+          <a:ln/>
+        </p:spPr>
+        <p:txBody>
+          <a:bodyPr wrap="square" rtlCol="0" anchor="ctr"/>
+          <a:lstStyle/>
+          <a:p>
+            <a:pPr algn="ctr" indent="0" marL="0">
+              <a:buNone/>
+            </a:pPr>
+            <a:r>
+              <a:rPr lang="en-US" sz="1350" b="1" dirty="0">
+                <a:solidFill>
+                  <a:srgbClr val="8A4DDB"/>
+                </a:solidFill>
+                <a:latin typeface="Microsoft JhengHei" pitchFamily="34" charset="0"/>
+                <a:ea typeface="Microsoft JhengHei" pitchFamily="34" charset="-122"/>
+                <a:cs typeface="Microsoft JhengHei" pitchFamily="34" charset="-120"/>
+              </a:rPr>
+              <a:t>① 你的輸入與指令</a:t>
+            </a:r>
+            <a:endParaRPr lang="en-US" sz="1350" dirty="0"/>
+          </a:p>
+        </p:txBody>
+      </p:sp>
+      <p:sp>
+        <p:nvSpPr>
+          <p:cNvPr id="8" name="Shape 5"/>
+          <p:cNvSpPr/>
+          <p:nvPr/>
+        </p:nvSpPr>
+        <p:spPr>
+          <a:xfrm>
+            <a:off x="6163056" y="1773936"/>
+            <a:ext cx="5184648" cy="3433186"/>
           </a:xfrm>
           <a:prstGeom prst="rect">
             <a:avLst/>
@@ -10216,38 +10355,88 @@
             </a:solidFill>
             <a:prstDash val="solid"/>
           </a:ln>
-        </p:spPr>
-      </p:sp>
-      <p:sp>
-        <p:nvSpPr>
-          <p:cNvPr id="8" name="Shape 6"/>
-          <p:cNvSpPr/>
-          <p:nvPr/>
-        </p:nvSpPr>
-        <p:spPr>
-          <a:xfrm>
-            <a:off x="841248" y="2770632"/>
-            <a:ext cx="438912" cy="438912"/>
-          </a:xfrm>
-          <a:prstGeom prst="ellipse">
-            <a:avLst/>
-          </a:prstGeom>
-          <a:solidFill>
-            <a:srgbClr val="2B579A"/>
-          </a:solidFill>
-          <a:ln/>
-        </p:spPr>
-      </p:sp>
-      <p:sp>
-        <p:nvSpPr>
-          <p:cNvPr id="9" name="Shape 7"/>
-          <p:cNvSpPr/>
-          <p:nvPr/>
-        </p:nvSpPr>
-        <p:spPr>
-          <a:xfrm>
-            <a:off x="640080" y="3465576"/>
-            <a:ext cx="10911535" cy="731520"/>
+          <a:effectLst>
+            <a:outerShdw sx="100000" sy="100000" kx="0" ky="0" algn="bl" rotWithShape="0" blurRad="114300" dist="38100" dir="5400000">
+              <a:srgbClr val="8A90B5">
+                <a:alpha val="22000"/>
+              </a:srgbClr>
+            </a:outerShdw>
+          </a:effectLst>
+        </p:spPr>
+      </p:sp>
+      <p:pic>
+        <p:nvPicPr>
+          <p:cNvPr id="9" name="Image 1" descr="C:\temp\CoworkLab\v2\_working\screenshots\fin5_04_html_preview.png">    </p:cNvPr>
+          <p:cNvPicPr>
+            <a:picLocks noChangeAspect="1"/>
+          </p:cNvPicPr>
+          <p:nvPr/>
+        </p:nvPicPr>
+        <p:blipFill>
+          <a:blip r:embed="rId2"/>
+          <a:stretch>
+            <a:fillRect/>
+          </a:stretch>
+        </p:blipFill>
+        <p:spPr>
+          <a:xfrm>
+            <a:off x="6217920" y="1828800"/>
+            <a:ext cx="5074920" cy="3323458"/>
+          </a:xfrm>
+          <a:prstGeom prst="rect">
+            <a:avLst/>
+          </a:prstGeom>
+        </p:spPr>
+      </p:pic>
+      <p:sp>
+        <p:nvSpPr>
+          <p:cNvPr id="10" name="Text 6"/>
+          <p:cNvSpPr/>
+          <p:nvPr/>
+        </p:nvSpPr>
+        <p:spPr>
+          <a:xfrm>
+            <a:off x="6217920" y="5261986"/>
+            <a:ext cx="5074920" cy="320040"/>
+          </a:xfrm>
+          <a:prstGeom prst="rect">
+            <a:avLst/>
+          </a:prstGeom>
+          <a:noFill/>
+          <a:ln/>
+        </p:spPr>
+        <p:txBody>
+          <a:bodyPr wrap="square" rtlCol="0" anchor="ctr"/>
+          <a:lstStyle/>
+          <a:p>
+            <a:pPr algn="ctr" indent="0" marL="0">
+              <a:buNone/>
+            </a:pPr>
+            <a:r>
+              <a:rPr lang="en-US" sz="1350" b="1" dirty="0">
+                <a:solidFill>
+                  <a:srgbClr val="8A4DDB"/>
+                </a:solidFill>
+                <a:latin typeface="Microsoft JhengHei" pitchFamily="34" charset="0"/>
+                <a:ea typeface="Microsoft JhengHei" pitchFamily="34" charset="-122"/>
+                <a:cs typeface="Microsoft JhengHei" pitchFamily="34" charset="-120"/>
+              </a:rPr>
+              <a:t>② 產出成果</a:t>
+            </a:r>
+            <a:endParaRPr lang="en-US" sz="1350" dirty="0"/>
+          </a:p>
+        </p:txBody>
+      </p:sp>
+      <p:sp>
+        <p:nvSpPr>
+          <p:cNvPr id="11" name="Shape 7"/>
+          <p:cNvSpPr/>
+          <p:nvPr/>
+        </p:nvSpPr>
+        <p:spPr>
+          <a:xfrm>
+            <a:off x="640080" y="5074920"/>
+            <a:ext cx="10911535" cy="1143000"/>
           </a:xfrm>
           <a:prstGeom prst="rect">
             <a:avLst/>
@@ -10265,106 +10454,16 @@
       </p:sp>
       <p:sp>
         <p:nvSpPr>
-          <p:cNvPr id="10" name="Shape 8"/>
-          <p:cNvSpPr/>
-          <p:nvPr/>
-        </p:nvSpPr>
-        <p:spPr>
-          <a:xfrm>
-            <a:off x="841248" y="3611880"/>
-            <a:ext cx="438912" cy="438912"/>
-          </a:xfrm>
-          <a:prstGeom prst="ellipse">
-            <a:avLst/>
-          </a:prstGeom>
-          <a:solidFill>
-            <a:srgbClr val="217346"/>
-          </a:solidFill>
-          <a:ln/>
-        </p:spPr>
-      </p:sp>
-      <p:sp>
-        <p:nvSpPr>
-          <p:cNvPr id="11" name="Shape 9"/>
-          <p:cNvSpPr/>
-          <p:nvPr/>
-        </p:nvSpPr>
-        <p:spPr>
-          <a:xfrm>
-            <a:off x="640080" y="4306824"/>
-            <a:ext cx="10911535" cy="731520"/>
-          </a:xfrm>
-          <a:prstGeom prst="rect">
-            <a:avLst/>
-          </a:prstGeom>
-          <a:solidFill>
-            <a:srgbClr val="FFFFFF"/>
-          </a:solidFill>
-          <a:ln w="12700">
-            <a:solidFill>
-              <a:srgbClr val="E4E7F2"/>
-            </a:solidFill>
-            <a:prstDash val="solid"/>
-          </a:ln>
-        </p:spPr>
-      </p:sp>
-      <p:sp>
-        <p:nvSpPr>
-          <p:cNvPr id="12" name="Shape 10"/>
-          <p:cNvSpPr/>
-          <p:nvPr/>
-        </p:nvSpPr>
-        <p:spPr>
-          <a:xfrm>
-            <a:off x="841248" y="4453128"/>
-            <a:ext cx="438912" cy="438912"/>
-          </a:xfrm>
-          <a:prstGeom prst="ellipse">
-            <a:avLst/>
-          </a:prstGeom>
-          <a:solidFill>
-            <a:srgbClr val="B4551B"/>
-          </a:solidFill>
-          <a:ln/>
-        </p:spPr>
-      </p:sp>
-      <p:sp>
-        <p:nvSpPr>
-          <p:cNvPr id="13" name="Shape 11"/>
-          <p:cNvSpPr/>
-          <p:nvPr/>
-        </p:nvSpPr>
-        <p:spPr>
-          <a:xfrm>
-            <a:off x="640080" y="5148072"/>
-            <a:ext cx="10911535" cy="731520"/>
-          </a:xfrm>
-          <a:prstGeom prst="rect">
-            <a:avLst/>
-          </a:prstGeom>
-          <a:solidFill>
-            <a:srgbClr val="FFFFFF"/>
-          </a:solidFill>
-          <a:ln w="12700">
-            <a:solidFill>
-              <a:srgbClr val="E4E7F2"/>
-            </a:solidFill>
-            <a:prstDash val="solid"/>
-          </a:ln>
-        </p:spPr>
-      </p:sp>
-      <p:sp>
-        <p:nvSpPr>
-          <p:cNvPr id="14" name="Shape 12"/>
-          <p:cNvSpPr/>
-          <p:nvPr/>
-        </p:nvSpPr>
-        <p:spPr>
-          <a:xfrm>
-            <a:off x="841248" y="5294376"/>
-            <a:ext cx="438912" cy="438912"/>
-          </a:xfrm>
-          <a:prstGeom prst="ellipse">
+          <p:cNvPr id="12" name="Shape 8"/>
+          <p:cNvSpPr/>
+          <p:nvPr/>
+        </p:nvSpPr>
+        <p:spPr>
+          <a:xfrm>
+            <a:off x="640080" y="5074920"/>
+            <a:ext cx="91440" cy="1143000"/>
+          </a:xfrm>
+          <a:prstGeom prst="rect">
             <a:avLst/>
           </a:prstGeom>
           <a:solidFill>
@@ -10373,219 +10472,48 @@
           <a:ln/>
         </p:spPr>
       </p:sp>
+      <p:sp>
+        <p:nvSpPr>
+          <p:cNvPr id="13" name="Text 9"/>
+          <p:cNvSpPr/>
+          <p:nvPr/>
+        </p:nvSpPr>
+        <p:spPr>
+          <a:xfrm>
+            <a:off x="914400" y="5184648"/>
+            <a:ext cx="1828800" cy="320040"/>
+          </a:xfrm>
+          <a:prstGeom prst="rect">
+            <a:avLst/>
+          </a:prstGeom>
+          <a:noFill/>
+          <a:ln/>
+        </p:spPr>
+        <p:txBody>
+          <a:bodyPr wrap="square" rtlCol="0" anchor="ctr"/>
+          <a:lstStyle/>
+          <a:p>
+            <a:pPr indent="0" marL="0">
+              <a:buNone/>
+            </a:pPr>
+            <a:r>
+              <a:rPr lang="en-US" sz="1400" b="1" dirty="0">
+                <a:solidFill>
+                  <a:srgbClr val="1E2235"/>
+                </a:solidFill>
+                <a:latin typeface="Microsoft JhengHei" pitchFamily="34" charset="0"/>
+                <a:ea typeface="Microsoft JhengHei" pitchFamily="34" charset="-122"/>
+                <a:cs typeface="Microsoft JhengHei" pitchFamily="34" charset="-120"/>
+              </a:rPr>
+              <a:t>產出驗收</a:t>
+            </a:r>
+            <a:endParaRPr lang="en-US" sz="1400" dirty="0"/>
+          </a:p>
+        </p:txBody>
+      </p:sp>
       <p:pic>
         <p:nvPicPr>
-          <p:cNvPr id="15" name="Image 0" descr="preencoded.png">    </p:cNvPr>
-          <p:cNvPicPr>
-            <a:picLocks noChangeAspect="1"/>
-          </p:cNvPicPr>
-          <p:nvPr/>
-        </p:nvPicPr>
-        <p:blipFill>
-          <a:blip r:embed="rId1"/>
-          <a:stretch>
-            <a:fillRect/>
-          </a:stretch>
-        </p:blipFill>
-        <p:spPr>
-          <a:xfrm>
-            <a:off x="950976" y="2039112"/>
-            <a:ext cx="219456" cy="219456"/>
-          </a:xfrm>
-          <a:prstGeom prst="rect">
-            <a:avLst/>
-          </a:prstGeom>
-        </p:spPr>
-      </p:pic>
-      <p:sp>
-        <p:nvSpPr>
-          <p:cNvPr id="16" name="Text 13"/>
-          <p:cNvSpPr/>
-          <p:nvPr/>
-        </p:nvSpPr>
-        <p:spPr>
-          <a:xfrm>
-            <a:off x="1417320" y="1819656"/>
-            <a:ext cx="2182307" cy="658368"/>
-          </a:xfrm>
-          <a:prstGeom prst="rect">
-            <a:avLst/>
-          </a:prstGeom>
-          <a:noFill/>
-          <a:ln/>
-        </p:spPr>
-        <p:txBody>
-          <a:bodyPr wrap="square" rtlCol="0" anchor="ctr"/>
-          <a:lstStyle/>
-          <a:p>
-            <a:pPr indent="0" marL="0">
-              <a:buNone/>
-            </a:pPr>
-            <a:r>
-              <a:rPr lang="en-US" sz="1400" b="1" dirty="0">
-                <a:solidFill>
-                  <a:srgbClr val="0A7C4A"/>
-                </a:solidFill>
-                <a:latin typeface="Microsoft JhengHei" pitchFamily="34" charset="0"/>
-                <a:ea typeface="Microsoft JhengHei" pitchFamily="34" charset="-122"/>
-                <a:cs typeface="Microsoft JhengHei" pitchFamily="34" charset="-120"/>
-              </a:rPr>
-              <a:t>金融 · 財富管理</a:t>
-            </a:r>
-            <a:endParaRPr lang="en-US" sz="1400" dirty="0"/>
-          </a:p>
-        </p:txBody>
-      </p:sp>
-      <p:sp>
-        <p:nvSpPr>
-          <p:cNvPr id="17" name="Text 14"/>
-          <p:cNvSpPr/>
-          <p:nvPr/>
-        </p:nvSpPr>
-        <p:spPr>
-          <a:xfrm>
-            <a:off x="3586195" y="1819656"/>
-            <a:ext cx="7747190" cy="658368"/>
-          </a:xfrm>
-          <a:prstGeom prst="rect">
-            <a:avLst/>
-          </a:prstGeom>
-          <a:noFill/>
-          <a:ln/>
-        </p:spPr>
-        <p:txBody>
-          <a:bodyPr wrap="square" rtlCol="0" anchor="ctr"/>
-          <a:lstStyle/>
-          <a:p>
-            <a:pPr indent="0" marL="0">
-              <a:lnSpc>
-                <a:spcPct val="108000"/>
-              </a:lnSpc>
-              <a:buNone/>
-            </a:pPr>
-            <a:r>
-              <a:rPr lang="en-US" sz="1350" dirty="0">
-                <a:solidFill>
-                  <a:srgbClr val="1E2235"/>
-                </a:solidFill>
-                <a:latin typeface="Microsoft JhengHei" pitchFamily="34" charset="0"/>
-                <a:ea typeface="Microsoft JhengHei" pitchFamily="34" charset="-122"/>
-                <a:cs typeface="Microsoft JhengHei" pitchFamily="34" charset="-120"/>
-              </a:rPr>
-              <a:t>💡 把研究對象改成你分行本季主推的資產主題，例如美元債、台股高股息或平衡型配置。</a:t>
-            </a:r>
-            <a:endParaRPr lang="en-US" sz="1350" dirty="0"/>
-          </a:p>
-        </p:txBody>
-      </p:sp>
-      <p:pic>
-        <p:nvPicPr>
-          <p:cNvPr id="18" name="Image 1" descr="preencoded.png">    </p:cNvPr>
-          <p:cNvPicPr>
-            <a:picLocks noChangeAspect="1"/>
-          </p:cNvPicPr>
-          <p:nvPr/>
-        </p:nvPicPr>
-        <p:blipFill>
-          <a:blip r:embed="rId2"/>
-          <a:stretch>
-            <a:fillRect/>
-          </a:stretch>
-        </p:blipFill>
-        <p:spPr>
-          <a:xfrm>
-            <a:off x="950976" y="2880360"/>
-            <a:ext cx="219456" cy="219456"/>
-          </a:xfrm>
-          <a:prstGeom prst="rect">
-            <a:avLst/>
-          </a:prstGeom>
-        </p:spPr>
-      </p:pic>
-      <p:sp>
-        <p:nvSpPr>
-          <p:cNvPr id="19" name="Text 15"/>
-          <p:cNvSpPr/>
-          <p:nvPr/>
-        </p:nvSpPr>
-        <p:spPr>
-          <a:xfrm>
-            <a:off x="1417320" y="2660904"/>
-            <a:ext cx="2182307" cy="658368"/>
-          </a:xfrm>
-          <a:prstGeom prst="rect">
-            <a:avLst/>
-          </a:prstGeom>
-          <a:noFill/>
-          <a:ln/>
-        </p:spPr>
-        <p:txBody>
-          <a:bodyPr wrap="square" rtlCol="0" anchor="ctr"/>
-          <a:lstStyle/>
-          <a:p>
-            <a:pPr indent="0" marL="0">
-              <a:buNone/>
-            </a:pPr>
-            <a:r>
-              <a:rPr lang="en-US" sz="1400" b="1" dirty="0">
-                <a:solidFill>
-                  <a:srgbClr val="2B579A"/>
-                </a:solidFill>
-                <a:latin typeface="Microsoft JhengHei" pitchFamily="34" charset="0"/>
-                <a:ea typeface="Microsoft JhengHei" pitchFamily="34" charset="-122"/>
-                <a:cs typeface="Microsoft JhengHei" pitchFamily="34" charset="-120"/>
-              </a:rPr>
-              <a:t>金融 · 授信</a:t>
-            </a:r>
-            <a:endParaRPr lang="en-US" sz="1400" dirty="0"/>
-          </a:p>
-        </p:txBody>
-      </p:sp>
-      <p:sp>
-        <p:nvSpPr>
-          <p:cNvPr id="20" name="Text 16"/>
-          <p:cNvSpPr/>
-          <p:nvPr/>
-        </p:nvSpPr>
-        <p:spPr>
-          <a:xfrm>
-            <a:off x="3586195" y="2660904"/>
-            <a:ext cx="7747190" cy="658368"/>
-          </a:xfrm>
-          <a:prstGeom prst="rect">
-            <a:avLst/>
-          </a:prstGeom>
-          <a:noFill/>
-          <a:ln/>
-        </p:spPr>
-        <p:txBody>
-          <a:bodyPr wrap="square" rtlCol="0" anchor="ctr"/>
-          <a:lstStyle/>
-          <a:p>
-            <a:pPr indent="0" marL="0">
-              <a:lnSpc>
-                <a:spcPct val="108000"/>
-              </a:lnSpc>
-              <a:buNone/>
-            </a:pPr>
-            <a:r>
-              <a:rPr lang="en-US" sz="1350" dirty="0">
-                <a:solidFill>
-                  <a:srgbClr val="1E2235"/>
-                </a:solidFill>
-                <a:latin typeface="Microsoft JhengHei" pitchFamily="34" charset="0"/>
-                <a:ea typeface="Microsoft JhengHei" pitchFamily="34" charset="-122"/>
-                <a:cs typeface="Microsoft JhengHei" pitchFamily="34" charset="-120"/>
-              </a:rPr>
-              <a:t>💡 把案件換成你手上的真實授信案（先去識別化），讓 Cowork 幫你做第一版摘要。</a:t>
-            </a:r>
-            <a:endParaRPr lang="en-US" sz="1350" dirty="0"/>
-          </a:p>
-        </p:txBody>
-      </p:sp>
-      <p:pic>
-        <p:nvPicPr>
-          <p:cNvPr id="21" name="Image 2" descr="preencoded.png">    </p:cNvPr>
+          <p:cNvPr id="14" name="Image 2" descr="preencoded.png">    </p:cNvPr>
           <p:cNvPicPr>
             <a:picLocks noChangeAspect="1"/>
           </p:cNvPicPr>
@@ -10599,8 +10527,8 @@
         </p:blipFill>
         <p:spPr>
           <a:xfrm>
-            <a:off x="950976" y="3721608"/>
-            <a:ext cx="219456" cy="219456"/>
+            <a:off x="2834640" y="5221224"/>
+            <a:ext cx="182880" cy="182880"/>
           </a:xfrm>
           <a:prstGeom prst="rect">
             <a:avLst/>
@@ -10609,14 +10537,14 @@
       </p:pic>
       <p:sp>
         <p:nvSpPr>
-          <p:cNvPr id="22" name="Text 17"/>
-          <p:cNvSpPr/>
-          <p:nvPr/>
-        </p:nvSpPr>
-        <p:spPr>
-          <a:xfrm>
-            <a:off x="1417320" y="3502152"/>
-            <a:ext cx="2182307" cy="658368"/>
+          <p:cNvPr id="15" name="Text 10"/>
+          <p:cNvSpPr/>
+          <p:nvPr/>
+        </p:nvSpPr>
+        <p:spPr>
+          <a:xfrm>
+            <a:off x="3108960" y="5166360"/>
+            <a:ext cx="8168335" cy="310896"/>
           </a:xfrm>
           <a:prstGeom prst="rect">
             <a:avLst/>
@@ -10632,49 +10560,7 @@
               <a:buNone/>
             </a:pPr>
             <a:r>
-              <a:rPr lang="en-US" sz="1400" b="1" dirty="0">
-                <a:solidFill>
-                  <a:srgbClr val="217346"/>
-                </a:solidFill>
-                <a:latin typeface="Microsoft JhengHei" pitchFamily="34" charset="0"/>
-                <a:ea typeface="Microsoft JhengHei" pitchFamily="34" charset="-122"/>
-                <a:cs typeface="Microsoft JhengHei" pitchFamily="34" charset="-120"/>
-              </a:rPr>
-              <a:t>金融 · 分行營運</a:t>
-            </a:r>
-            <a:endParaRPr lang="en-US" sz="1400" dirty="0"/>
-          </a:p>
-        </p:txBody>
-      </p:sp>
-      <p:sp>
-        <p:nvSpPr>
-          <p:cNvPr id="23" name="Text 18"/>
-          <p:cNvSpPr/>
-          <p:nvPr/>
-        </p:nvSpPr>
-        <p:spPr>
-          <a:xfrm>
-            <a:off x="3586195" y="3502152"/>
-            <a:ext cx="7747190" cy="658368"/>
-          </a:xfrm>
-          <a:prstGeom prst="rect">
-            <a:avLst/>
-          </a:prstGeom>
-          <a:noFill/>
-          <a:ln/>
-        </p:spPr>
-        <p:txBody>
-          <a:bodyPr wrap="square" rtlCol="0" anchor="ctr"/>
-          <a:lstStyle/>
-          <a:p>
-            <a:pPr indent="0" marL="0">
-              <a:lnSpc>
-                <a:spcPct val="108000"/>
-              </a:lnSpc>
-              <a:buNone/>
-            </a:pPr>
-            <a:r>
-              <a:rPr lang="en-US" sz="1350" dirty="0">
+              <a:rPr lang="en-US" sz="1300" dirty="0">
                 <a:solidFill>
                   <a:srgbClr val="1E2235"/>
                 </a:solidFill>
@@ -10682,15 +10568,15 @@
                 <a:ea typeface="Microsoft JhengHei" pitchFamily="34" charset="-122"/>
                 <a:cs typeface="Microsoft JhengHei" pitchFamily="34" charset="-120"/>
               </a:rPr>
-              <a:t>💡 換成你實際的分行或區域資料，讓 Cowork 先產出月會用的底稿。</a:t>
-            </a:r>
-            <a:endParaRPr lang="en-US" sz="1350" dirty="0"/>
+              <a:t>client-monthly-report 技能已建立，且規則包含格式判斷、過濾、遮罩與免責聲明</a:t>
+            </a:r>
+            <a:endParaRPr lang="en-US" sz="1300" dirty="0"/>
           </a:p>
         </p:txBody>
       </p:sp>
       <p:pic>
         <p:nvPicPr>
-          <p:cNvPr id="24" name="Image 3" descr="preencoded.png">    </p:cNvPr>
+          <p:cNvPr id="16" name="Image 3" descr="preencoded.png">    </p:cNvPr>
           <p:cNvPicPr>
             <a:picLocks noChangeAspect="1"/>
           </p:cNvPicPr>
@@ -10704,8 +10590,8 @@
         </p:blipFill>
         <p:spPr>
           <a:xfrm>
-            <a:off x="950976" y="4562856"/>
-            <a:ext cx="219456" cy="219456"/>
+            <a:off x="2834640" y="5559552"/>
+            <a:ext cx="182880" cy="182880"/>
           </a:xfrm>
           <a:prstGeom prst="rect">
             <a:avLst/>
@@ -10714,14 +10600,14 @@
       </p:pic>
       <p:sp>
         <p:nvSpPr>
-          <p:cNvPr id="25" name="Text 19"/>
-          <p:cNvSpPr/>
-          <p:nvPr/>
-        </p:nvSpPr>
-        <p:spPr>
-          <a:xfrm>
-            <a:off x="1417320" y="4343400"/>
-            <a:ext cx="2182307" cy="658368"/>
+          <p:cNvPr id="17" name="Text 11"/>
+          <p:cNvSpPr/>
+          <p:nvPr/>
+        </p:nvSpPr>
+        <p:spPr>
+          <a:xfrm>
+            <a:off x="3108960" y="5504688"/>
+            <a:ext cx="8168335" cy="310896"/>
           </a:xfrm>
           <a:prstGeom prst="rect">
             <a:avLst/>
@@ -10737,49 +10623,7 @@
               <a:buNone/>
             </a:pPr>
             <a:r>
-              <a:rPr lang="en-US" sz="1400" b="1" dirty="0">
-                <a:solidFill>
-                  <a:srgbClr val="B4551B"/>
-                </a:solidFill>
-                <a:latin typeface="Microsoft JhengHei" pitchFamily="34" charset="0"/>
-                <a:ea typeface="Microsoft JhengHei" pitchFamily="34" charset="-122"/>
-                <a:cs typeface="Microsoft JhengHei" pitchFamily="34" charset="-120"/>
-              </a:rPr>
-              <a:t>金融 · 法遵</a:t>
-            </a:r>
-            <a:endParaRPr lang="en-US" sz="1400" dirty="0"/>
-          </a:p>
-        </p:txBody>
-      </p:sp>
-      <p:sp>
-        <p:nvSpPr>
-          <p:cNvPr id="26" name="Text 20"/>
-          <p:cNvSpPr/>
-          <p:nvPr/>
-        </p:nvSpPr>
-        <p:spPr>
-          <a:xfrm>
-            <a:off x="3586195" y="4343400"/>
-            <a:ext cx="7747190" cy="658368"/>
-          </a:xfrm>
-          <a:prstGeom prst="rect">
-            <a:avLst/>
-          </a:prstGeom>
-          <a:noFill/>
-          <a:ln/>
-        </p:spPr>
-        <p:txBody>
-          <a:bodyPr wrap="square" rtlCol="0" anchor="ctr"/>
-          <a:lstStyle/>
-          <a:p>
-            <a:pPr indent="0" marL="0">
-              <a:lnSpc>
-                <a:spcPct val="108000"/>
-              </a:lnSpc>
-              <a:buNone/>
-            </a:pPr>
-            <a:r>
-              <a:rPr lang="en-US" sz="1350" dirty="0">
+              <a:rPr lang="en-US" sz="1300" dirty="0">
                 <a:solidFill>
                   <a:srgbClr val="1E2235"/>
                 </a:solidFill>
@@ -10787,15 +10631,15 @@
                 <a:ea typeface="Microsoft JhengHei" pitchFamily="34" charset="-122"/>
                 <a:cs typeface="Microsoft JhengHei" pitchFamily="34" charset="-120"/>
               </a:rPr>
-              <a:t>💡 把你常用的 SAR 結構或銀行內部模板段落告訴 Cowork，讓草稿更貼近實務格式。</a:t>
-            </a:r>
-            <a:endParaRPr lang="en-US" sz="1350" dirty="0"/>
+              <a:t>新工作階段能用一句話觸發技能，不必重述規則</a:t>
+            </a:r>
+            <a:endParaRPr lang="en-US" sz="1300" dirty="0"/>
           </a:p>
         </p:txBody>
       </p:sp>
       <p:pic>
         <p:nvPicPr>
-          <p:cNvPr id="27" name="Image 4" descr="preencoded.png">    </p:cNvPr>
+          <p:cNvPr id="18" name="Image 4" descr="preencoded.png">    </p:cNvPr>
           <p:cNvPicPr>
             <a:picLocks noChangeAspect="1"/>
           </p:cNvPicPr>
@@ -10809,8 +10653,8 @@
         </p:blipFill>
         <p:spPr>
           <a:xfrm>
-            <a:off x="950976" y="5404104"/>
-            <a:ext cx="219456" cy="219456"/>
+            <a:off x="2834640" y="5897880"/>
+            <a:ext cx="182880" cy="182880"/>
           </a:xfrm>
           <a:prstGeom prst="rect">
             <a:avLst/>
@@ -10819,14 +10663,14 @@
       </p:pic>
       <p:sp>
         <p:nvSpPr>
-          <p:cNvPr id="28" name="Text 21"/>
-          <p:cNvSpPr/>
-          <p:nvPr/>
-        </p:nvSpPr>
-        <p:spPr>
-          <a:xfrm>
-            <a:off x="1417320" y="5184648"/>
-            <a:ext cx="2182307" cy="658368"/>
+          <p:cNvPr id="19" name="Text 12"/>
+          <p:cNvSpPr/>
+          <p:nvPr/>
+        </p:nvSpPr>
+        <p:spPr>
+          <a:xfrm>
+            <a:off x="3108960" y="5843016"/>
+            <a:ext cx="8168335" cy="310896"/>
           </a:xfrm>
           <a:prstGeom prst="rect">
             <a:avLst/>
@@ -10842,49 +10686,7 @@
               <a:buNone/>
             </a:pPr>
             <a:r>
-              <a:rPr lang="en-US" sz="1400" b="1" dirty="0">
-                <a:solidFill>
-                  <a:srgbClr val="8A4DDB"/>
-                </a:solidFill>
-                <a:latin typeface="Microsoft JhengHei" pitchFamily="34" charset="0"/>
-                <a:ea typeface="Microsoft JhengHei" pitchFamily="34" charset="-122"/>
-                <a:cs typeface="Microsoft JhengHei" pitchFamily="34" charset="-120"/>
-              </a:rPr>
-              <a:t>金融 · 自動化</a:t>
-            </a:r>
-            <a:endParaRPr lang="en-US" sz="1400" dirty="0"/>
-          </a:p>
-        </p:txBody>
-      </p:sp>
-      <p:sp>
-        <p:nvSpPr>
-          <p:cNvPr id="29" name="Text 22"/>
-          <p:cNvSpPr/>
-          <p:nvPr/>
-        </p:nvSpPr>
-        <p:spPr>
-          <a:xfrm>
-            <a:off x="3586195" y="5184648"/>
-            <a:ext cx="7747190" cy="658368"/>
-          </a:xfrm>
-          <a:prstGeom prst="rect">
-            <a:avLst/>
-          </a:prstGeom>
-          <a:noFill/>
-          <a:ln/>
-        </p:spPr>
-        <p:txBody>
-          <a:bodyPr wrap="square" rtlCol="0" anchor="ctr"/>
-          <a:lstStyle/>
-          <a:p>
-            <a:pPr indent="0" marL="0">
-              <a:lnSpc>
-                <a:spcPct val="108000"/>
-              </a:lnSpc>
-              <a:buNone/>
-            </a:pPr>
-            <a:r>
-              <a:rPr lang="en-US" sz="1350" dirty="0">
+              <a:rPr lang="en-US" sz="1300" dirty="0">
                 <a:solidFill>
                   <a:srgbClr val="1E2235"/>
                 </a:solidFill>
@@ -10892,15 +10694,15 @@
                 <a:ea typeface="Microsoft JhengHei" pitchFamily="34" charset="-122"/>
                 <a:cs typeface="Microsoft JhengHei" pitchFamily="34" charset="-120"/>
               </a:rPr>
-              <a:t>💡 把這個技能進一步加上品牌色、分行署名與標準頁尾，做成你分行專屬版本。</a:t>
-            </a:r>
-            <a:endParaRPr lang="en-US" sz="1350" dirty="0"/>
-          </a:p>
-        </p:txBody>
-      </p:sp>
-      <p:sp>
-        <p:nvSpPr>
-          <p:cNvPr id="30" name="Text 23"/>
+              <a:t>技能可依措辭輸出視覺化單檔 HTML 月報或 Outlook-ready HTML Email</a:t>
+            </a:r>
+            <a:endParaRPr lang="en-US" sz="1300" dirty="0"/>
+          </a:p>
+        </p:txBody>
+      </p:sp>
+      <p:sp>
+        <p:nvSpPr>
+          <p:cNvPr id="20" name="Text 13"/>
           <p:cNvSpPr/>
           <p:nvPr/>
         </p:nvSpPr>
@@ -10939,7 +10741,7 @@
       </p:sp>
       <p:sp>
         <p:nvSpPr>
-          <p:cNvPr id="31" name="Text 24"/>
+          <p:cNvPr id="21" name="Text 14"/>
           <p:cNvSpPr/>
           <p:nvPr/>
         </p:nvSpPr>
@@ -10989,16 +10791,9 @@
   <p:cSld name="Slide 19">
     <p:bg>
       <p:bgPr>
-        <a:blipFill dpi="0" rotWithShape="1">
-          <a:blip r:embed="rId1">
-            <a:lum/>
-          </a:blip>
-          <a:srcRect/>
-          <a:stretch>
-            <a:fillRect/>
-          </a:stretch>
-        </a:blipFill>
-        <a:effectLst/>
+        <a:solidFill>
+          <a:srgbClr val="F7F8FC"/>
+        </a:solidFill>
       </p:bgPr>
     </p:bg>
     <p:spTree>
@@ -11030,7 +10825,7 @@
             <a:avLst/>
           </a:prstGeom>
           <a:solidFill>
-            <a:srgbClr val="22D3EE"/>
+            <a:srgbClr val="6366F1"/>
           </a:solidFill>
           <a:ln/>
         </p:spPr>
@@ -11062,13 +10857,13 @@
             <a:r>
               <a:rPr lang="en-US" sz="1200" b="1" spc="200" kern="0" dirty="0">
                 <a:solidFill>
-                  <a:srgbClr val="22D3EE"/>
-                </a:solidFill>
-                <a:latin typeface="Microsoft JhengHei" pitchFamily="34" charset="0"/>
-                <a:ea typeface="Microsoft JhengHei" pitchFamily="34" charset="-122"/>
-                <a:cs typeface="Microsoft JhengHei" pitchFamily="34" charset="-120"/>
-              </a:rPr>
-              <a:t>TRUST &amp; CONTROL</a:t>
+                  <a:srgbClr val="6366F1"/>
+                </a:solidFill>
+                <a:latin typeface="Microsoft JhengHei" pitchFamily="34" charset="0"/>
+                <a:ea typeface="Microsoft JhengHei" pitchFamily="34" charset="-122"/>
+                <a:cs typeface="Microsoft JhengHei" pitchFamily="34" charset="-120"/>
+              </a:rPr>
+              <a:t>MAKE IT YOURS</a:t>
             </a:r>
             <a:endParaRPr lang="en-US" sz="1200" dirty="0"/>
           </a:p>
@@ -11101,13 +10896,13 @@
             <a:r>
               <a:rPr lang="en-US" sz="3000" b="1" dirty="0">
                 <a:solidFill>
-                  <a:srgbClr val="FFFFFF"/>
-                </a:solidFill>
-                <a:latin typeface="Microsoft JhengHei" pitchFamily="34" charset="0"/>
-                <a:ea typeface="Microsoft JhengHei" pitchFamily="34" charset="-122"/>
-                <a:cs typeface="Microsoft JhengHei" pitchFamily="34" charset="-120"/>
-              </a:rPr>
-              <a:t>自動化，但你始終是決策者</a:t>
+                  <a:srgbClr val="1E2235"/>
+                </a:solidFill>
+                <a:latin typeface="Microsoft JhengHei" pitchFamily="34" charset="0"/>
+                <a:ea typeface="Microsoft JhengHei" pitchFamily="34" charset="-122"/>
+                <a:cs typeface="Microsoft JhengHei" pitchFamily="34" charset="-120"/>
+              </a:rPr>
+              <a:t>把情境延伸到你的日常</a:t>
             </a:r>
             <a:endParaRPr lang="en-US" sz="3000" dirty="0"/>
           </a:p>
@@ -11121,32 +10916,331 @@
         </p:nvSpPr>
         <p:spPr>
           <a:xfrm>
-            <a:off x="640080" y="1874520"/>
-            <a:ext cx="777240" cy="777240"/>
-          </a:xfrm>
-          <a:prstGeom prst="roundRect">
-            <a:avLst>
-              <a:gd name="adj" fmla="val 18824"/>
-            </a:avLst>
+            <a:off x="640080" y="1783080"/>
+            <a:ext cx="10911535" cy="731520"/>
+          </a:xfrm>
+          <a:prstGeom prst="rect">
+            <a:avLst/>
           </a:prstGeom>
           <a:solidFill>
-            <a:srgbClr val="FFFFFF">
-              <a:alpha val="14000"/>
-            </a:srgbClr>
+            <a:srgbClr val="FFFFFF"/>
           </a:solidFill>
           <a:ln w="12700">
             <a:solidFill>
-              <a:srgbClr val="22D3EE">
-                <a:alpha val="60000"/>
-              </a:srgbClr>
+              <a:srgbClr val="E4E7F2"/>
             </a:solidFill>
             <a:prstDash val="solid"/>
           </a:ln>
         </p:spPr>
       </p:sp>
+      <p:sp>
+        <p:nvSpPr>
+          <p:cNvPr id="6" name="Shape 4"/>
+          <p:cNvSpPr/>
+          <p:nvPr/>
+        </p:nvSpPr>
+        <p:spPr>
+          <a:xfrm>
+            <a:off x="841248" y="1929384"/>
+            <a:ext cx="438912" cy="438912"/>
+          </a:xfrm>
+          <a:prstGeom prst="ellipse">
+            <a:avLst/>
+          </a:prstGeom>
+          <a:solidFill>
+            <a:srgbClr val="0A7C4A"/>
+          </a:solidFill>
+          <a:ln/>
+        </p:spPr>
+      </p:sp>
+      <p:sp>
+        <p:nvSpPr>
+          <p:cNvPr id="7" name="Shape 5"/>
+          <p:cNvSpPr/>
+          <p:nvPr/>
+        </p:nvSpPr>
+        <p:spPr>
+          <a:xfrm>
+            <a:off x="640080" y="2624328"/>
+            <a:ext cx="10911535" cy="731520"/>
+          </a:xfrm>
+          <a:prstGeom prst="rect">
+            <a:avLst/>
+          </a:prstGeom>
+          <a:solidFill>
+            <a:srgbClr val="FFFFFF"/>
+          </a:solidFill>
+          <a:ln w="12700">
+            <a:solidFill>
+              <a:srgbClr val="E4E7F2"/>
+            </a:solidFill>
+            <a:prstDash val="solid"/>
+          </a:ln>
+        </p:spPr>
+      </p:sp>
+      <p:sp>
+        <p:nvSpPr>
+          <p:cNvPr id="8" name="Shape 6"/>
+          <p:cNvSpPr/>
+          <p:nvPr/>
+        </p:nvSpPr>
+        <p:spPr>
+          <a:xfrm>
+            <a:off x="841248" y="2770632"/>
+            <a:ext cx="438912" cy="438912"/>
+          </a:xfrm>
+          <a:prstGeom prst="ellipse">
+            <a:avLst/>
+          </a:prstGeom>
+          <a:solidFill>
+            <a:srgbClr val="2B579A"/>
+          </a:solidFill>
+          <a:ln/>
+        </p:spPr>
+      </p:sp>
+      <p:sp>
+        <p:nvSpPr>
+          <p:cNvPr id="9" name="Shape 7"/>
+          <p:cNvSpPr/>
+          <p:nvPr/>
+        </p:nvSpPr>
+        <p:spPr>
+          <a:xfrm>
+            <a:off x="640080" y="3465576"/>
+            <a:ext cx="10911535" cy="731520"/>
+          </a:xfrm>
+          <a:prstGeom prst="rect">
+            <a:avLst/>
+          </a:prstGeom>
+          <a:solidFill>
+            <a:srgbClr val="FFFFFF"/>
+          </a:solidFill>
+          <a:ln w="12700">
+            <a:solidFill>
+              <a:srgbClr val="E4E7F2"/>
+            </a:solidFill>
+            <a:prstDash val="solid"/>
+          </a:ln>
+        </p:spPr>
+      </p:sp>
+      <p:sp>
+        <p:nvSpPr>
+          <p:cNvPr id="10" name="Shape 8"/>
+          <p:cNvSpPr/>
+          <p:nvPr/>
+        </p:nvSpPr>
+        <p:spPr>
+          <a:xfrm>
+            <a:off x="841248" y="3611880"/>
+            <a:ext cx="438912" cy="438912"/>
+          </a:xfrm>
+          <a:prstGeom prst="ellipse">
+            <a:avLst/>
+          </a:prstGeom>
+          <a:solidFill>
+            <a:srgbClr val="217346"/>
+          </a:solidFill>
+          <a:ln/>
+        </p:spPr>
+      </p:sp>
+      <p:sp>
+        <p:nvSpPr>
+          <p:cNvPr id="11" name="Shape 9"/>
+          <p:cNvSpPr/>
+          <p:nvPr/>
+        </p:nvSpPr>
+        <p:spPr>
+          <a:xfrm>
+            <a:off x="640080" y="4306824"/>
+            <a:ext cx="10911535" cy="731520"/>
+          </a:xfrm>
+          <a:prstGeom prst="rect">
+            <a:avLst/>
+          </a:prstGeom>
+          <a:solidFill>
+            <a:srgbClr val="FFFFFF"/>
+          </a:solidFill>
+          <a:ln w="12700">
+            <a:solidFill>
+              <a:srgbClr val="E4E7F2"/>
+            </a:solidFill>
+            <a:prstDash val="solid"/>
+          </a:ln>
+        </p:spPr>
+      </p:sp>
+      <p:sp>
+        <p:nvSpPr>
+          <p:cNvPr id="12" name="Shape 10"/>
+          <p:cNvSpPr/>
+          <p:nvPr/>
+        </p:nvSpPr>
+        <p:spPr>
+          <a:xfrm>
+            <a:off x="841248" y="4453128"/>
+            <a:ext cx="438912" cy="438912"/>
+          </a:xfrm>
+          <a:prstGeom prst="ellipse">
+            <a:avLst/>
+          </a:prstGeom>
+          <a:solidFill>
+            <a:srgbClr val="B4551B"/>
+          </a:solidFill>
+          <a:ln/>
+        </p:spPr>
+      </p:sp>
+      <p:sp>
+        <p:nvSpPr>
+          <p:cNvPr id="13" name="Shape 11"/>
+          <p:cNvSpPr/>
+          <p:nvPr/>
+        </p:nvSpPr>
+        <p:spPr>
+          <a:xfrm>
+            <a:off x="640080" y="5148072"/>
+            <a:ext cx="10911535" cy="731520"/>
+          </a:xfrm>
+          <a:prstGeom prst="rect">
+            <a:avLst/>
+          </a:prstGeom>
+          <a:solidFill>
+            <a:srgbClr val="FFFFFF"/>
+          </a:solidFill>
+          <a:ln w="12700">
+            <a:solidFill>
+              <a:srgbClr val="E4E7F2"/>
+            </a:solidFill>
+            <a:prstDash val="solid"/>
+          </a:ln>
+        </p:spPr>
+      </p:sp>
+      <p:sp>
+        <p:nvSpPr>
+          <p:cNvPr id="14" name="Shape 12"/>
+          <p:cNvSpPr/>
+          <p:nvPr/>
+        </p:nvSpPr>
+        <p:spPr>
+          <a:xfrm>
+            <a:off x="841248" y="5294376"/>
+            <a:ext cx="438912" cy="438912"/>
+          </a:xfrm>
+          <a:prstGeom prst="ellipse">
+            <a:avLst/>
+          </a:prstGeom>
+          <a:solidFill>
+            <a:srgbClr val="8A4DDB"/>
+          </a:solidFill>
+          <a:ln/>
+        </p:spPr>
+      </p:sp>
       <p:pic>
         <p:nvPicPr>
-          <p:cNvPr id="6" name="Image 0" descr="preencoded.png">    </p:cNvPr>
+          <p:cNvPr id="15" name="Image 0" descr="preencoded.png">    </p:cNvPr>
+          <p:cNvPicPr>
+            <a:picLocks noChangeAspect="1"/>
+          </p:cNvPicPr>
+          <p:nvPr/>
+        </p:nvPicPr>
+        <p:blipFill>
+          <a:blip r:embed="rId1"/>
+          <a:stretch>
+            <a:fillRect/>
+          </a:stretch>
+        </p:blipFill>
+        <p:spPr>
+          <a:xfrm>
+            <a:off x="950976" y="2039112"/>
+            <a:ext cx="219456" cy="219456"/>
+          </a:xfrm>
+          <a:prstGeom prst="rect">
+            <a:avLst/>
+          </a:prstGeom>
+        </p:spPr>
+      </p:pic>
+      <p:sp>
+        <p:nvSpPr>
+          <p:cNvPr id="16" name="Text 13"/>
+          <p:cNvSpPr/>
+          <p:nvPr/>
+        </p:nvSpPr>
+        <p:spPr>
+          <a:xfrm>
+            <a:off x="1417320" y="1819656"/>
+            <a:ext cx="2182307" cy="658368"/>
+          </a:xfrm>
+          <a:prstGeom prst="rect">
+            <a:avLst/>
+          </a:prstGeom>
+          <a:noFill/>
+          <a:ln/>
+        </p:spPr>
+        <p:txBody>
+          <a:bodyPr wrap="square" rtlCol="0" anchor="ctr"/>
+          <a:lstStyle/>
+          <a:p>
+            <a:pPr indent="0" marL="0">
+              <a:buNone/>
+            </a:pPr>
+            <a:r>
+              <a:rPr lang="en-US" sz="1400" b="1" dirty="0">
+                <a:solidFill>
+                  <a:srgbClr val="0A7C4A"/>
+                </a:solidFill>
+                <a:latin typeface="Microsoft JhengHei" pitchFamily="34" charset="0"/>
+                <a:ea typeface="Microsoft JhengHei" pitchFamily="34" charset="-122"/>
+                <a:cs typeface="Microsoft JhengHei" pitchFamily="34" charset="-120"/>
+              </a:rPr>
+              <a:t>金融 · 財富管理</a:t>
+            </a:r>
+            <a:endParaRPr lang="en-US" sz="1400" dirty="0"/>
+          </a:p>
+        </p:txBody>
+      </p:sp>
+      <p:sp>
+        <p:nvSpPr>
+          <p:cNvPr id="17" name="Text 14"/>
+          <p:cNvSpPr/>
+          <p:nvPr/>
+        </p:nvSpPr>
+        <p:spPr>
+          <a:xfrm>
+            <a:off x="3586195" y="1819656"/>
+            <a:ext cx="7747190" cy="658368"/>
+          </a:xfrm>
+          <a:prstGeom prst="rect">
+            <a:avLst/>
+          </a:prstGeom>
+          <a:noFill/>
+          <a:ln/>
+        </p:spPr>
+        <p:txBody>
+          <a:bodyPr wrap="square" rtlCol="0" anchor="ctr"/>
+          <a:lstStyle/>
+          <a:p>
+            <a:pPr indent="0" marL="0">
+              <a:lnSpc>
+                <a:spcPct val="108000"/>
+              </a:lnSpc>
+              <a:buNone/>
+            </a:pPr>
+            <a:r>
+              <a:rPr lang="en-US" sz="1350" dirty="0">
+                <a:solidFill>
+                  <a:srgbClr val="1E2235"/>
+                </a:solidFill>
+                <a:latin typeface="Microsoft JhengHei" pitchFamily="34" charset="0"/>
+                <a:ea typeface="Microsoft JhengHei" pitchFamily="34" charset="-122"/>
+                <a:cs typeface="Microsoft JhengHei" pitchFamily="34" charset="-120"/>
+              </a:rPr>
+              <a:t>💡 把研究對象改成你分行本季主推的資產主題，例如美元債、台股高股息或平衡型配置。</a:t>
+            </a:r>
+            <a:endParaRPr lang="en-US" sz="1350" dirty="0"/>
+          </a:p>
+        </p:txBody>
+      </p:sp>
+      <p:pic>
+        <p:nvPicPr>
+          <p:cNvPr id="18" name="Image 1" descr="preencoded.png">    </p:cNvPr>
           <p:cNvPicPr>
             <a:picLocks noChangeAspect="1"/>
           </p:cNvPicPr>
@@ -11160,8 +11254,8 @@
         </p:blipFill>
         <p:spPr>
           <a:xfrm>
-            <a:off x="804672" y="2039112"/>
-            <a:ext cx="448056" cy="448056"/>
+            <a:off x="950976" y="2880360"/>
+            <a:ext cx="219456" cy="219456"/>
           </a:xfrm>
           <a:prstGeom prst="rect">
             <a:avLst/>
@@ -11170,14 +11264,14 @@
       </p:pic>
       <p:sp>
         <p:nvSpPr>
-          <p:cNvPr id="7" name="Text 4"/>
-          <p:cNvSpPr/>
-          <p:nvPr/>
-        </p:nvSpPr>
-        <p:spPr>
-          <a:xfrm>
-            <a:off x="1691640" y="1856232"/>
-            <a:ext cx="6858000" cy="347472"/>
+          <p:cNvPr id="19" name="Text 15"/>
+          <p:cNvSpPr/>
+          <p:nvPr/>
+        </p:nvSpPr>
+        <p:spPr>
+          <a:xfrm>
+            <a:off x="1417320" y="2660904"/>
+            <a:ext cx="2182307" cy="658368"/>
           </a:xfrm>
           <a:prstGeom prst="rect">
             <a:avLst/>
@@ -11193,30 +11287,30 @@
               <a:buNone/>
             </a:pPr>
             <a:r>
-              <a:rPr lang="en-US" sz="1700" b="1" dirty="0">
-                <a:solidFill>
-                  <a:srgbClr val="FFFFFF"/>
-                </a:solidFill>
-                <a:latin typeface="Microsoft JhengHei" pitchFamily="34" charset="0"/>
-                <a:ea typeface="Microsoft JhengHei" pitchFamily="34" charset="-122"/>
-                <a:cs typeface="Microsoft JhengHei" pitchFamily="34" charset="-120"/>
-              </a:rPr>
-              <a:t>行動前審核</a:t>
-            </a:r>
-            <a:endParaRPr lang="en-US" sz="1700" dirty="0"/>
-          </a:p>
-        </p:txBody>
-      </p:sp>
-      <p:sp>
-        <p:nvSpPr>
-          <p:cNvPr id="8" name="Text 5"/>
-          <p:cNvSpPr/>
-          <p:nvPr/>
-        </p:nvSpPr>
-        <p:spPr>
-          <a:xfrm>
-            <a:off x="1691640" y="2203704"/>
-            <a:ext cx="9966960" cy="658368"/>
+              <a:rPr lang="en-US" sz="1400" b="1" dirty="0">
+                <a:solidFill>
+                  <a:srgbClr val="2B579A"/>
+                </a:solidFill>
+                <a:latin typeface="Microsoft JhengHei" pitchFamily="34" charset="0"/>
+                <a:ea typeface="Microsoft JhengHei" pitchFamily="34" charset="-122"/>
+                <a:cs typeface="Microsoft JhengHei" pitchFamily="34" charset="-120"/>
+              </a:rPr>
+              <a:t>金融 · 授信</a:t>
+            </a:r>
+            <a:endParaRPr lang="en-US" sz="1400" dirty="0"/>
+          </a:p>
+        </p:txBody>
+      </p:sp>
+      <p:sp>
+        <p:nvSpPr>
+          <p:cNvPr id="20" name="Text 16"/>
+          <p:cNvSpPr/>
+          <p:nvPr/>
+        </p:nvSpPr>
+        <p:spPr>
+          <a:xfrm>
+            <a:off x="3586195" y="2660904"/>
+            <a:ext cx="7747190" cy="658368"/>
           </a:xfrm>
           <a:prstGeom prst="rect">
             <a:avLst/>
@@ -11230,59 +11324,28 @@
           <a:p>
             <a:pPr indent="0" marL="0">
               <a:lnSpc>
-                <a:spcPct val="118000"/>
+                <a:spcPct val="108000"/>
               </a:lnSpc>
               <a:buNone/>
             </a:pPr>
             <a:r>
-              <a:rPr lang="en-US" sz="1300" dirty="0">
-                <a:solidFill>
-                  <a:srgbClr val="C7CAEC"/>
-                </a:solidFill>
-                <a:latin typeface="Microsoft JhengHei" pitchFamily="34" charset="0"/>
-                <a:ea typeface="Microsoft JhengHei" pitchFamily="34" charset="-122"/>
-                <a:cs typeface="Microsoft JhengHei" pitchFamily="34" charset="-120"/>
-              </a:rPr>
-              <a:t>中高風險動作會顯示 RISK-LEVEL；寄信、發 Teams、建立會議等動作先攤開可編輯預覽，核准後才送出。</a:t>
-            </a:r>
-            <a:endParaRPr lang="en-US" sz="1300" dirty="0"/>
-          </a:p>
-        </p:txBody>
-      </p:sp>
-      <p:sp>
-        <p:nvSpPr>
-          <p:cNvPr id="9" name="Shape 6"/>
-          <p:cNvSpPr/>
-          <p:nvPr/>
-        </p:nvSpPr>
-        <p:spPr>
-          <a:xfrm>
-            <a:off x="640080" y="3044952"/>
-            <a:ext cx="777240" cy="777240"/>
-          </a:xfrm>
-          <a:prstGeom prst="roundRect">
-            <a:avLst>
-              <a:gd name="adj" fmla="val 18824"/>
-            </a:avLst>
-          </a:prstGeom>
-          <a:solidFill>
-            <a:srgbClr val="FFFFFF">
-              <a:alpha val="14000"/>
-            </a:srgbClr>
-          </a:solidFill>
-          <a:ln w="12700">
-            <a:solidFill>
-              <a:srgbClr val="22D3EE">
-                <a:alpha val="60000"/>
-              </a:srgbClr>
-            </a:solidFill>
-            <a:prstDash val="solid"/>
-          </a:ln>
-        </p:spPr>
+              <a:rPr lang="en-US" sz="1350" dirty="0">
+                <a:solidFill>
+                  <a:srgbClr val="1E2235"/>
+                </a:solidFill>
+                <a:latin typeface="Microsoft JhengHei" pitchFamily="34" charset="0"/>
+                <a:ea typeface="Microsoft JhengHei" pitchFamily="34" charset="-122"/>
+                <a:cs typeface="Microsoft JhengHei" pitchFamily="34" charset="-120"/>
+              </a:rPr>
+              <a:t>💡 把案件換成你手上的真實授信案（先去識別化），讓 Cowork 幫你做第一版摘要。</a:t>
+            </a:r>
+            <a:endParaRPr lang="en-US" sz="1350" dirty="0"/>
+          </a:p>
+        </p:txBody>
       </p:sp>
       <p:pic>
         <p:nvPicPr>
-          <p:cNvPr id="10" name="Image 1" descr="preencoded.png">    </p:cNvPr>
+          <p:cNvPr id="21" name="Image 2" descr="preencoded.png">    </p:cNvPr>
           <p:cNvPicPr>
             <a:picLocks noChangeAspect="1"/>
           </p:cNvPicPr>
@@ -11296,8 +11359,8 @@
         </p:blipFill>
         <p:spPr>
           <a:xfrm>
-            <a:off x="804672" y="3209544"/>
-            <a:ext cx="448056" cy="448056"/>
+            <a:off x="950976" y="3721608"/>
+            <a:ext cx="219456" cy="219456"/>
           </a:xfrm>
           <a:prstGeom prst="rect">
             <a:avLst/>
@@ -11306,14 +11369,14 @@
       </p:pic>
       <p:sp>
         <p:nvSpPr>
-          <p:cNvPr id="11" name="Text 7"/>
-          <p:cNvSpPr/>
-          <p:nvPr/>
-        </p:nvSpPr>
-        <p:spPr>
-          <a:xfrm>
-            <a:off x="1691640" y="3026664"/>
-            <a:ext cx="6858000" cy="347472"/>
+          <p:cNvPr id="22" name="Text 17"/>
+          <p:cNvSpPr/>
+          <p:nvPr/>
+        </p:nvSpPr>
+        <p:spPr>
+          <a:xfrm>
+            <a:off x="1417320" y="3502152"/>
+            <a:ext cx="2182307" cy="658368"/>
           </a:xfrm>
           <a:prstGeom prst="rect">
             <a:avLst/>
@@ -11329,30 +11392,30 @@
               <a:buNone/>
             </a:pPr>
             <a:r>
-              <a:rPr lang="en-US" sz="1700" b="1" dirty="0">
-                <a:solidFill>
-                  <a:srgbClr val="FFFFFF"/>
-                </a:solidFill>
-                <a:latin typeface="Microsoft JhengHei" pitchFamily="34" charset="0"/>
-                <a:ea typeface="Microsoft JhengHei" pitchFamily="34" charset="-122"/>
-                <a:cs typeface="Microsoft JhengHei" pitchFamily="34" charset="-120"/>
-              </a:rPr>
-              <a:t>控制範圍清楚</a:t>
-            </a:r>
-            <a:endParaRPr lang="en-US" sz="1700" dirty="0"/>
-          </a:p>
-        </p:txBody>
-      </p:sp>
-      <p:sp>
-        <p:nvSpPr>
-          <p:cNvPr id="12" name="Text 8"/>
-          <p:cNvSpPr/>
-          <p:nvPr/>
-        </p:nvSpPr>
-        <p:spPr>
-          <a:xfrm>
-            <a:off x="1691640" y="3374136"/>
-            <a:ext cx="9966960" cy="658368"/>
+              <a:rPr lang="en-US" sz="1400" b="1" dirty="0">
+                <a:solidFill>
+                  <a:srgbClr val="217346"/>
+                </a:solidFill>
+                <a:latin typeface="Microsoft JhengHei" pitchFamily="34" charset="0"/>
+                <a:ea typeface="Microsoft JhengHei" pitchFamily="34" charset="-122"/>
+                <a:cs typeface="Microsoft JhengHei" pitchFamily="34" charset="-120"/>
+              </a:rPr>
+              <a:t>金融 · 分行營運</a:t>
+            </a:r>
+            <a:endParaRPr lang="en-US" sz="1400" dirty="0"/>
+          </a:p>
+        </p:txBody>
+      </p:sp>
+      <p:sp>
+        <p:nvSpPr>
+          <p:cNvPr id="23" name="Text 18"/>
+          <p:cNvSpPr/>
+          <p:nvPr/>
+        </p:nvSpPr>
+        <p:spPr>
+          <a:xfrm>
+            <a:off x="3586195" y="3502152"/>
+            <a:ext cx="7747190" cy="658368"/>
           </a:xfrm>
           <a:prstGeom prst="rect">
             <a:avLst/>
@@ -11366,59 +11429,28 @@
           <a:p>
             <a:pPr indent="0" marL="0">
               <a:lnSpc>
-                <a:spcPct val="118000"/>
+                <a:spcPct val="108000"/>
               </a:lnSpc>
               <a:buNone/>
             </a:pPr>
             <a:r>
-              <a:rPr lang="en-US" sz="1300" dirty="0">
-                <a:solidFill>
-                  <a:srgbClr val="C7CAEC"/>
-                </a:solidFill>
-                <a:latin typeface="Microsoft JhengHei" pitchFamily="34" charset="0"/>
-                <a:ea typeface="Microsoft JhengHei" pitchFamily="34" charset="-122"/>
-                <a:cs typeface="Microsoft JhengHei" pitchFamily="34" charset="-120"/>
-              </a:rPr>
-              <a:t>don’t ask again 可限定 per-recipient、per-domain 或 always；任務可軟／硬暫停、恢復或取消。</a:t>
-            </a:r>
-            <a:endParaRPr lang="en-US" sz="1300" dirty="0"/>
-          </a:p>
-        </p:txBody>
-      </p:sp>
-      <p:sp>
-        <p:nvSpPr>
-          <p:cNvPr id="13" name="Shape 9"/>
-          <p:cNvSpPr/>
-          <p:nvPr/>
-        </p:nvSpPr>
-        <p:spPr>
-          <a:xfrm>
-            <a:off x="640080" y="4215384"/>
-            <a:ext cx="777240" cy="777240"/>
-          </a:xfrm>
-          <a:prstGeom prst="roundRect">
-            <a:avLst>
-              <a:gd name="adj" fmla="val 18824"/>
-            </a:avLst>
-          </a:prstGeom>
-          <a:solidFill>
-            <a:srgbClr val="FFFFFF">
-              <a:alpha val="14000"/>
-            </a:srgbClr>
-          </a:solidFill>
-          <a:ln w="12700">
-            <a:solidFill>
-              <a:srgbClr val="22D3EE">
-                <a:alpha val="60000"/>
-              </a:srgbClr>
-            </a:solidFill>
-            <a:prstDash val="solid"/>
-          </a:ln>
-        </p:spPr>
+              <a:rPr lang="en-US" sz="1350" dirty="0">
+                <a:solidFill>
+                  <a:srgbClr val="1E2235"/>
+                </a:solidFill>
+                <a:latin typeface="Microsoft JhengHei" pitchFamily="34" charset="0"/>
+                <a:ea typeface="Microsoft JhengHei" pitchFamily="34" charset="-122"/>
+                <a:cs typeface="Microsoft JhengHei" pitchFamily="34" charset="-120"/>
+              </a:rPr>
+              <a:t>💡 換成你實際的分行或區域資料，讓 Cowork 先產出月會用的底稿。</a:t>
+            </a:r>
+            <a:endParaRPr lang="en-US" sz="1350" dirty="0"/>
+          </a:p>
+        </p:txBody>
       </p:sp>
       <p:pic>
         <p:nvPicPr>
-          <p:cNvPr id="14" name="Image 2" descr="preencoded.png">    </p:cNvPr>
+          <p:cNvPr id="24" name="Image 3" descr="preencoded.png">    </p:cNvPr>
           <p:cNvPicPr>
             <a:picLocks noChangeAspect="1"/>
           </p:cNvPicPr>
@@ -11432,8 +11464,8 @@
         </p:blipFill>
         <p:spPr>
           <a:xfrm>
-            <a:off x="804672" y="4379976"/>
-            <a:ext cx="448056" cy="448056"/>
+            <a:off x="950976" y="4562856"/>
+            <a:ext cx="219456" cy="219456"/>
           </a:xfrm>
           <a:prstGeom prst="rect">
             <a:avLst/>
@@ -11442,14 +11474,14 @@
       </p:pic>
       <p:sp>
         <p:nvSpPr>
-          <p:cNvPr id="15" name="Text 10"/>
-          <p:cNvSpPr/>
-          <p:nvPr/>
-        </p:nvSpPr>
-        <p:spPr>
-          <a:xfrm>
-            <a:off x="1691640" y="4197096"/>
-            <a:ext cx="6858000" cy="347472"/>
+          <p:cNvPr id="25" name="Text 19"/>
+          <p:cNvSpPr/>
+          <p:nvPr/>
+        </p:nvSpPr>
+        <p:spPr>
+          <a:xfrm>
+            <a:off x="1417320" y="4343400"/>
+            <a:ext cx="2182307" cy="658368"/>
           </a:xfrm>
           <a:prstGeom prst="rect">
             <a:avLst/>
@@ -11465,30 +11497,30 @@
               <a:buNone/>
             </a:pPr>
             <a:r>
-              <a:rPr lang="en-US" sz="1700" b="1" dirty="0">
-                <a:solidFill>
-                  <a:srgbClr val="FFFFFF"/>
-                </a:solidFill>
-                <a:latin typeface="Microsoft JhengHei" pitchFamily="34" charset="0"/>
-                <a:ea typeface="Microsoft JhengHei" pitchFamily="34" charset="-122"/>
-                <a:cs typeface="Microsoft JhengHei" pitchFamily="34" charset="-120"/>
-              </a:rPr>
-              <a:t>自動化任務也有把關</a:t>
-            </a:r>
-            <a:endParaRPr lang="en-US" sz="1700" dirty="0"/>
-          </a:p>
-        </p:txBody>
-      </p:sp>
-      <p:sp>
-        <p:nvSpPr>
-          <p:cNvPr id="16" name="Text 11"/>
-          <p:cNvSpPr/>
-          <p:nvPr/>
-        </p:nvSpPr>
-        <p:spPr>
-          <a:xfrm>
-            <a:off x="1691640" y="4544568"/>
-            <a:ext cx="9966960" cy="658368"/>
+              <a:rPr lang="en-US" sz="1400" b="1" dirty="0">
+                <a:solidFill>
+                  <a:srgbClr val="B4551B"/>
+                </a:solidFill>
+                <a:latin typeface="Microsoft JhengHei" pitchFamily="34" charset="0"/>
+                <a:ea typeface="Microsoft JhengHei" pitchFamily="34" charset="-122"/>
+                <a:cs typeface="Microsoft JhengHei" pitchFamily="34" charset="-120"/>
+              </a:rPr>
+              <a:t>金融 · 法遵</a:t>
+            </a:r>
+            <a:endParaRPr lang="en-US" sz="1400" dirty="0"/>
+          </a:p>
+        </p:txBody>
+      </p:sp>
+      <p:sp>
+        <p:nvSpPr>
+          <p:cNvPr id="26" name="Text 20"/>
+          <p:cNvSpPr/>
+          <p:nvPr/>
+        </p:nvSpPr>
+        <p:spPr>
+          <a:xfrm>
+            <a:off x="3586195" y="4343400"/>
+            <a:ext cx="7747190" cy="658368"/>
           </a:xfrm>
           <a:prstGeom prst="rect">
             <a:avLst/>
@@ -11502,59 +11534,28 @@
           <a:p>
             <a:pPr indent="0" marL="0">
               <a:lnSpc>
-                <a:spcPct val="118000"/>
+                <a:spcPct val="108000"/>
               </a:lnSpc>
               <a:buNone/>
             </a:pPr>
             <a:r>
-              <a:rPr lang="en-US" sz="1300" dirty="0">
-                <a:solidFill>
-                  <a:srgbClr val="C7CAEC"/>
-                </a:solidFill>
-                <a:latin typeface="Microsoft JhengHei" pitchFamily="34" charset="0"/>
-                <a:ea typeface="Microsoft JhengHei" pitchFamily="34" charset="-122"/>
-                <a:cs typeface="Microsoft JhengHei" pitchFamily="34" charset="-120"/>
-              </a:rPr>
-              <a:t>排程提示與事件驅動任務有執行頻率限制與防迴圈保護；一律以建立者權限執行，且與其他 Cowork 活動一同記錄在統一稽核日誌，套用 Microsoft Purview 政策。</a:t>
-            </a:r>
-            <a:endParaRPr lang="en-US" sz="1300" dirty="0"/>
-          </a:p>
-        </p:txBody>
-      </p:sp>
-      <p:sp>
-        <p:nvSpPr>
-          <p:cNvPr id="17" name="Shape 12"/>
-          <p:cNvSpPr/>
-          <p:nvPr/>
-        </p:nvSpPr>
-        <p:spPr>
-          <a:xfrm>
-            <a:off x="640080" y="5385816"/>
-            <a:ext cx="777240" cy="777240"/>
-          </a:xfrm>
-          <a:prstGeom prst="roundRect">
-            <a:avLst>
-              <a:gd name="adj" fmla="val 18824"/>
-            </a:avLst>
-          </a:prstGeom>
-          <a:solidFill>
-            <a:srgbClr val="FFFFFF">
-              <a:alpha val="14000"/>
-            </a:srgbClr>
-          </a:solidFill>
-          <a:ln w="12700">
-            <a:solidFill>
-              <a:srgbClr val="22D3EE">
-                <a:alpha val="60000"/>
-              </a:srgbClr>
-            </a:solidFill>
-            <a:prstDash val="solid"/>
-          </a:ln>
-        </p:spPr>
+              <a:rPr lang="en-US" sz="1350" dirty="0">
+                <a:solidFill>
+                  <a:srgbClr val="1E2235"/>
+                </a:solidFill>
+                <a:latin typeface="Microsoft JhengHei" pitchFamily="34" charset="0"/>
+                <a:ea typeface="Microsoft JhengHei" pitchFamily="34" charset="-122"/>
+                <a:cs typeface="Microsoft JhengHei" pitchFamily="34" charset="-120"/>
+              </a:rPr>
+              <a:t>💡 把你常用的 SAR 結構或銀行內部模板段落告訴 Cowork，讓草稿更貼近實務格式。</a:t>
+            </a:r>
+            <a:endParaRPr lang="en-US" sz="1350" dirty="0"/>
+          </a:p>
+        </p:txBody>
       </p:sp>
       <p:pic>
         <p:nvPicPr>
-          <p:cNvPr id="18" name="Image 3" descr="preencoded.png">    </p:cNvPr>
+          <p:cNvPr id="27" name="Image 4" descr="preencoded.png">    </p:cNvPr>
           <p:cNvPicPr>
             <a:picLocks noChangeAspect="1"/>
           </p:cNvPicPr>
@@ -11568,8 +11569,8 @@
         </p:blipFill>
         <p:spPr>
           <a:xfrm>
-            <a:off x="804672" y="5550408"/>
-            <a:ext cx="448056" cy="448056"/>
+            <a:off x="950976" y="5404104"/>
+            <a:ext cx="219456" cy="219456"/>
           </a:xfrm>
           <a:prstGeom prst="rect">
             <a:avLst/>
@@ -11578,14 +11579,14 @@
       </p:pic>
       <p:sp>
         <p:nvSpPr>
-          <p:cNvPr id="19" name="Text 13"/>
-          <p:cNvSpPr/>
-          <p:nvPr/>
-        </p:nvSpPr>
-        <p:spPr>
-          <a:xfrm>
-            <a:off x="1691640" y="5367528"/>
-            <a:ext cx="6858000" cy="347472"/>
+          <p:cNvPr id="28" name="Text 21"/>
+          <p:cNvSpPr/>
+          <p:nvPr/>
+        </p:nvSpPr>
+        <p:spPr>
+          <a:xfrm>
+            <a:off x="1417320" y="5184648"/>
+            <a:ext cx="2182307" cy="658368"/>
           </a:xfrm>
           <a:prstGeom prst="rect">
             <a:avLst/>
@@ -11601,30 +11602,30 @@
               <a:buNone/>
             </a:pPr>
             <a:r>
-              <a:rPr lang="en-US" sz="1700" b="1" dirty="0">
-                <a:solidFill>
-                  <a:srgbClr val="FFFFFF"/>
-                </a:solidFill>
-                <a:latin typeface="Microsoft JhengHei" pitchFamily="34" charset="0"/>
-                <a:ea typeface="Microsoft JhengHei" pitchFamily="34" charset="-122"/>
-                <a:cs typeface="Microsoft JhengHei" pitchFamily="34" charset="-120"/>
-              </a:rPr>
-              <a:t>限制也要知道</a:t>
-            </a:r>
-            <a:endParaRPr lang="en-US" sz="1700" dirty="0"/>
-          </a:p>
-        </p:txBody>
-      </p:sp>
-      <p:sp>
-        <p:nvSpPr>
-          <p:cNvPr id="20" name="Text 14"/>
-          <p:cNvSpPr/>
-          <p:nvPr/>
-        </p:nvSpPr>
-        <p:spPr>
-          <a:xfrm>
-            <a:off x="1691640" y="5715000"/>
-            <a:ext cx="9966960" cy="658368"/>
+              <a:rPr lang="en-US" sz="1400" b="1" dirty="0">
+                <a:solidFill>
+                  <a:srgbClr val="8A4DDB"/>
+                </a:solidFill>
+                <a:latin typeface="Microsoft JhengHei" pitchFamily="34" charset="0"/>
+                <a:ea typeface="Microsoft JhengHei" pitchFamily="34" charset="-122"/>
+                <a:cs typeface="Microsoft JhengHei" pitchFamily="34" charset="-120"/>
+              </a:rPr>
+              <a:t>金融 · 自動化</a:t>
+            </a:r>
+            <a:endParaRPr lang="en-US" sz="1400" dirty="0"/>
+          </a:p>
+        </p:txBody>
+      </p:sp>
+      <p:sp>
+        <p:nvSpPr>
+          <p:cNvPr id="29" name="Text 22"/>
+          <p:cNvSpPr/>
+          <p:nvPr/>
+        </p:nvSpPr>
+        <p:spPr>
+          <a:xfrm>
+            <a:off x="3586195" y="5184648"/>
+            <a:ext cx="7747190" cy="658368"/>
           </a:xfrm>
           <a:prstGeom prst="rect">
             <a:avLst/>
@@ -11638,28 +11639,28 @@
           <a:p>
             <a:pPr indent="0" marL="0">
               <a:lnSpc>
-                <a:spcPct val="118000"/>
+                <a:spcPct val="108000"/>
               </a:lnSpc>
               <a:buNone/>
             </a:pPr>
             <a:r>
-              <a:rPr lang="en-US" sz="1300" dirty="0">
-                <a:solidFill>
-                  <a:srgbClr val="C7CAEC"/>
-                </a:solidFill>
-                <a:latin typeface="Microsoft JhengHei" pitchFamily="34" charset="0"/>
-                <a:ea typeface="Microsoft JhengHei" pitchFamily="34" charset="-122"/>
-                <a:cs typeface="Microsoft JhengHei" pitchFamily="34" charset="-120"/>
-              </a:rPr>
-              <a:t>不能存取本機檔案、刪除 OneDrive/SharePoint 檔案或讀取加密檔；附件 &lt;200MB；自訂技能與第三方 plugin 未經 Microsoft 驗證，需自行審閱。官方明列不適用於「免人工審查即需保證正確」的用途。</a:t>
-            </a:r>
-            <a:endParaRPr lang="en-US" sz="1300" dirty="0"/>
-          </a:p>
-        </p:txBody>
-      </p:sp>
-      <p:sp>
-        <p:nvSpPr>
-          <p:cNvPr id="21" name="Text 15"/>
+              <a:rPr lang="en-US" sz="1350" dirty="0">
+                <a:solidFill>
+                  <a:srgbClr val="1E2235"/>
+                </a:solidFill>
+                <a:latin typeface="Microsoft JhengHei" pitchFamily="34" charset="0"/>
+                <a:ea typeface="Microsoft JhengHei" pitchFamily="34" charset="-122"/>
+                <a:cs typeface="Microsoft JhengHei" pitchFamily="34" charset="-120"/>
+              </a:rPr>
+              <a:t>💡 把這個技能進一步加上品牌色、分行署名與標準頁尾，做成你分行專屬版本。</a:t>
+            </a:r>
+            <a:endParaRPr lang="en-US" sz="1350" dirty="0"/>
+          </a:p>
+        </p:txBody>
+      </p:sp>
+      <p:sp>
+        <p:nvSpPr>
+          <p:cNvPr id="30" name="Text 23"/>
           <p:cNvSpPr/>
           <p:nvPr/>
         </p:nvSpPr>
@@ -11684,7 +11685,7 @@
             <a:r>
               <a:rPr lang="en-US" sz="900" dirty="0">
                 <a:solidFill>
-                  <a:srgbClr val="8A8FB5"/>
+                  <a:srgbClr val="5B6079"/>
                 </a:solidFill>
                 <a:latin typeface="Microsoft JhengHei" pitchFamily="34" charset="0"/>
                 <a:ea typeface="Microsoft JhengHei" pitchFamily="34" charset="-122"/>
@@ -11698,7 +11699,7 @@
       </p:sp>
       <p:sp>
         <p:nvSpPr>
-          <p:cNvPr id="22" name="Text 16"/>
+          <p:cNvPr id="31" name="Text 24"/>
           <p:cNvSpPr/>
           <p:nvPr/>
         </p:nvSpPr>
@@ -11723,7 +11724,7 @@
             <a:r>
               <a:rPr lang="en-US" sz="900" dirty="0">
                 <a:solidFill>
-                  <a:srgbClr val="8A8FB5"/>
+                  <a:srgbClr val="5B6079"/>
                 </a:solidFill>
                 <a:latin typeface="Microsoft JhengHei" pitchFamily="34" charset="0"/>
                 <a:ea typeface="Microsoft JhengHei" pitchFamily="34" charset="-122"/>
@@ -11873,7 +11874,7 @@
         </p:nvSpPr>
         <p:spPr>
           <a:xfrm>
-            <a:off x="640080" y="1737360"/>
+            <a:off x="640080" y="1664208"/>
             <a:ext cx="1005840" cy="822960"/>
           </a:xfrm>
           <a:prstGeom prst="rect">
@@ -11890,7 +11891,7 @@
               <a:buNone/>
             </a:pPr>
             <a:r>
-              <a:rPr lang="en-US" sz="3800" b="1" dirty="0">
+              <a:rPr lang="en-US" sz="3400" b="1" dirty="0">
                 <a:solidFill>
                   <a:srgbClr val="6366F1"/>
                 </a:solidFill>
@@ -11900,7 +11901,7 @@
               </a:rPr>
               <a:t>01</a:t>
             </a:r>
-            <a:endParaRPr lang="en-US" sz="3800" dirty="0"/>
+            <a:endParaRPr lang="en-US" sz="3400" dirty="0"/>
           </a:p>
         </p:txBody>
       </p:sp>
@@ -11912,7 +11913,7 @@
         </p:nvSpPr>
         <p:spPr>
           <a:xfrm>
-            <a:off x="1737360" y="1773936"/>
+            <a:off x="1737360" y="1700784"/>
             <a:ext cx="3657600" cy="457200"/>
           </a:xfrm>
           <a:prstGeom prst="rect">
@@ -11929,7 +11930,7 @@
               <a:buNone/>
             </a:pPr>
             <a:r>
-              <a:rPr lang="en-US" sz="2000" b="1" dirty="0">
+              <a:rPr lang="en-US" sz="1900" b="1" dirty="0">
                 <a:solidFill>
                   <a:srgbClr val="1E2235"/>
                 </a:solidFill>
@@ -11939,7 +11940,7 @@
               </a:rPr>
               <a:t>認識 Cowork</a:t>
             </a:r>
-            <a:endParaRPr lang="en-US" sz="2000" dirty="0"/>
+            <a:endParaRPr lang="en-US" sz="1900" dirty="0"/>
           </a:p>
         </p:txBody>
       </p:sp>
@@ -11951,7 +11952,7 @@
         </p:nvSpPr>
         <p:spPr>
           <a:xfrm>
-            <a:off x="1737360" y="2212848"/>
+            <a:off x="1737360" y="2121408"/>
             <a:ext cx="9601200" cy="365760"/>
           </a:xfrm>
           <a:prstGeom prst="rect">
@@ -11968,7 +11969,7 @@
               <a:buNone/>
             </a:pPr>
             <a:r>
-              <a:rPr lang="en-US" sz="1400" dirty="0">
+              <a:rPr lang="en-US" sz="1350" dirty="0">
                 <a:solidFill>
                   <a:srgbClr val="5B6079"/>
                 </a:solidFill>
@@ -11978,7 +11979,7 @@
               </a:rPr>
               <a:t>什麼是代理式 AI，和一般 Copilot Chat 有何不同</a:t>
             </a:r>
-            <a:endParaRPr lang="en-US" sz="1400" dirty="0"/>
+            <a:endParaRPr lang="en-US" sz="1350" dirty="0"/>
           </a:p>
         </p:txBody>
       </p:sp>
@@ -11990,7 +11991,7 @@
         </p:nvSpPr>
         <p:spPr>
           <a:xfrm>
-            <a:off x="640080" y="2816352"/>
+            <a:off x="640080" y="2578608"/>
             <a:ext cx="1005840" cy="822960"/>
           </a:xfrm>
           <a:prstGeom prst="rect">
@@ -12007,7 +12008,7 @@
               <a:buNone/>
             </a:pPr>
             <a:r>
-              <a:rPr lang="en-US" sz="3800" b="1" dirty="0">
+              <a:rPr lang="en-US" sz="3400" b="1" dirty="0">
                 <a:solidFill>
                   <a:srgbClr val="6366F1"/>
                 </a:solidFill>
@@ -12017,7 +12018,7 @@
               </a:rPr>
               <a:t>02</a:t>
             </a:r>
-            <a:endParaRPr lang="en-US" sz="3800" dirty="0"/>
+            <a:endParaRPr lang="en-US" sz="3400" dirty="0"/>
           </a:p>
         </p:txBody>
       </p:sp>
@@ -12029,7 +12030,7 @@
         </p:nvSpPr>
         <p:spPr>
           <a:xfrm>
-            <a:off x="1737360" y="2852928"/>
+            <a:off x="1737360" y="2615184"/>
             <a:ext cx="3657600" cy="457200"/>
           </a:xfrm>
           <a:prstGeom prst="rect">
@@ -12046,7 +12047,7 @@
               <a:buNone/>
             </a:pPr>
             <a:r>
-              <a:rPr lang="en-US" sz="2000" b="1" dirty="0">
+              <a:rPr lang="en-US" sz="1900" b="1" dirty="0">
                 <a:solidFill>
                   <a:srgbClr val="1E2235"/>
                 </a:solidFill>
@@ -12056,7 +12057,7 @@
               </a:rPr>
               <a:t>核心能力與運作</a:t>
             </a:r>
-            <a:endParaRPr lang="en-US" sz="2000" dirty="0"/>
+            <a:endParaRPr lang="en-US" sz="1900" dirty="0"/>
           </a:p>
         </p:txBody>
       </p:sp>
@@ -12068,7 +12069,7 @@
         </p:nvSpPr>
         <p:spPr>
           <a:xfrm>
-            <a:off x="1737360" y="3291840"/>
+            <a:off x="1737360" y="3035808"/>
             <a:ext cx="9601200" cy="365760"/>
           </a:xfrm>
           <a:prstGeom prst="rect">
@@ -12085,7 +12086,7 @@
               <a:buNone/>
             </a:pPr>
             <a:r>
-              <a:rPr lang="en-US" sz="1400" dirty="0">
+              <a:rPr lang="en-US" sz="1350" dirty="0">
                 <a:solidFill>
                   <a:srgbClr val="5B6079"/>
                 </a:solidFill>
@@ -12095,7 +12096,7 @@
               </a:rPr>
               <a:t>技能、工作區、行動前審核、自我驗證</a:t>
             </a:r>
-            <a:endParaRPr lang="en-US" sz="1400" dirty="0"/>
+            <a:endParaRPr lang="en-US" sz="1350" dirty="0"/>
           </a:p>
         </p:txBody>
       </p:sp>
@@ -12107,7 +12108,7 @@
         </p:nvSpPr>
         <p:spPr>
           <a:xfrm>
-            <a:off x="640080" y="3895344"/>
+            <a:off x="640080" y="3493008"/>
             <a:ext cx="1005840" cy="822960"/>
           </a:xfrm>
           <a:prstGeom prst="rect">
@@ -12124,7 +12125,7 @@
               <a:buNone/>
             </a:pPr>
             <a:r>
-              <a:rPr lang="en-US" sz="3800" b="1" dirty="0">
+              <a:rPr lang="en-US" sz="3400" b="1" dirty="0">
                 <a:solidFill>
                   <a:srgbClr val="6366F1"/>
                 </a:solidFill>
@@ -12134,7 +12135,7 @@
               </a:rPr>
               <a:t>03</a:t>
             </a:r>
-            <a:endParaRPr lang="en-US" sz="3800" dirty="0"/>
+            <a:endParaRPr lang="en-US" sz="3400" dirty="0"/>
           </a:p>
         </p:txBody>
       </p:sp>
@@ -12146,7 +12147,7 @@
         </p:nvSpPr>
         <p:spPr>
           <a:xfrm>
-            <a:off x="1737360" y="3931920"/>
+            <a:off x="1737360" y="3529584"/>
             <a:ext cx="3657600" cy="457200"/>
           </a:xfrm>
           <a:prstGeom prst="rect">
@@ -12163,7 +12164,7 @@
               <a:buNone/>
             </a:pPr>
             <a:r>
-              <a:rPr lang="en-US" sz="2000" b="1" dirty="0">
+              <a:rPr lang="en-US" sz="1900" b="1" dirty="0">
                 <a:solidFill>
                   <a:srgbClr val="1E2235"/>
                 </a:solidFill>
@@ -12171,21 +12172,138 @@
                 <a:ea typeface="Microsoft JhengHei" pitchFamily="34" charset="-122"/>
                 <a:cs typeface="Microsoft JhengHei" pitchFamily="34" charset="-120"/>
               </a:rPr>
+              <a:t>練習環境準備</a:t>
+            </a:r>
+            <a:endParaRPr lang="en-US" sz="1900" dirty="0"/>
+          </a:p>
+        </p:txBody>
+      </p:sp>
+      <p:sp>
+        <p:nvSpPr>
+          <p:cNvPr id="13" name="Text 11"/>
+          <p:cNvSpPr/>
+          <p:nvPr/>
+        </p:nvSpPr>
+        <p:spPr>
+          <a:xfrm>
+            <a:off x="1737360" y="3950208"/>
+            <a:ext cx="9601200" cy="365760"/>
+          </a:xfrm>
+          <a:prstGeom prst="rect">
+            <a:avLst/>
+          </a:prstGeom>
+          <a:noFill/>
+          <a:ln/>
+        </p:spPr>
+        <p:txBody>
+          <a:bodyPr wrap="square" rtlCol="0" anchor="ctr"/>
+          <a:lstStyle/>
+          <a:p>
+            <a:pPr indent="0" marL="0">
+              <a:buNone/>
+            </a:pPr>
+            <a:r>
+              <a:rPr lang="en-US" sz="1350" dirty="0">
+                <a:solidFill>
+                  <a:srgbClr val="5B6079"/>
+                </a:solidFill>
+                <a:latin typeface="Microsoft JhengHei" pitchFamily="34" charset="0"/>
+                <a:ea typeface="Microsoft JhengHei" pitchFamily="34" charset="-122"/>
+                <a:cs typeface="Microsoft JhengHei" pitchFamily="34" charset="-120"/>
+              </a:rPr>
+              <a:t>範例檔下載後拖進對話，以及哪些情境會動到信箱與行事曆</a:t>
+            </a:r>
+            <a:endParaRPr lang="en-US" sz="1350" dirty="0"/>
+          </a:p>
+        </p:txBody>
+      </p:sp>
+      <p:sp>
+        <p:nvSpPr>
+          <p:cNvPr id="14" name="Text 12"/>
+          <p:cNvSpPr/>
+          <p:nvPr/>
+        </p:nvSpPr>
+        <p:spPr>
+          <a:xfrm>
+            <a:off x="640080" y="4407408"/>
+            <a:ext cx="1005840" cy="822960"/>
+          </a:xfrm>
+          <a:prstGeom prst="rect">
+            <a:avLst/>
+          </a:prstGeom>
+          <a:noFill/>
+          <a:ln/>
+        </p:spPr>
+        <p:txBody>
+          <a:bodyPr wrap="square" rtlCol="0" anchor="ctr"/>
+          <a:lstStyle/>
+          <a:p>
+            <a:pPr algn="l" indent="0" marL="0">
+              <a:buNone/>
+            </a:pPr>
+            <a:r>
+              <a:rPr lang="en-US" sz="3400" b="1" dirty="0">
+                <a:solidFill>
+                  <a:srgbClr val="6366F1"/>
+                </a:solidFill>
+                <a:latin typeface="Microsoft JhengHei" pitchFamily="34" charset="0"/>
+                <a:ea typeface="Microsoft JhengHei" pitchFamily="34" charset="-122"/>
+                <a:cs typeface="Microsoft JhengHei" pitchFamily="34" charset="-120"/>
+              </a:rPr>
+              <a:t>04</a:t>
+            </a:r>
+            <a:endParaRPr lang="en-US" sz="3400" dirty="0"/>
+          </a:p>
+        </p:txBody>
+      </p:sp>
+      <p:sp>
+        <p:nvSpPr>
+          <p:cNvPr id="15" name="Text 13"/>
+          <p:cNvSpPr/>
+          <p:nvPr/>
+        </p:nvSpPr>
+        <p:spPr>
+          <a:xfrm>
+            <a:off x="1737360" y="4443984"/>
+            <a:ext cx="3657600" cy="457200"/>
+          </a:xfrm>
+          <a:prstGeom prst="rect">
+            <a:avLst/>
+          </a:prstGeom>
+          <a:noFill/>
+          <a:ln/>
+        </p:spPr>
+        <p:txBody>
+          <a:bodyPr wrap="square" rtlCol="0" anchor="ctr"/>
+          <a:lstStyle/>
+          <a:p>
+            <a:pPr indent="0" marL="0">
+              <a:buNone/>
+            </a:pPr>
+            <a:r>
+              <a:rPr lang="en-US" sz="1900" b="1" dirty="0">
+                <a:solidFill>
+                  <a:srgbClr val="1E2235"/>
+                </a:solidFill>
+                <a:latin typeface="Microsoft JhengHei" pitchFamily="34" charset="0"/>
+                <a:ea typeface="Microsoft JhengHei" pitchFamily="34" charset="-122"/>
+                <a:cs typeface="Microsoft JhengHei" pitchFamily="34" charset="-120"/>
+              </a:rPr>
               <a:t>5 個實戰情境</a:t>
             </a:r>
-            <a:endParaRPr lang="en-US" sz="2000" dirty="0"/>
-          </a:p>
-        </p:txBody>
-      </p:sp>
-      <p:sp>
-        <p:nvSpPr>
-          <p:cNvPr id="13" name="Text 11"/>
-          <p:cNvSpPr/>
-          <p:nvPr/>
-        </p:nvSpPr>
-        <p:spPr>
-          <a:xfrm>
-            <a:off x="1737360" y="4370832"/>
+            <a:endParaRPr lang="en-US" sz="1900" dirty="0"/>
+          </a:p>
+        </p:txBody>
+      </p:sp>
+      <p:sp>
+        <p:nvSpPr>
+          <p:cNvPr id="16" name="Text 14"/>
+          <p:cNvSpPr/>
+          <p:nvPr/>
+        </p:nvSpPr>
+        <p:spPr>
+          <a:xfrm>
+            <a:off x="1737360" y="4864608"/>
             <a:ext cx="9601200" cy="365760"/>
           </a:xfrm>
           <a:prstGeom prst="rect">
@@ -12202,7 +12320,7 @@
               <a:buNone/>
             </a:pPr>
             <a:r>
-              <a:rPr lang="en-US" sz="1400" dirty="0">
+              <a:rPr lang="en-US" sz="1350" dirty="0">
                 <a:solidFill>
                   <a:srgbClr val="5B6079"/>
                 </a:solidFill>
@@ -12212,19 +12330,19 @@
               </a:rPr>
               <a:t>投資展望、授信摘要、分行儀表板、可疑交易通報草擬、客戶月報技能，逐一拆解工作流</a:t>
             </a:r>
-            <a:endParaRPr lang="en-US" sz="1400" dirty="0"/>
-          </a:p>
-        </p:txBody>
-      </p:sp>
-      <p:sp>
-        <p:nvSpPr>
-          <p:cNvPr id="14" name="Text 12"/>
-          <p:cNvSpPr/>
-          <p:nvPr/>
-        </p:nvSpPr>
-        <p:spPr>
-          <a:xfrm>
-            <a:off x="640080" y="4974336"/>
+            <a:endParaRPr lang="en-US" sz="1350" dirty="0"/>
+          </a:p>
+        </p:txBody>
+      </p:sp>
+      <p:sp>
+        <p:nvSpPr>
+          <p:cNvPr id="17" name="Text 15"/>
+          <p:cNvSpPr/>
+          <p:nvPr/>
+        </p:nvSpPr>
+        <p:spPr>
+          <a:xfrm>
+            <a:off x="640080" y="5321808"/>
             <a:ext cx="1005840" cy="822960"/>
           </a:xfrm>
           <a:prstGeom prst="rect">
@@ -12241,7 +12359,7 @@
               <a:buNone/>
             </a:pPr>
             <a:r>
-              <a:rPr lang="en-US" sz="3800" b="1" dirty="0">
+              <a:rPr lang="en-US" sz="3400" b="1" dirty="0">
                 <a:solidFill>
                   <a:srgbClr val="6366F1"/>
                 </a:solidFill>
@@ -12249,21 +12367,21 @@
                 <a:ea typeface="Microsoft JhengHei" pitchFamily="34" charset="-122"/>
                 <a:cs typeface="Microsoft JhengHei" pitchFamily="34" charset="-120"/>
               </a:rPr>
-              <a:t>04</a:t>
-            </a:r>
-            <a:endParaRPr lang="en-US" sz="3800" dirty="0"/>
-          </a:p>
-        </p:txBody>
-      </p:sp>
-      <p:sp>
-        <p:nvSpPr>
-          <p:cNvPr id="15" name="Text 13"/>
-          <p:cNvSpPr/>
-          <p:nvPr/>
-        </p:nvSpPr>
-        <p:spPr>
-          <a:xfrm>
-            <a:off x="1737360" y="5010912"/>
+              <a:t>05</a:t>
+            </a:r>
+            <a:endParaRPr lang="en-US" sz="3400" dirty="0"/>
+          </a:p>
+        </p:txBody>
+      </p:sp>
+      <p:sp>
+        <p:nvSpPr>
+          <p:cNvPr id="18" name="Text 16"/>
+          <p:cNvSpPr/>
+          <p:nvPr/>
+        </p:nvSpPr>
+        <p:spPr>
+          <a:xfrm>
+            <a:off x="1737360" y="5358384"/>
             <a:ext cx="3657600" cy="457200"/>
           </a:xfrm>
           <a:prstGeom prst="rect">
@@ -12280,7 +12398,7 @@
               <a:buNone/>
             </a:pPr>
             <a:r>
-              <a:rPr lang="en-US" sz="2000" b="1" dirty="0">
+              <a:rPr lang="en-US" sz="1900" b="1" dirty="0">
                 <a:solidFill>
                   <a:srgbClr val="1E2235"/>
                 </a:solidFill>
@@ -12290,19 +12408,19 @@
               </a:rPr>
               <a:t>套用到你的日常</a:t>
             </a:r>
-            <a:endParaRPr lang="en-US" sz="2000" dirty="0"/>
-          </a:p>
-        </p:txBody>
-      </p:sp>
-      <p:sp>
-        <p:nvSpPr>
-          <p:cNvPr id="16" name="Text 14"/>
-          <p:cNvSpPr/>
-          <p:nvPr/>
-        </p:nvSpPr>
-        <p:spPr>
-          <a:xfrm>
-            <a:off x="1737360" y="5449824"/>
+            <a:endParaRPr lang="en-US" sz="1900" dirty="0"/>
+          </a:p>
+        </p:txBody>
+      </p:sp>
+      <p:sp>
+        <p:nvSpPr>
+          <p:cNvPr id="19" name="Text 17"/>
+          <p:cNvSpPr/>
+          <p:nvPr/>
+        </p:nvSpPr>
+        <p:spPr>
+          <a:xfrm>
+            <a:off x="1737360" y="5779008"/>
             <a:ext cx="9601200" cy="365760"/>
           </a:xfrm>
           <a:prstGeom prst="rect">
@@ -12319,7 +12437,7 @@
               <a:buNone/>
             </a:pPr>
             <a:r>
-              <a:rPr lang="en-US" sz="1400" dirty="0">
+              <a:rPr lang="en-US" sz="1350" dirty="0">
                 <a:solidFill>
                   <a:srgbClr val="5B6079"/>
                 </a:solidFill>
@@ -12329,13 +12447,13 @@
               </a:rPr>
               <a:t>如何把這些情境延伸到自己的工作</a:t>
             </a:r>
-            <a:endParaRPr lang="en-US" sz="1400" dirty="0"/>
-          </a:p>
-        </p:txBody>
-      </p:sp>
-      <p:sp>
-        <p:nvSpPr>
-          <p:cNvPr id="17" name="Text 15"/>
+            <a:endParaRPr lang="en-US" sz="1350" dirty="0"/>
+          </a:p>
+        </p:txBody>
+      </p:sp>
+      <p:sp>
+        <p:nvSpPr>
+          <p:cNvPr id="20" name="Text 18"/>
           <p:cNvSpPr/>
           <p:nvPr/>
         </p:nvSpPr>
@@ -12374,7 +12492,7 @@
       </p:sp>
       <p:sp>
         <p:nvSpPr>
-          <p:cNvPr id="18" name="Text 16"/>
+          <p:cNvPr id="21" name="Text 19"/>
           <p:cNvSpPr/>
           <p:nvPr/>
         </p:nvSpPr>
@@ -12452,14 +12570,34 @@
       </p:grpSpPr>
       <p:sp>
         <p:nvSpPr>
-          <p:cNvPr id="2" name="Text 0"/>
-          <p:cNvSpPr/>
-          <p:nvPr/>
-        </p:nvSpPr>
-        <p:spPr>
-          <a:xfrm>
-            <a:off x="640080" y="1371600"/>
-            <a:ext cx="10058400" cy="822960"/>
+          <p:cNvPr id="2" name="Shape 0"/>
+          <p:cNvSpPr/>
+          <p:nvPr/>
+        </p:nvSpPr>
+        <p:spPr>
+          <a:xfrm>
+            <a:off x="640080" y="566928"/>
+            <a:ext cx="384048" cy="128016"/>
+          </a:xfrm>
+          <a:prstGeom prst="rect">
+            <a:avLst/>
+          </a:prstGeom>
+          <a:solidFill>
+            <a:srgbClr val="22D3EE"/>
+          </a:solidFill>
+          <a:ln/>
+        </p:spPr>
+      </p:sp>
+      <p:sp>
+        <p:nvSpPr>
+          <p:cNvPr id="3" name="Text 1"/>
+          <p:cNvSpPr/>
+          <p:nvPr/>
+        </p:nvSpPr>
+        <p:spPr>
+          <a:xfrm>
+            <a:off x="1143000" y="457200"/>
+            <a:ext cx="8229600" cy="310896"/>
           </a:xfrm>
           <a:prstGeom prst="rect">
             <a:avLst/>
@@ -12475,7 +12613,46 @@
               <a:buNone/>
             </a:pPr>
             <a:r>
-              <a:rPr lang="en-US" sz="4000" b="1" dirty="0">
+              <a:rPr lang="en-US" sz="1200" b="1" spc="200" kern="0" dirty="0">
+                <a:solidFill>
+                  <a:srgbClr val="22D3EE"/>
+                </a:solidFill>
+                <a:latin typeface="Microsoft JhengHei" pitchFamily="34" charset="0"/>
+                <a:ea typeface="Microsoft JhengHei" pitchFamily="34" charset="-122"/>
+                <a:cs typeface="Microsoft JhengHei" pitchFamily="34" charset="-120"/>
+              </a:rPr>
+              <a:t>TRUST &amp; CONTROL</a:t>
+            </a:r>
+            <a:endParaRPr lang="en-US" sz="1200" dirty="0"/>
+          </a:p>
+        </p:txBody>
+      </p:sp>
+      <p:sp>
+        <p:nvSpPr>
+          <p:cNvPr id="4" name="Text 2"/>
+          <p:cNvSpPr/>
+          <p:nvPr/>
+        </p:nvSpPr>
+        <p:spPr>
+          <a:xfrm>
+            <a:off x="640080" y="786384"/>
+            <a:ext cx="10972800" cy="640080"/>
+          </a:xfrm>
+          <a:prstGeom prst="rect">
+            <a:avLst/>
+          </a:prstGeom>
+          <a:noFill/>
+          <a:ln/>
+        </p:spPr>
+        <p:txBody>
+          <a:bodyPr wrap="square" rtlCol="0" anchor="ctr"/>
+          <a:lstStyle/>
+          <a:p>
+            <a:pPr indent="0" marL="0">
+              <a:buNone/>
+            </a:pPr>
+            <a:r>
+              <a:rPr lang="en-US" sz="3000" b="1" dirty="0">
                 <a:solidFill>
                   <a:srgbClr val="FFFFFF"/>
                 </a:solidFill>
@@ -12483,76 +12660,37 @@
                 <a:ea typeface="Microsoft JhengHei" pitchFamily="34" charset="-122"/>
                 <a:cs typeface="Microsoft JhengHei" pitchFamily="34" charset="-120"/>
               </a:rPr>
-              <a:t>現在就開始練習</a:t>
-            </a:r>
-            <a:endParaRPr lang="en-US" sz="4000" dirty="0"/>
-          </a:p>
-        </p:txBody>
-      </p:sp>
-      <p:sp>
-        <p:nvSpPr>
-          <p:cNvPr id="3" name="Text 1"/>
-          <p:cNvSpPr/>
-          <p:nvPr/>
-        </p:nvSpPr>
-        <p:spPr>
-          <a:xfrm>
-            <a:off x="640080" y="2377440"/>
-            <a:ext cx="10058400" cy="548640"/>
-          </a:xfrm>
-          <a:prstGeom prst="rect">
-            <a:avLst/>
-          </a:prstGeom>
-          <a:noFill/>
-          <a:ln/>
-        </p:spPr>
-        <p:txBody>
-          <a:bodyPr wrap="square" rtlCol="0" anchor="ctr"/>
-          <a:lstStyle/>
-          <a:p>
-            <a:pPr indent="0" marL="0">
-              <a:buNone/>
-            </a:pPr>
-            <a:r>
-              <a:rPr lang="en-US" sz="1500" dirty="0">
-                <a:solidFill>
-                  <a:srgbClr val="C7CAEC"/>
-                </a:solidFill>
-                <a:latin typeface="Microsoft JhengHei" pitchFamily="34" charset="0"/>
-                <a:ea typeface="Microsoft JhengHei" pitchFamily="34" charset="-122"/>
-                <a:cs typeface="Microsoft JhengHei" pitchFamily="34" charset="-120"/>
-              </a:rPr>
-              <a:t>開始前請確認：每位使用者一張 M365 Copilot 授權、管理員已啟用用量計費（Copilot Credits，未啟用則無法存取）、租戶位於 Anthropic 支援地區；可在 Web/桌面/行動/Outlook/Teams 使用（本機瀏覽器工作僅限網頁版＋Edge 150 以上，且預設停用需管理員開啟）。</a:t>
-            </a:r>
-            <a:endParaRPr lang="en-US" sz="1500" dirty="0"/>
-          </a:p>
-        </p:txBody>
-      </p:sp>
-      <p:sp>
-        <p:nvSpPr>
-          <p:cNvPr id="4" name="Shape 2"/>
-          <p:cNvSpPr/>
-          <p:nvPr/>
-        </p:nvSpPr>
-        <p:spPr>
-          <a:xfrm>
-            <a:off x="640080" y="3017520"/>
-            <a:ext cx="8686800" cy="868680"/>
+              <a:t>自動化，但你始終是決策者</a:t>
+            </a:r>
+            <a:endParaRPr lang="en-US" sz="3000" dirty="0"/>
+          </a:p>
+        </p:txBody>
+      </p:sp>
+      <p:sp>
+        <p:nvSpPr>
+          <p:cNvPr id="5" name="Shape 3"/>
+          <p:cNvSpPr/>
+          <p:nvPr/>
+        </p:nvSpPr>
+        <p:spPr>
+          <a:xfrm>
+            <a:off x="640080" y="1874520"/>
+            <a:ext cx="777240" cy="777240"/>
           </a:xfrm>
           <a:prstGeom prst="roundRect">
             <a:avLst>
-              <a:gd name="adj" fmla="val 12632"/>
+              <a:gd name="adj" fmla="val 18824"/>
             </a:avLst>
           </a:prstGeom>
           <a:solidFill>
             <a:srgbClr val="FFFFFF">
-              <a:alpha val="10000"/>
+              <a:alpha val="14000"/>
             </a:srgbClr>
           </a:solidFill>
           <a:ln w="12700">
             <a:solidFill>
-              <a:srgbClr val="FFFFFF">
-                <a:alpha val="35000"/>
+              <a:srgbClr val="22D3EE">
+                <a:alpha val="60000"/>
               </a:srgbClr>
             </a:solidFill>
             <a:prstDash val="solid"/>
@@ -12561,7 +12699,7 @@
       </p:sp>
       <p:pic>
         <p:nvPicPr>
-          <p:cNvPr id="5" name="Image 0" descr="preencoded.png">    </p:cNvPr>
+          <p:cNvPr id="6" name="Image 0" descr="preencoded.png">    </p:cNvPr>
           <p:cNvPicPr>
             <a:picLocks noChangeAspect="1"/>
           </p:cNvPicPr>
@@ -12575,8 +12713,8 @@
         </p:blipFill>
         <p:spPr>
           <a:xfrm>
-            <a:off x="914400" y="3291840"/>
-            <a:ext cx="329184" cy="329184"/>
+            <a:off x="804672" y="2039112"/>
+            <a:ext cx="448056" cy="448056"/>
           </a:xfrm>
           <a:prstGeom prst="rect">
             <a:avLst/>
@@ -12585,14 +12723,14 @@
       </p:pic>
       <p:sp>
         <p:nvSpPr>
-          <p:cNvPr id="6" name="Text 3"/>
-          <p:cNvSpPr/>
-          <p:nvPr/>
-        </p:nvSpPr>
-        <p:spPr>
-          <a:xfrm>
-            <a:off x="1417320" y="3127248"/>
-            <a:ext cx="7315200" cy="320040"/>
+          <p:cNvPr id="7" name="Text 4"/>
+          <p:cNvSpPr/>
+          <p:nvPr/>
+        </p:nvSpPr>
+        <p:spPr>
+          <a:xfrm>
+            <a:off x="1691640" y="1856232"/>
+            <a:ext cx="6858000" cy="347472"/>
           </a:xfrm>
           <a:prstGeom prst="rect">
             <a:avLst/>
@@ -12608,7 +12746,7 @@
               <a:buNone/>
             </a:pPr>
             <a:r>
-              <a:rPr lang="en-US" sz="1400" b="1" dirty="0">
+              <a:rPr lang="en-US" sz="1700" b="1" dirty="0">
                 <a:solidFill>
                   <a:srgbClr val="FFFFFF"/>
                 </a:solidFill>
@@ -12616,24 +12754,22 @@
                 <a:ea typeface="Microsoft JhengHei" pitchFamily="34" charset="-122"/>
                 <a:cs typeface="Microsoft JhengHei" pitchFamily="34" charset="-120"/>
               </a:rPr>
-              <a:t>Cowork 練習手冊</a:t>
-            </a:r>
-            <a:endParaRPr lang="en-US" sz="1400" dirty="0"/>
-          </a:p>
-        </p:txBody>
-      </p:sp>
-      <p:sp>
-        <p:nvSpPr>
-          <p:cNvPr id="7" name="Text 4">
-            <a:hlinkClick r:id="rId3" tooltip=""/>
-          </p:cNvPr>
-          <p:cNvSpPr/>
-          <p:nvPr/>
-        </p:nvSpPr>
-        <p:spPr>
-          <a:xfrm>
-            <a:off x="1417320" y="3419856"/>
-            <a:ext cx="7772400" cy="320040"/>
+              <a:t>行動前審核</a:t>
+            </a:r>
+            <a:endParaRPr lang="en-US" sz="1700" dirty="0"/>
+          </a:p>
+        </p:txBody>
+      </p:sp>
+      <p:sp>
+        <p:nvSpPr>
+          <p:cNvPr id="8" name="Text 5"/>
+          <p:cNvSpPr/>
+          <p:nvPr/>
+        </p:nvSpPr>
+        <p:spPr>
+          <a:xfrm>
+            <a:off x="1691640" y="2203704"/>
+            <a:ext cx="9966960" cy="658368"/>
           </a:xfrm>
           <a:prstGeom prst="rect">
             <a:avLst/>
@@ -12646,33 +12782,196 @@
           <a:lstStyle/>
           <a:p>
             <a:pPr indent="0" marL="0">
-              <a:buNone/>
-            </a:pPr>
-            <a:r>
-              <a:rPr lang="en-US" sz="1300" u="sng" dirty="0">
-                <a:solidFill>
-                  <a:srgbClr val="9FE9FF"/>
-                </a:solidFill>
-                <a:latin typeface="Microsoft JhengHei" pitchFamily="34" charset="0"/>
-                <a:ea typeface="Microsoft JhengHei" pitchFamily="34" charset="-122"/>
-                <a:cs typeface="Microsoft JhengHei" pitchFamily="34" charset="-120"/>
-                <a:hlinkClick r:id="rId3" invalidUrl="" action="" tgtFrame="" tooltip="" history="1" highlightClick="0" endSnd="0">
-                  <a:extLst>
-                    <a:ext uri="{A12FA001-AC4F-418D-AE19-62706E023703}">
-                      <ahyp:hlinkClr xmlns:ahyp="http://schemas.microsoft.com/office/drawing/2018/hyperlinkcolor" val="tx"/>
-                    </a:ext>
-                  </a:extLst>
-                </a:hlinkClick>
-              </a:rPr>
-              <a:t>andyhung11.github.io/Copilot-in-1mins/CoworkPlaybook/</a:t>
+              <a:lnSpc>
+                <a:spcPct val="118000"/>
+              </a:lnSpc>
+              <a:buNone/>
+            </a:pPr>
+            <a:r>
+              <a:rPr lang="en-US" sz="1300" dirty="0">
+                <a:solidFill>
+                  <a:srgbClr val="C7CAEC"/>
+                </a:solidFill>
+                <a:latin typeface="Microsoft JhengHei" pitchFamily="34" charset="0"/>
+                <a:ea typeface="Microsoft JhengHei" pitchFamily="34" charset="-122"/>
+                <a:cs typeface="Microsoft JhengHei" pitchFamily="34" charset="-120"/>
+              </a:rPr>
+              <a:t>中高風險動作會顯示 RISK-LEVEL；寄信、發 Teams、建立會議等動作先攤開可編輯預覽，核准後才送出。</a:t>
             </a:r>
             <a:endParaRPr lang="en-US" sz="1300" dirty="0"/>
           </a:p>
         </p:txBody>
+      </p:sp>
+      <p:sp>
+        <p:nvSpPr>
+          <p:cNvPr id="9" name="Shape 6"/>
+          <p:cNvSpPr/>
+          <p:nvPr/>
+        </p:nvSpPr>
+        <p:spPr>
+          <a:xfrm>
+            <a:off x="640080" y="3044952"/>
+            <a:ext cx="777240" cy="777240"/>
+          </a:xfrm>
+          <a:prstGeom prst="roundRect">
+            <a:avLst>
+              <a:gd name="adj" fmla="val 18824"/>
+            </a:avLst>
+          </a:prstGeom>
+          <a:solidFill>
+            <a:srgbClr val="FFFFFF">
+              <a:alpha val="14000"/>
+            </a:srgbClr>
+          </a:solidFill>
+          <a:ln w="12700">
+            <a:solidFill>
+              <a:srgbClr val="22D3EE">
+                <a:alpha val="60000"/>
+              </a:srgbClr>
+            </a:solidFill>
+            <a:prstDash val="solid"/>
+          </a:ln>
+        </p:spPr>
       </p:sp>
       <p:pic>
         <p:nvPicPr>
-          <p:cNvPr id="8" name="Image 1" descr="preencoded.png">    </p:cNvPr>
+          <p:cNvPr id="10" name="Image 1" descr="preencoded.png">    </p:cNvPr>
+          <p:cNvPicPr>
+            <a:picLocks noChangeAspect="1"/>
+          </p:cNvPicPr>
+          <p:nvPr/>
+        </p:nvPicPr>
+        <p:blipFill>
+          <a:blip r:embed="rId3"/>
+          <a:stretch>
+            <a:fillRect/>
+          </a:stretch>
+        </p:blipFill>
+        <p:spPr>
+          <a:xfrm>
+            <a:off x="804672" y="3209544"/>
+            <a:ext cx="448056" cy="448056"/>
+          </a:xfrm>
+          <a:prstGeom prst="rect">
+            <a:avLst/>
+          </a:prstGeom>
+        </p:spPr>
+      </p:pic>
+      <p:sp>
+        <p:nvSpPr>
+          <p:cNvPr id="11" name="Text 7"/>
+          <p:cNvSpPr/>
+          <p:nvPr/>
+        </p:nvSpPr>
+        <p:spPr>
+          <a:xfrm>
+            <a:off x="1691640" y="3026664"/>
+            <a:ext cx="6858000" cy="347472"/>
+          </a:xfrm>
+          <a:prstGeom prst="rect">
+            <a:avLst/>
+          </a:prstGeom>
+          <a:noFill/>
+          <a:ln/>
+        </p:spPr>
+        <p:txBody>
+          <a:bodyPr wrap="square" rtlCol="0" anchor="ctr"/>
+          <a:lstStyle/>
+          <a:p>
+            <a:pPr indent="0" marL="0">
+              <a:buNone/>
+            </a:pPr>
+            <a:r>
+              <a:rPr lang="en-US" sz="1700" b="1" dirty="0">
+                <a:solidFill>
+                  <a:srgbClr val="FFFFFF"/>
+                </a:solidFill>
+                <a:latin typeface="Microsoft JhengHei" pitchFamily="34" charset="0"/>
+                <a:ea typeface="Microsoft JhengHei" pitchFamily="34" charset="-122"/>
+                <a:cs typeface="Microsoft JhengHei" pitchFamily="34" charset="-120"/>
+              </a:rPr>
+              <a:t>控制範圍清楚</a:t>
+            </a:r>
+            <a:endParaRPr lang="en-US" sz="1700" dirty="0"/>
+          </a:p>
+        </p:txBody>
+      </p:sp>
+      <p:sp>
+        <p:nvSpPr>
+          <p:cNvPr id="12" name="Text 8"/>
+          <p:cNvSpPr/>
+          <p:nvPr/>
+        </p:nvSpPr>
+        <p:spPr>
+          <a:xfrm>
+            <a:off x="1691640" y="3374136"/>
+            <a:ext cx="9966960" cy="658368"/>
+          </a:xfrm>
+          <a:prstGeom prst="rect">
+            <a:avLst/>
+          </a:prstGeom>
+          <a:noFill/>
+          <a:ln/>
+        </p:spPr>
+        <p:txBody>
+          <a:bodyPr wrap="square" rtlCol="0" anchor="ctr"/>
+          <a:lstStyle/>
+          <a:p>
+            <a:pPr indent="0" marL="0">
+              <a:lnSpc>
+                <a:spcPct val="118000"/>
+              </a:lnSpc>
+              <a:buNone/>
+            </a:pPr>
+            <a:r>
+              <a:rPr lang="en-US" sz="1300" dirty="0">
+                <a:solidFill>
+                  <a:srgbClr val="C7CAEC"/>
+                </a:solidFill>
+                <a:latin typeface="Microsoft JhengHei" pitchFamily="34" charset="0"/>
+                <a:ea typeface="Microsoft JhengHei" pitchFamily="34" charset="-122"/>
+                <a:cs typeface="Microsoft JhengHei" pitchFamily="34" charset="-120"/>
+              </a:rPr>
+              <a:t>don’t ask again 可限定 per-recipient、per-domain 或 always；任務可軟／硬暫停、恢復或取消。</a:t>
+            </a:r>
+            <a:endParaRPr lang="en-US" sz="1300" dirty="0"/>
+          </a:p>
+        </p:txBody>
+      </p:sp>
+      <p:sp>
+        <p:nvSpPr>
+          <p:cNvPr id="13" name="Shape 9"/>
+          <p:cNvSpPr/>
+          <p:nvPr/>
+        </p:nvSpPr>
+        <p:spPr>
+          <a:xfrm>
+            <a:off x="640080" y="4215384"/>
+            <a:ext cx="777240" cy="777240"/>
+          </a:xfrm>
+          <a:prstGeom prst="roundRect">
+            <a:avLst>
+              <a:gd name="adj" fmla="val 18824"/>
+            </a:avLst>
+          </a:prstGeom>
+          <a:solidFill>
+            <a:srgbClr val="FFFFFF">
+              <a:alpha val="14000"/>
+            </a:srgbClr>
+          </a:solidFill>
+          <a:ln w="12700">
+            <a:solidFill>
+              <a:srgbClr val="22D3EE">
+                <a:alpha val="60000"/>
+              </a:srgbClr>
+            </a:solidFill>
+            <a:prstDash val="solid"/>
+          </a:ln>
+        </p:spPr>
+      </p:sp>
+      <p:pic>
+        <p:nvPicPr>
+          <p:cNvPr id="14" name="Image 2" descr="preencoded.png">    </p:cNvPr>
           <p:cNvPicPr>
             <a:picLocks noChangeAspect="1"/>
           </p:cNvPicPr>
@@ -12686,8 +12985,8 @@
         </p:blipFill>
         <p:spPr>
           <a:xfrm>
-            <a:off x="640080" y="4315968"/>
-            <a:ext cx="237744" cy="237744"/>
+            <a:off x="804672" y="4379976"/>
+            <a:ext cx="448056" cy="448056"/>
           </a:xfrm>
           <a:prstGeom prst="rect">
             <a:avLst/>
@@ -12696,14 +12995,14 @@
       </p:pic>
       <p:sp>
         <p:nvSpPr>
-          <p:cNvPr id="9" name="Text 5"/>
-          <p:cNvSpPr/>
-          <p:nvPr/>
-        </p:nvSpPr>
-        <p:spPr>
-          <a:xfrm>
-            <a:off x="1005840" y="4261104"/>
-            <a:ext cx="9144000" cy="365760"/>
+          <p:cNvPr id="15" name="Text 10"/>
+          <p:cNvSpPr/>
+          <p:nvPr/>
+        </p:nvSpPr>
+        <p:spPr>
+          <a:xfrm>
+            <a:off x="1691640" y="4197096"/>
+            <a:ext cx="6858000" cy="347472"/>
           </a:xfrm>
           <a:prstGeom prst="rect">
             <a:avLst/>
@@ -12719,23 +13018,96 @@
               <a:buNone/>
             </a:pPr>
             <a:r>
-              <a:rPr lang="en-US" sz="1400" dirty="0">
-                <a:solidFill>
-                  <a:srgbClr val="E3E5F7"/>
-                </a:solidFill>
-                <a:latin typeface="Microsoft JhengHei" pitchFamily="34" charset="0"/>
-                <a:ea typeface="Microsoft JhengHei" pitchFamily="34" charset="-122"/>
-                <a:cs typeface="Microsoft JhengHei" pitchFamily="34" charset="-120"/>
-              </a:rPr>
-              <a:t>挑一個最貼近你工作的情境開始</a:t>
-            </a:r>
-            <a:endParaRPr lang="en-US" sz="1400" dirty="0"/>
-          </a:p>
-        </p:txBody>
+              <a:rPr lang="en-US" sz="1700" b="1" dirty="0">
+                <a:solidFill>
+                  <a:srgbClr val="FFFFFF"/>
+                </a:solidFill>
+                <a:latin typeface="Microsoft JhengHei" pitchFamily="34" charset="0"/>
+                <a:ea typeface="Microsoft JhengHei" pitchFamily="34" charset="-122"/>
+                <a:cs typeface="Microsoft JhengHei" pitchFamily="34" charset="-120"/>
+              </a:rPr>
+              <a:t>自動化任務也有把關</a:t>
+            </a:r>
+            <a:endParaRPr lang="en-US" sz="1700" dirty="0"/>
+          </a:p>
+        </p:txBody>
+      </p:sp>
+      <p:sp>
+        <p:nvSpPr>
+          <p:cNvPr id="16" name="Text 11"/>
+          <p:cNvSpPr/>
+          <p:nvPr/>
+        </p:nvSpPr>
+        <p:spPr>
+          <a:xfrm>
+            <a:off x="1691640" y="4544568"/>
+            <a:ext cx="9966960" cy="658368"/>
+          </a:xfrm>
+          <a:prstGeom prst="rect">
+            <a:avLst/>
+          </a:prstGeom>
+          <a:noFill/>
+          <a:ln/>
+        </p:spPr>
+        <p:txBody>
+          <a:bodyPr wrap="square" rtlCol="0" anchor="ctr"/>
+          <a:lstStyle/>
+          <a:p>
+            <a:pPr indent="0" marL="0">
+              <a:lnSpc>
+                <a:spcPct val="118000"/>
+              </a:lnSpc>
+              <a:buNone/>
+            </a:pPr>
+            <a:r>
+              <a:rPr lang="en-US" sz="1300" dirty="0">
+                <a:solidFill>
+                  <a:srgbClr val="C7CAEC"/>
+                </a:solidFill>
+                <a:latin typeface="Microsoft JhengHei" pitchFamily="34" charset="0"/>
+                <a:ea typeface="Microsoft JhengHei" pitchFamily="34" charset="-122"/>
+                <a:cs typeface="Microsoft JhengHei" pitchFamily="34" charset="-120"/>
+              </a:rPr>
+              <a:t>排程提示與事件驅動任務有執行頻率限制與防迴圈保護；一律以建立者權限執行，且與其他 Cowork 活動一同記錄在統一稽核日誌，套用 Microsoft Purview 政策。</a:t>
+            </a:r>
+            <a:endParaRPr lang="en-US" sz="1300" dirty="0"/>
+          </a:p>
+        </p:txBody>
+      </p:sp>
+      <p:sp>
+        <p:nvSpPr>
+          <p:cNvPr id="17" name="Shape 12"/>
+          <p:cNvSpPr/>
+          <p:nvPr/>
+        </p:nvSpPr>
+        <p:spPr>
+          <a:xfrm>
+            <a:off x="640080" y="5385816"/>
+            <a:ext cx="777240" cy="777240"/>
+          </a:xfrm>
+          <a:prstGeom prst="roundRect">
+            <a:avLst>
+              <a:gd name="adj" fmla="val 18824"/>
+            </a:avLst>
+          </a:prstGeom>
+          <a:solidFill>
+            <a:srgbClr val="FFFFFF">
+              <a:alpha val="14000"/>
+            </a:srgbClr>
+          </a:solidFill>
+          <a:ln w="12700">
+            <a:solidFill>
+              <a:srgbClr val="22D3EE">
+                <a:alpha val="60000"/>
+              </a:srgbClr>
+            </a:solidFill>
+            <a:prstDash val="solid"/>
+          </a:ln>
+        </p:spPr>
       </p:sp>
       <p:pic>
         <p:nvPicPr>
-          <p:cNvPr id="10" name="Image 2" descr="preencoded.png">    </p:cNvPr>
+          <p:cNvPr id="18" name="Image 3" descr="preencoded.png">    </p:cNvPr>
           <p:cNvPicPr>
             <a:picLocks noChangeAspect="1"/>
           </p:cNvPicPr>
@@ -12749,8 +13121,8 @@
         </p:blipFill>
         <p:spPr>
           <a:xfrm>
-            <a:off x="640080" y="4791456"/>
-            <a:ext cx="237744" cy="237744"/>
+            <a:off x="804672" y="5550408"/>
+            <a:ext cx="448056" cy="448056"/>
           </a:xfrm>
           <a:prstGeom prst="rect">
             <a:avLst/>
@@ -12759,14 +13131,14 @@
       </p:pic>
       <p:sp>
         <p:nvSpPr>
-          <p:cNvPr id="11" name="Text 6"/>
-          <p:cNvSpPr/>
-          <p:nvPr/>
-        </p:nvSpPr>
-        <p:spPr>
-          <a:xfrm>
-            <a:off x="1005840" y="4736592"/>
-            <a:ext cx="9144000" cy="365760"/>
+          <p:cNvPr id="19" name="Text 13"/>
+          <p:cNvSpPr/>
+          <p:nvPr/>
+        </p:nvSpPr>
+        <p:spPr>
+          <a:xfrm>
+            <a:off x="1691640" y="5367528"/>
+            <a:ext cx="6858000" cy="347472"/>
           </a:xfrm>
           <a:prstGeom prst="rect">
             <a:avLst/>
@@ -12782,54 +13154,30 @@
               <a:buNone/>
             </a:pPr>
             <a:r>
-              <a:rPr lang="en-US" sz="1400" dirty="0">
-                <a:solidFill>
-                  <a:srgbClr val="E3E5F7"/>
-                </a:solidFill>
-                <a:latin typeface="Microsoft JhengHei" pitchFamily="34" charset="0"/>
-                <a:ea typeface="Microsoft JhengHei" pitchFamily="34" charset="-122"/>
-                <a:cs typeface="Microsoft JhengHei" pitchFamily="34" charset="-120"/>
-              </a:rPr>
-              <a:t>自訂技能放 OneDrive /Documents/Cowork/skills/ 的 SKILL.md（最多 50 個、每個 1MB）</a:t>
-            </a:r>
-            <a:endParaRPr lang="en-US" sz="1400" dirty="0"/>
-          </a:p>
-        </p:txBody>
-      </p:sp>
-      <p:pic>
-        <p:nvPicPr>
-          <p:cNvPr id="12" name="Image 3" descr="preencoded.png">    </p:cNvPr>
-          <p:cNvPicPr>
-            <a:picLocks noChangeAspect="1"/>
-          </p:cNvPicPr>
-          <p:nvPr/>
-        </p:nvPicPr>
-        <p:blipFill>
-          <a:blip r:embed="rId6"/>
-          <a:stretch>
-            <a:fillRect/>
-          </a:stretch>
-        </p:blipFill>
-        <p:spPr>
-          <a:xfrm>
-            <a:off x="640080" y="5266944"/>
-            <a:ext cx="237744" cy="237744"/>
-          </a:xfrm>
-          <a:prstGeom prst="rect">
-            <a:avLst/>
-          </a:prstGeom>
-        </p:spPr>
-      </p:pic>
-      <p:sp>
-        <p:nvSpPr>
-          <p:cNvPr id="13" name="Text 7"/>
-          <p:cNvSpPr/>
-          <p:nvPr/>
-        </p:nvSpPr>
-        <p:spPr>
-          <a:xfrm>
-            <a:off x="1005840" y="5212080"/>
-            <a:ext cx="9144000" cy="365760"/>
+              <a:rPr lang="en-US" sz="1700" b="1" dirty="0">
+                <a:solidFill>
+                  <a:srgbClr val="FFFFFF"/>
+                </a:solidFill>
+                <a:latin typeface="Microsoft JhengHei" pitchFamily="34" charset="0"/>
+                <a:ea typeface="Microsoft JhengHei" pitchFamily="34" charset="-122"/>
+                <a:cs typeface="Microsoft JhengHei" pitchFamily="34" charset="-120"/>
+              </a:rPr>
+              <a:t>限制也要知道</a:t>
+            </a:r>
+            <a:endParaRPr lang="en-US" sz="1700" dirty="0"/>
+          </a:p>
+        </p:txBody>
+      </p:sp>
+      <p:sp>
+        <p:nvSpPr>
+          <p:cNvPr id="20" name="Text 14"/>
+          <p:cNvSpPr/>
+          <p:nvPr/>
+        </p:nvSpPr>
+        <p:spPr>
+          <a:xfrm>
+            <a:off x="1691640" y="5715000"/>
+            <a:ext cx="9966960" cy="658368"/>
           </a:xfrm>
           <a:prstGeom prst="rect">
             <a:avLst/>
@@ -12842,83 +13190,101 @@
           <a:lstStyle/>
           <a:p>
             <a:pPr indent="0" marL="0">
-              <a:buNone/>
-            </a:pPr>
-            <a:r>
-              <a:rPr lang="en-US" sz="1400" dirty="0">
-                <a:solidFill>
-                  <a:srgbClr val="E3E5F7"/>
-                </a:solidFill>
-                <a:latin typeface="Microsoft JhengHei" pitchFamily="34" charset="0"/>
-                <a:ea typeface="Microsoft JhengHei" pitchFamily="34" charset="-122"/>
-                <a:cs typeface="Microsoft JhengHei" pitchFamily="34" charset="-120"/>
-              </a:rPr>
-              <a:t>模型選擇器：Auto（預設）、GPT 5.5 Frontier、GPT 5.6 Sol／Terra、Opus 5、Sonnet 5、Fable 5（預覽・預設關閉）</a:t>
-            </a:r>
-            <a:endParaRPr lang="en-US" sz="1400" dirty="0"/>
-          </a:p>
-        </p:txBody>
-      </p:sp>
-      <p:pic>
-        <p:nvPicPr>
-          <p:cNvPr id="14" name="Image 4" descr="preencoded.png">    </p:cNvPr>
-          <p:cNvPicPr>
-            <a:picLocks noChangeAspect="1"/>
-          </p:cNvPicPr>
-          <p:nvPr/>
-        </p:nvPicPr>
-        <p:blipFill>
-          <a:blip r:embed="rId7"/>
-          <a:stretch>
-            <a:fillRect/>
-          </a:stretch>
-        </p:blipFill>
-        <p:spPr>
-          <a:xfrm>
-            <a:off x="640080" y="5742432"/>
-            <a:ext cx="237744" cy="237744"/>
-          </a:xfrm>
-          <a:prstGeom prst="rect">
-            <a:avLst/>
-          </a:prstGeom>
-        </p:spPr>
-      </p:pic>
-      <p:sp>
-        <p:nvSpPr>
-          <p:cNvPr id="15" name="Text 8"/>
-          <p:cNvSpPr/>
-          <p:nvPr/>
-        </p:nvSpPr>
-        <p:spPr>
-          <a:xfrm>
-            <a:off x="1005840" y="5687568"/>
-            <a:ext cx="9144000" cy="365760"/>
-          </a:xfrm>
-          <a:prstGeom prst="rect">
-            <a:avLst/>
-          </a:prstGeom>
-          <a:noFill/>
-          <a:ln/>
-        </p:spPr>
-        <p:txBody>
-          <a:bodyPr wrap="square" rtlCol="0" anchor="ctr"/>
-          <a:lstStyle/>
-          <a:p>
-            <a:pPr indent="0" marL="0">
-              <a:buNone/>
-            </a:pPr>
-            <a:r>
-              <a:rPr lang="en-US" sz="1400" dirty="0">
-                <a:solidFill>
-                  <a:srgbClr val="E3E5F7"/>
-                </a:solidFill>
-                <a:latin typeface="Microsoft JhengHei" pitchFamily="34" charset="0"/>
-                <a:ea typeface="Microsoft JhengHei" pitchFamily="34" charset="-122"/>
-                <a:cs typeface="Microsoft JhengHei" pitchFamily="34" charset="-120"/>
-              </a:rPr>
-              <a:t>想要自動觸發？到「Automations」頁設定排程提示（上限 5 個）或事件觸發任務（收信／被 @提及）</a:t>
-            </a:r>
-            <a:endParaRPr lang="en-US" sz="1400" dirty="0"/>
+              <a:lnSpc>
+                <a:spcPct val="118000"/>
+              </a:lnSpc>
+              <a:buNone/>
+            </a:pPr>
+            <a:r>
+              <a:rPr lang="en-US" sz="1300" dirty="0">
+                <a:solidFill>
+                  <a:srgbClr val="C7CAEC"/>
+                </a:solidFill>
+                <a:latin typeface="Microsoft JhengHei" pitchFamily="34" charset="0"/>
+                <a:ea typeface="Microsoft JhengHei" pitchFamily="34" charset="-122"/>
+                <a:cs typeface="Microsoft JhengHei" pitchFamily="34" charset="-120"/>
+              </a:rPr>
+              <a:t>不能存取本機檔案、刪除 OneDrive/SharePoint 檔案或讀取加密檔；附件 &lt;200MB；自訂技能與第三方 plugin 未經 Microsoft 驗證，需自行審閱。官方明列不適用於「免人工審查即需保證正確」的用途。</a:t>
+            </a:r>
+            <a:endParaRPr lang="en-US" sz="1300" dirty="0"/>
+          </a:p>
+        </p:txBody>
+      </p:sp>
+      <p:sp>
+        <p:nvSpPr>
+          <p:cNvPr id="21" name="Text 15"/>
+          <p:cNvSpPr/>
+          <p:nvPr/>
+        </p:nvSpPr>
+        <p:spPr>
+          <a:xfrm>
+            <a:off x="640080" y="6473952"/>
+            <a:ext cx="5486400" cy="274320"/>
+          </a:xfrm>
+          <a:prstGeom prst="rect">
+            <a:avLst/>
+          </a:prstGeom>
+          <a:noFill/>
+          <a:ln/>
+        </p:spPr>
+        <p:txBody>
+          <a:bodyPr wrap="square" rtlCol="0" anchor="ctr"/>
+          <a:lstStyle/>
+          <a:p>
+            <a:pPr algn="l" indent="0" marL="0">
+              <a:buNone/>
+            </a:pPr>
+            <a:r>
+              <a:rPr lang="en-US" sz="900" dirty="0">
+                <a:solidFill>
+                  <a:srgbClr val="8A8FB5"/>
+                </a:solidFill>
+                <a:latin typeface="Microsoft JhengHei" pitchFamily="34" charset="0"/>
+                <a:ea typeface="Microsoft JhengHei" pitchFamily="34" charset="-122"/>
+                <a:cs typeface="Microsoft JhengHei" pitchFamily="34" charset="-120"/>
+              </a:rPr>
+              <a:t>Microsoft 365 Copilot Cowork</a:t>
+            </a:r>
+            <a:endParaRPr lang="en-US" sz="900" dirty="0"/>
+          </a:p>
+        </p:txBody>
+      </p:sp>
+      <p:sp>
+        <p:nvSpPr>
+          <p:cNvPr id="22" name="Text 16"/>
+          <p:cNvSpPr/>
+          <p:nvPr/>
+        </p:nvSpPr>
+        <p:spPr>
+          <a:xfrm>
+            <a:off x="11002975" y="6473952"/>
+            <a:ext cx="548640" cy="274320"/>
+          </a:xfrm>
+          <a:prstGeom prst="rect">
+            <a:avLst/>
+          </a:prstGeom>
+          <a:noFill/>
+          <a:ln/>
+        </p:spPr>
+        <p:txBody>
+          <a:bodyPr wrap="square" rtlCol="0" anchor="ctr"/>
+          <a:lstStyle/>
+          <a:p>
+            <a:pPr algn="r" indent="0" marL="0">
+              <a:buNone/>
+            </a:pPr>
+            <a:r>
+              <a:rPr lang="en-US" sz="900" dirty="0">
+                <a:solidFill>
+                  <a:srgbClr val="8A8FB5"/>
+                </a:solidFill>
+                <a:latin typeface="Microsoft JhengHei" pitchFamily="34" charset="0"/>
+                <a:ea typeface="Microsoft JhengHei" pitchFamily="34" charset="-122"/>
+                <a:cs typeface="Microsoft JhengHei" pitchFamily="34" charset="-120"/>
+              </a:rPr>
+              <a:t>19</a:t>
+            </a:r>
+            <a:endParaRPr lang="en-US" sz="900" dirty="0"/>
           </a:p>
         </p:txBody>
       </p:sp>
@@ -12969,6 +13335,517 @@
         </p:nvSpPr>
         <p:spPr>
           <a:xfrm>
+            <a:off x="640080" y="1371600"/>
+            <a:ext cx="10058400" cy="822960"/>
+          </a:xfrm>
+          <a:prstGeom prst="rect">
+            <a:avLst/>
+          </a:prstGeom>
+          <a:noFill/>
+          <a:ln/>
+        </p:spPr>
+        <p:txBody>
+          <a:bodyPr wrap="square" rtlCol="0" anchor="ctr"/>
+          <a:lstStyle/>
+          <a:p>
+            <a:pPr indent="0" marL="0">
+              <a:buNone/>
+            </a:pPr>
+            <a:r>
+              <a:rPr lang="en-US" sz="4000" b="1" dirty="0">
+                <a:solidFill>
+                  <a:srgbClr val="FFFFFF"/>
+                </a:solidFill>
+                <a:latin typeface="Microsoft JhengHei" pitchFamily="34" charset="0"/>
+                <a:ea typeface="Microsoft JhengHei" pitchFamily="34" charset="-122"/>
+                <a:cs typeface="Microsoft JhengHei" pitchFamily="34" charset="-120"/>
+              </a:rPr>
+              <a:t>現在就開始練習</a:t>
+            </a:r>
+            <a:endParaRPr lang="en-US" sz="4000" dirty="0"/>
+          </a:p>
+        </p:txBody>
+      </p:sp>
+      <p:sp>
+        <p:nvSpPr>
+          <p:cNvPr id="3" name="Text 1"/>
+          <p:cNvSpPr/>
+          <p:nvPr/>
+        </p:nvSpPr>
+        <p:spPr>
+          <a:xfrm>
+            <a:off x="640080" y="2377440"/>
+            <a:ext cx="10058400" cy="548640"/>
+          </a:xfrm>
+          <a:prstGeom prst="rect">
+            <a:avLst/>
+          </a:prstGeom>
+          <a:noFill/>
+          <a:ln/>
+        </p:spPr>
+        <p:txBody>
+          <a:bodyPr wrap="square" rtlCol="0" anchor="ctr"/>
+          <a:lstStyle/>
+          <a:p>
+            <a:pPr indent="0" marL="0">
+              <a:buNone/>
+            </a:pPr>
+            <a:r>
+              <a:rPr lang="en-US" sz="1500" dirty="0">
+                <a:solidFill>
+                  <a:srgbClr val="C7CAEC"/>
+                </a:solidFill>
+                <a:latin typeface="Microsoft JhengHei" pitchFamily="34" charset="0"/>
+                <a:ea typeface="Microsoft JhengHei" pitchFamily="34" charset="-122"/>
+                <a:cs typeface="Microsoft JhengHei" pitchFamily="34" charset="-120"/>
+              </a:rPr>
+              <a:t>開始前請確認：每位使用者一張 M365 Copilot 授權、管理員已啟用用量計費（Copilot Credits，未啟用則無法存取）、租戶位於 Anthropic 支援地區；可在 Web/桌面/行動/Outlook/Teams 使用（本機瀏覽器工作僅限網頁版＋Edge 150 以上，且預設停用需管理員開啟）。</a:t>
+            </a:r>
+            <a:endParaRPr lang="en-US" sz="1500" dirty="0"/>
+          </a:p>
+        </p:txBody>
+      </p:sp>
+      <p:sp>
+        <p:nvSpPr>
+          <p:cNvPr id="4" name="Shape 2"/>
+          <p:cNvSpPr/>
+          <p:nvPr/>
+        </p:nvSpPr>
+        <p:spPr>
+          <a:xfrm>
+            <a:off x="640080" y="3017520"/>
+            <a:ext cx="8686800" cy="868680"/>
+          </a:xfrm>
+          <a:prstGeom prst="roundRect">
+            <a:avLst>
+              <a:gd name="adj" fmla="val 12632"/>
+            </a:avLst>
+          </a:prstGeom>
+          <a:solidFill>
+            <a:srgbClr val="FFFFFF">
+              <a:alpha val="10000"/>
+            </a:srgbClr>
+          </a:solidFill>
+          <a:ln w="12700">
+            <a:solidFill>
+              <a:srgbClr val="FFFFFF">
+                <a:alpha val="35000"/>
+              </a:srgbClr>
+            </a:solidFill>
+            <a:prstDash val="solid"/>
+          </a:ln>
+        </p:spPr>
+      </p:sp>
+      <p:pic>
+        <p:nvPicPr>
+          <p:cNvPr id="5" name="Image 0" descr="preencoded.png">    </p:cNvPr>
+          <p:cNvPicPr>
+            <a:picLocks noChangeAspect="1"/>
+          </p:cNvPicPr>
+          <p:nvPr/>
+        </p:nvPicPr>
+        <p:blipFill>
+          <a:blip r:embed="rId2"/>
+          <a:stretch>
+            <a:fillRect/>
+          </a:stretch>
+        </p:blipFill>
+        <p:spPr>
+          <a:xfrm>
+            <a:off x="914400" y="3291840"/>
+            <a:ext cx="329184" cy="329184"/>
+          </a:xfrm>
+          <a:prstGeom prst="rect">
+            <a:avLst/>
+          </a:prstGeom>
+        </p:spPr>
+      </p:pic>
+      <p:sp>
+        <p:nvSpPr>
+          <p:cNvPr id="6" name="Text 3"/>
+          <p:cNvSpPr/>
+          <p:nvPr/>
+        </p:nvSpPr>
+        <p:spPr>
+          <a:xfrm>
+            <a:off x="1417320" y="3127248"/>
+            <a:ext cx="7315200" cy="320040"/>
+          </a:xfrm>
+          <a:prstGeom prst="rect">
+            <a:avLst/>
+          </a:prstGeom>
+          <a:noFill/>
+          <a:ln/>
+        </p:spPr>
+        <p:txBody>
+          <a:bodyPr wrap="square" rtlCol="0" anchor="ctr"/>
+          <a:lstStyle/>
+          <a:p>
+            <a:pPr indent="0" marL="0">
+              <a:buNone/>
+            </a:pPr>
+            <a:r>
+              <a:rPr lang="en-US" sz="1400" b="1" dirty="0">
+                <a:solidFill>
+                  <a:srgbClr val="FFFFFF"/>
+                </a:solidFill>
+                <a:latin typeface="Microsoft JhengHei" pitchFamily="34" charset="0"/>
+                <a:ea typeface="Microsoft JhengHei" pitchFamily="34" charset="-122"/>
+                <a:cs typeface="Microsoft JhengHei" pitchFamily="34" charset="-120"/>
+              </a:rPr>
+              <a:t>Cowork 練習手冊</a:t>
+            </a:r>
+            <a:endParaRPr lang="en-US" sz="1400" dirty="0"/>
+          </a:p>
+        </p:txBody>
+      </p:sp>
+      <p:sp>
+        <p:nvSpPr>
+          <p:cNvPr id="7" name="Text 4">
+            <a:hlinkClick r:id="rId3" tooltip=""/>
+          </p:cNvPr>
+          <p:cNvSpPr/>
+          <p:nvPr/>
+        </p:nvSpPr>
+        <p:spPr>
+          <a:xfrm>
+            <a:off x="1417320" y="3419856"/>
+            <a:ext cx="7772400" cy="320040"/>
+          </a:xfrm>
+          <a:prstGeom prst="rect">
+            <a:avLst/>
+          </a:prstGeom>
+          <a:noFill/>
+          <a:ln/>
+        </p:spPr>
+        <p:txBody>
+          <a:bodyPr wrap="square" rtlCol="0" anchor="ctr"/>
+          <a:lstStyle/>
+          <a:p>
+            <a:pPr indent="0" marL="0">
+              <a:buNone/>
+            </a:pPr>
+            <a:r>
+              <a:rPr lang="en-US" sz="1300" u="sng" dirty="0">
+                <a:solidFill>
+                  <a:srgbClr val="9FE9FF"/>
+                </a:solidFill>
+                <a:latin typeface="Microsoft JhengHei" pitchFamily="34" charset="0"/>
+                <a:ea typeface="Microsoft JhengHei" pitchFamily="34" charset="-122"/>
+                <a:cs typeface="Microsoft JhengHei" pitchFamily="34" charset="-120"/>
+                <a:hlinkClick r:id="rId3" invalidUrl="" action="" tgtFrame="" tooltip="" history="1" highlightClick="0" endSnd="0">
+                  <a:extLst>
+                    <a:ext uri="{A12FA001-AC4F-418D-AE19-62706E023703}">
+                      <ahyp:hlinkClr xmlns:ahyp="http://schemas.microsoft.com/office/drawing/2018/hyperlinkcolor" val="tx"/>
+                    </a:ext>
+                  </a:extLst>
+                </a:hlinkClick>
+              </a:rPr>
+              <a:t>andyhung11.github.io/Copilot-in-1mins/CoworkPlaybook/</a:t>
+            </a:r>
+            <a:endParaRPr lang="en-US" sz="1300" dirty="0"/>
+          </a:p>
+        </p:txBody>
+      </p:sp>
+      <p:pic>
+        <p:nvPicPr>
+          <p:cNvPr id="8" name="Image 1" descr="preencoded.png">    </p:cNvPr>
+          <p:cNvPicPr>
+            <a:picLocks noChangeAspect="1"/>
+          </p:cNvPicPr>
+          <p:nvPr/>
+        </p:nvPicPr>
+        <p:blipFill>
+          <a:blip r:embed="rId4"/>
+          <a:stretch>
+            <a:fillRect/>
+          </a:stretch>
+        </p:blipFill>
+        <p:spPr>
+          <a:xfrm>
+            <a:off x="640080" y="4315968"/>
+            <a:ext cx="237744" cy="237744"/>
+          </a:xfrm>
+          <a:prstGeom prst="rect">
+            <a:avLst/>
+          </a:prstGeom>
+        </p:spPr>
+      </p:pic>
+      <p:sp>
+        <p:nvSpPr>
+          <p:cNvPr id="9" name="Text 5"/>
+          <p:cNvSpPr/>
+          <p:nvPr/>
+        </p:nvSpPr>
+        <p:spPr>
+          <a:xfrm>
+            <a:off x="1005840" y="4261104"/>
+            <a:ext cx="9144000" cy="365760"/>
+          </a:xfrm>
+          <a:prstGeom prst="rect">
+            <a:avLst/>
+          </a:prstGeom>
+          <a:noFill/>
+          <a:ln/>
+        </p:spPr>
+        <p:txBody>
+          <a:bodyPr wrap="square" rtlCol="0" anchor="ctr"/>
+          <a:lstStyle/>
+          <a:p>
+            <a:pPr indent="0" marL="0">
+              <a:buNone/>
+            </a:pPr>
+            <a:r>
+              <a:rPr lang="en-US" sz="1400" dirty="0">
+                <a:solidFill>
+                  <a:srgbClr val="E3E5F7"/>
+                </a:solidFill>
+                <a:latin typeface="Microsoft JhengHei" pitchFamily="34" charset="0"/>
+                <a:ea typeface="Microsoft JhengHei" pitchFamily="34" charset="-122"/>
+                <a:cs typeface="Microsoft JhengHei" pitchFamily="34" charset="-120"/>
+              </a:rPr>
+              <a:t>挑一個最貼近你工作的情境開始</a:t>
+            </a:r>
+            <a:endParaRPr lang="en-US" sz="1400" dirty="0"/>
+          </a:p>
+        </p:txBody>
+      </p:sp>
+      <p:pic>
+        <p:nvPicPr>
+          <p:cNvPr id="10" name="Image 2" descr="preencoded.png">    </p:cNvPr>
+          <p:cNvPicPr>
+            <a:picLocks noChangeAspect="1"/>
+          </p:cNvPicPr>
+          <p:nvPr/>
+        </p:nvPicPr>
+        <p:blipFill>
+          <a:blip r:embed="rId5"/>
+          <a:stretch>
+            <a:fillRect/>
+          </a:stretch>
+        </p:blipFill>
+        <p:spPr>
+          <a:xfrm>
+            <a:off x="640080" y="4791456"/>
+            <a:ext cx="237744" cy="237744"/>
+          </a:xfrm>
+          <a:prstGeom prst="rect">
+            <a:avLst/>
+          </a:prstGeom>
+        </p:spPr>
+      </p:pic>
+      <p:sp>
+        <p:nvSpPr>
+          <p:cNvPr id="11" name="Text 6"/>
+          <p:cNvSpPr/>
+          <p:nvPr/>
+        </p:nvSpPr>
+        <p:spPr>
+          <a:xfrm>
+            <a:off x="1005840" y="4736592"/>
+            <a:ext cx="9144000" cy="365760"/>
+          </a:xfrm>
+          <a:prstGeom prst="rect">
+            <a:avLst/>
+          </a:prstGeom>
+          <a:noFill/>
+          <a:ln/>
+        </p:spPr>
+        <p:txBody>
+          <a:bodyPr wrap="square" rtlCol="0" anchor="ctr"/>
+          <a:lstStyle/>
+          <a:p>
+            <a:pPr indent="0" marL="0">
+              <a:buNone/>
+            </a:pPr>
+            <a:r>
+              <a:rPr lang="en-US" sz="1400" dirty="0">
+                <a:solidFill>
+                  <a:srgbClr val="E3E5F7"/>
+                </a:solidFill>
+                <a:latin typeface="Microsoft JhengHei" pitchFamily="34" charset="0"/>
+                <a:ea typeface="Microsoft JhengHei" pitchFamily="34" charset="-122"/>
+                <a:cs typeface="Microsoft JhengHei" pitchFamily="34" charset="-120"/>
+              </a:rPr>
+              <a:t>自訂技能放 OneDrive /Documents/Cowork/skills/ 的 SKILL.md（最多 50 個、每個 1MB）</a:t>
+            </a:r>
+            <a:endParaRPr lang="en-US" sz="1400" dirty="0"/>
+          </a:p>
+        </p:txBody>
+      </p:sp>
+      <p:pic>
+        <p:nvPicPr>
+          <p:cNvPr id="12" name="Image 3" descr="preencoded.png">    </p:cNvPr>
+          <p:cNvPicPr>
+            <a:picLocks noChangeAspect="1"/>
+          </p:cNvPicPr>
+          <p:nvPr/>
+        </p:nvPicPr>
+        <p:blipFill>
+          <a:blip r:embed="rId6"/>
+          <a:stretch>
+            <a:fillRect/>
+          </a:stretch>
+        </p:blipFill>
+        <p:spPr>
+          <a:xfrm>
+            <a:off x="640080" y="5266944"/>
+            <a:ext cx="237744" cy="237744"/>
+          </a:xfrm>
+          <a:prstGeom prst="rect">
+            <a:avLst/>
+          </a:prstGeom>
+        </p:spPr>
+      </p:pic>
+      <p:sp>
+        <p:nvSpPr>
+          <p:cNvPr id="13" name="Text 7"/>
+          <p:cNvSpPr/>
+          <p:nvPr/>
+        </p:nvSpPr>
+        <p:spPr>
+          <a:xfrm>
+            <a:off x="1005840" y="5212080"/>
+            <a:ext cx="9144000" cy="365760"/>
+          </a:xfrm>
+          <a:prstGeom prst="rect">
+            <a:avLst/>
+          </a:prstGeom>
+          <a:noFill/>
+          <a:ln/>
+        </p:spPr>
+        <p:txBody>
+          <a:bodyPr wrap="square" rtlCol="0" anchor="ctr"/>
+          <a:lstStyle/>
+          <a:p>
+            <a:pPr indent="0" marL="0">
+              <a:buNone/>
+            </a:pPr>
+            <a:r>
+              <a:rPr lang="en-US" sz="1400" dirty="0">
+                <a:solidFill>
+                  <a:srgbClr val="E3E5F7"/>
+                </a:solidFill>
+                <a:latin typeface="Microsoft JhengHei" pitchFamily="34" charset="0"/>
+                <a:ea typeface="Microsoft JhengHei" pitchFamily="34" charset="-122"/>
+                <a:cs typeface="Microsoft JhengHei" pitchFamily="34" charset="-120"/>
+              </a:rPr>
+              <a:t>模型選擇器：Auto（預設）、GPT 5.5 Frontier、GPT 5.6 Sol／Terra、Opus 5、Sonnet 5、Fable 5（預覽・預設關閉）</a:t>
+            </a:r>
+            <a:endParaRPr lang="en-US" sz="1400" dirty="0"/>
+          </a:p>
+        </p:txBody>
+      </p:sp>
+      <p:pic>
+        <p:nvPicPr>
+          <p:cNvPr id="14" name="Image 4" descr="preencoded.png">    </p:cNvPr>
+          <p:cNvPicPr>
+            <a:picLocks noChangeAspect="1"/>
+          </p:cNvPicPr>
+          <p:nvPr/>
+        </p:nvPicPr>
+        <p:blipFill>
+          <a:blip r:embed="rId7"/>
+          <a:stretch>
+            <a:fillRect/>
+          </a:stretch>
+        </p:blipFill>
+        <p:spPr>
+          <a:xfrm>
+            <a:off x="640080" y="5742432"/>
+            <a:ext cx="237744" cy="237744"/>
+          </a:xfrm>
+          <a:prstGeom prst="rect">
+            <a:avLst/>
+          </a:prstGeom>
+        </p:spPr>
+      </p:pic>
+      <p:sp>
+        <p:nvSpPr>
+          <p:cNvPr id="15" name="Text 8"/>
+          <p:cNvSpPr/>
+          <p:nvPr/>
+        </p:nvSpPr>
+        <p:spPr>
+          <a:xfrm>
+            <a:off x="1005840" y="5687568"/>
+            <a:ext cx="9144000" cy="365760"/>
+          </a:xfrm>
+          <a:prstGeom prst="rect">
+            <a:avLst/>
+          </a:prstGeom>
+          <a:noFill/>
+          <a:ln/>
+        </p:spPr>
+        <p:txBody>
+          <a:bodyPr wrap="square" rtlCol="0" anchor="ctr"/>
+          <a:lstStyle/>
+          <a:p>
+            <a:pPr indent="0" marL="0">
+              <a:buNone/>
+            </a:pPr>
+            <a:r>
+              <a:rPr lang="en-US" sz="1400" dirty="0">
+                <a:solidFill>
+                  <a:srgbClr val="E3E5F7"/>
+                </a:solidFill>
+                <a:latin typeface="Microsoft JhengHei" pitchFamily="34" charset="0"/>
+                <a:ea typeface="Microsoft JhengHei" pitchFamily="34" charset="-122"/>
+                <a:cs typeface="Microsoft JhengHei" pitchFamily="34" charset="-120"/>
+              </a:rPr>
+              <a:t>想要自動觸發？到「Automations」頁設定排程提示（上限 5 個）或事件觸發任務（收信／被 @提及）</a:t>
+            </a:r>
+            <a:endParaRPr lang="en-US" sz="1400" dirty="0"/>
+          </a:p>
+        </p:txBody>
+      </p:sp>
+    </p:spTree>
+  </p:cSld>
+  <p:clrMapOvr>
+    <a:masterClrMapping/>
+  </p:clrMapOvr>
+</p:sld>
+</file>
+
+<file path=ppt/slides/slide22.xml><?xml version="1.0" encoding="utf-8"?>
+<p:sld xmlns:a="http://schemas.openxmlformats.org/drawingml/2006/main" xmlns:r="http://schemas.openxmlformats.org/officeDocument/2006/relationships" xmlns:p="http://schemas.openxmlformats.org/presentationml/2006/main">
+  <p:cSld name="Slide 22">
+    <p:bg>
+      <p:bgPr>
+        <a:blipFill dpi="0" rotWithShape="1">
+          <a:blip r:embed="rId1">
+            <a:lum/>
+          </a:blip>
+          <a:srcRect/>
+          <a:stretch>
+            <a:fillRect/>
+          </a:stretch>
+        </a:blipFill>
+        <a:effectLst/>
+      </p:bgPr>
+    </p:bg>
+    <p:spTree>
+      <p:nvGrpSpPr>
+        <p:cNvPr id="1" name=""/>
+        <p:cNvGrpSpPr/>
+        <p:nvPr/>
+      </p:nvGrpSpPr>
+      <p:grpSpPr>
+        <a:xfrm>
+          <a:off x="0" y="0"/>
+          <a:ext cx="0" cy="0"/>
+          <a:chOff x="0" y="0"/>
+          <a:chExt cx="0" cy="0"/>
+        </a:xfrm>
+      </p:grpSpPr>
+      <p:sp>
+        <p:nvSpPr>
+          <p:cNvPr id="2" name="Text 0"/>
+          <p:cNvSpPr/>
+          <p:nvPr/>
+        </p:nvSpPr>
+        <p:spPr>
+          <a:xfrm>
             <a:off x="640080" y="2377440"/>
             <a:ext cx="10058400" cy="1097280"/>
           </a:xfrm>
@@ -17895,6 +18772,1516 @@
                 <a:ea typeface="Microsoft JhengHei" pitchFamily="34" charset="-122"/>
                 <a:cs typeface="Microsoft JhengHei" pitchFamily="34" charset="-120"/>
               </a:rPr>
+              <a:t>BEFORE YOU START</a:t>
+            </a:r>
+            <a:endParaRPr lang="en-US" sz="1200" dirty="0"/>
+          </a:p>
+        </p:txBody>
+      </p:sp>
+      <p:sp>
+        <p:nvSpPr>
+          <p:cNvPr id="4" name="Text 2"/>
+          <p:cNvSpPr/>
+          <p:nvPr/>
+        </p:nvSpPr>
+        <p:spPr>
+          <a:xfrm>
+            <a:off x="640080" y="786384"/>
+            <a:ext cx="10972800" cy="640080"/>
+          </a:xfrm>
+          <a:prstGeom prst="rect">
+            <a:avLst/>
+          </a:prstGeom>
+          <a:noFill/>
+          <a:ln/>
+        </p:spPr>
+        <p:txBody>
+          <a:bodyPr wrap="square" rtlCol="0" anchor="ctr"/>
+          <a:lstStyle/>
+          <a:p>
+            <a:pPr indent="0" marL="0">
+              <a:buNone/>
+            </a:pPr>
+            <a:r>
+              <a:rPr lang="en-US" sz="3000" b="1" dirty="0">
+                <a:solidFill>
+                  <a:srgbClr val="1E2235"/>
+                </a:solidFill>
+                <a:latin typeface="Microsoft JhengHei" pitchFamily="34" charset="0"/>
+                <a:ea typeface="Microsoft JhengHei" pitchFamily="34" charset="-122"/>
+                <a:cs typeface="Microsoft JhengHei" pitchFamily="34" charset="-120"/>
+              </a:rPr>
+              <a:t>練習環境準備</a:t>
+            </a:r>
+            <a:endParaRPr lang="en-US" sz="3000" dirty="0"/>
+          </a:p>
+        </p:txBody>
+      </p:sp>
+      <p:sp>
+        <p:nvSpPr>
+          <p:cNvPr id="5" name="Text 3"/>
+          <p:cNvSpPr/>
+          <p:nvPr/>
+        </p:nvSpPr>
+        <p:spPr>
+          <a:xfrm>
+            <a:off x="640080" y="1481328"/>
+            <a:ext cx="10972800" cy="329184"/>
+          </a:xfrm>
+          <a:prstGeom prst="rect">
+            <a:avLst/>
+          </a:prstGeom>
+          <a:noFill/>
+          <a:ln/>
+        </p:spPr>
+        <p:txBody>
+          <a:bodyPr wrap="square" rtlCol="0" anchor="ctr"/>
+          <a:lstStyle/>
+          <a:p>
+            <a:pPr indent="0" marL="0">
+              <a:buNone/>
+            </a:pPr>
+            <a:r>
+              <a:rPr lang="en-US" sz="1300" dirty="0">
+                <a:solidFill>
+                  <a:srgbClr val="5B6079"/>
+                </a:solidFill>
+                <a:latin typeface="Microsoft JhengHei" pitchFamily="34" charset="0"/>
+                <a:ea typeface="Microsoft JhengHei" pitchFamily="34" charset="-122"/>
+                <a:cs typeface="Microsoft JhengHei" pitchFamily="34" charset="-120"/>
+              </a:rPr>
+              <a:t>素材下載後拖進對話即可，不需事先放進 OneDrive · 準備時間 約 6 分鐘</a:t>
+            </a:r>
+            <a:endParaRPr lang="en-US" sz="1300" dirty="0"/>
+          </a:p>
+        </p:txBody>
+      </p:sp>
+      <p:sp>
+        <p:nvSpPr>
+          <p:cNvPr id="6" name="Shape 4"/>
+          <p:cNvSpPr/>
+          <p:nvPr/>
+        </p:nvSpPr>
+        <p:spPr>
+          <a:xfrm>
+            <a:off x="640080" y="1874520"/>
+            <a:ext cx="5272888" cy="914400"/>
+          </a:xfrm>
+          <a:prstGeom prst="rect">
+            <a:avLst/>
+          </a:prstGeom>
+          <a:solidFill>
+            <a:srgbClr val="FFFFFF"/>
+          </a:solidFill>
+          <a:ln w="12700">
+            <a:solidFill>
+              <a:srgbClr val="E4E7F2"/>
+            </a:solidFill>
+            <a:prstDash val="solid"/>
+          </a:ln>
+        </p:spPr>
+      </p:sp>
+      <p:sp>
+        <p:nvSpPr>
+          <p:cNvPr id="7" name="Shape 5"/>
+          <p:cNvSpPr/>
+          <p:nvPr/>
+        </p:nvSpPr>
+        <p:spPr>
+          <a:xfrm>
+            <a:off x="640080" y="1874520"/>
+            <a:ext cx="68580" cy="914400"/>
+          </a:xfrm>
+          <a:prstGeom prst="rect">
+            <a:avLst/>
+          </a:prstGeom>
+          <a:solidFill>
+            <a:srgbClr val="6366F1"/>
+          </a:solidFill>
+          <a:ln/>
+        </p:spPr>
+      </p:sp>
+      <p:sp>
+        <p:nvSpPr>
+          <p:cNvPr id="8" name="Text 6"/>
+          <p:cNvSpPr/>
+          <p:nvPr/>
+        </p:nvSpPr>
+        <p:spPr>
+          <a:xfrm>
+            <a:off x="804672" y="1929384"/>
+            <a:ext cx="411480" cy="329184"/>
+          </a:xfrm>
+          <a:prstGeom prst="rect">
+            <a:avLst/>
+          </a:prstGeom>
+          <a:noFill/>
+          <a:ln/>
+        </p:spPr>
+        <p:txBody>
+          <a:bodyPr wrap="square" rtlCol="0" anchor="ctr"/>
+          <a:lstStyle/>
+          <a:p>
+            <a:pPr algn="ctr" indent="0" marL="0">
+              <a:buNone/>
+            </a:pPr>
+            <a:r>
+              <a:rPr lang="en-US" sz="1500" dirty="0">
+                <a:solidFill>
+                  <a:srgbClr val="000000"/>
+                </a:solidFill>
+                <a:latin typeface="Microsoft JhengHei" pitchFamily="34" charset="0"/>
+                <a:ea typeface="Microsoft JhengHei" pitchFamily="34" charset="-122"/>
+                <a:cs typeface="Microsoft JhengHei" pitchFamily="34" charset="-120"/>
+              </a:rPr>
+              <a:t>📥</a:t>
+            </a:r>
+            <a:endParaRPr lang="en-US" sz="1500" dirty="0"/>
+          </a:p>
+        </p:txBody>
+      </p:sp>
+      <p:sp>
+        <p:nvSpPr>
+          <p:cNvPr id="9" name="Text 7"/>
+          <p:cNvSpPr/>
+          <p:nvPr/>
+        </p:nvSpPr>
+        <p:spPr>
+          <a:xfrm>
+            <a:off x="1243584" y="1920240"/>
+            <a:ext cx="4495648" cy="292608"/>
+          </a:xfrm>
+          <a:prstGeom prst="rect">
+            <a:avLst/>
+          </a:prstGeom>
+          <a:noFill/>
+          <a:ln/>
+        </p:spPr>
+        <p:txBody>
+          <a:bodyPr wrap="square" rtlCol="0" anchor="ctr"/>
+          <a:lstStyle/>
+          <a:p>
+            <a:pPr indent="0" marL="0">
+              <a:buNone/>
+            </a:pPr>
+            <a:r>
+              <a:rPr lang="en-US" sz="1250" b="1" dirty="0">
+                <a:solidFill>
+                  <a:srgbClr val="1E2235"/>
+                </a:solidFill>
+                <a:latin typeface="Microsoft JhengHei" pitchFamily="34" charset="0"/>
+                <a:ea typeface="Microsoft JhengHei" pitchFamily="34" charset="-122"/>
+                <a:cs typeface="Microsoft JhengHei" pitchFamily="34" charset="-120"/>
+              </a:rPr>
+              <a:t>下載範例檔</a:t>
+            </a:r>
+            <a:endParaRPr lang="en-US" sz="1250" dirty="0"/>
+          </a:p>
+        </p:txBody>
+      </p:sp>
+      <p:sp>
+        <p:nvSpPr>
+          <p:cNvPr id="10" name="Text 8"/>
+          <p:cNvSpPr/>
+          <p:nvPr/>
+        </p:nvSpPr>
+        <p:spPr>
+          <a:xfrm>
+            <a:off x="1243584" y="2194560"/>
+            <a:ext cx="4495648" cy="548640"/>
+          </a:xfrm>
+          <a:prstGeom prst="rect">
+            <a:avLst/>
+          </a:prstGeom>
+          <a:noFill/>
+          <a:ln/>
+        </p:spPr>
+        <p:txBody>
+          <a:bodyPr wrap="square" rtlCol="0" anchor="ctr"/>
+          <a:lstStyle/>
+          <a:p>
+            <a:pPr indent="0" marL="0">
+              <a:lnSpc>
+                <a:spcPct val="112000"/>
+              </a:lnSpc>
+              <a:buNone/>
+            </a:pPr>
+            <a:r>
+              <a:rPr lang="en-US" sz="1050" dirty="0">
+                <a:solidFill>
+                  <a:srgbClr val="5B6079"/>
+                </a:solidFill>
+                <a:latin typeface="Microsoft JhengHei" pitchFamily="34" charset="0"/>
+                <a:ea typeface="Microsoft JhengHei" pitchFamily="34" charset="-122"/>
+                <a:cs typeface="Microsoft JhengHei" pitchFamily="34" charset="-120"/>
+              </a:rPr>
+              <a:t>每個情境的〈參考檔案〉區都有下載連結，點了就存到你的電腦。</a:t>
+            </a:r>
+            <a:endParaRPr lang="en-US" sz="1050" dirty="0"/>
+          </a:p>
+        </p:txBody>
+      </p:sp>
+      <p:sp>
+        <p:nvSpPr>
+          <p:cNvPr id="11" name="Shape 9"/>
+          <p:cNvSpPr/>
+          <p:nvPr/>
+        </p:nvSpPr>
+        <p:spPr>
+          <a:xfrm>
+            <a:off x="6278728" y="1874520"/>
+            <a:ext cx="5272888" cy="914400"/>
+          </a:xfrm>
+          <a:prstGeom prst="rect">
+            <a:avLst/>
+          </a:prstGeom>
+          <a:solidFill>
+            <a:srgbClr val="FFFFFF"/>
+          </a:solidFill>
+          <a:ln w="12700">
+            <a:solidFill>
+              <a:srgbClr val="E4E7F2"/>
+            </a:solidFill>
+            <a:prstDash val="solid"/>
+          </a:ln>
+        </p:spPr>
+      </p:sp>
+      <p:sp>
+        <p:nvSpPr>
+          <p:cNvPr id="12" name="Shape 10"/>
+          <p:cNvSpPr/>
+          <p:nvPr/>
+        </p:nvSpPr>
+        <p:spPr>
+          <a:xfrm>
+            <a:off x="6278728" y="1874520"/>
+            <a:ext cx="68580" cy="914400"/>
+          </a:xfrm>
+          <a:prstGeom prst="rect">
+            <a:avLst/>
+          </a:prstGeom>
+          <a:solidFill>
+            <a:srgbClr val="6366F1"/>
+          </a:solidFill>
+          <a:ln/>
+        </p:spPr>
+      </p:sp>
+      <p:sp>
+        <p:nvSpPr>
+          <p:cNvPr id="13" name="Text 11"/>
+          <p:cNvSpPr/>
+          <p:nvPr/>
+        </p:nvSpPr>
+        <p:spPr>
+          <a:xfrm>
+            <a:off x="6443320" y="1929384"/>
+            <a:ext cx="411480" cy="329184"/>
+          </a:xfrm>
+          <a:prstGeom prst="rect">
+            <a:avLst/>
+          </a:prstGeom>
+          <a:noFill/>
+          <a:ln/>
+        </p:spPr>
+        <p:txBody>
+          <a:bodyPr wrap="square" rtlCol="0" anchor="ctr"/>
+          <a:lstStyle/>
+          <a:p>
+            <a:pPr algn="ctr" indent="0" marL="0">
+              <a:buNone/>
+            </a:pPr>
+            <a:r>
+              <a:rPr lang="en-US" sz="1500" dirty="0">
+                <a:solidFill>
+                  <a:srgbClr val="000000"/>
+                </a:solidFill>
+                <a:latin typeface="Microsoft JhengHei" pitchFamily="34" charset="0"/>
+                <a:ea typeface="Microsoft JhengHei" pitchFamily="34" charset="-122"/>
+                <a:cs typeface="Microsoft JhengHei" pitchFamily="34" charset="-120"/>
+              </a:rPr>
+              <a:t>🔬</a:t>
+            </a:r>
+            <a:endParaRPr lang="en-US" sz="1500" dirty="0"/>
+          </a:p>
+        </p:txBody>
+      </p:sp>
+      <p:sp>
+        <p:nvSpPr>
+          <p:cNvPr id="14" name="Text 12"/>
+          <p:cNvSpPr/>
+          <p:nvPr/>
+        </p:nvSpPr>
+        <p:spPr>
+          <a:xfrm>
+            <a:off x="6882232" y="1920240"/>
+            <a:ext cx="4495648" cy="292608"/>
+          </a:xfrm>
+          <a:prstGeom prst="rect">
+            <a:avLst/>
+          </a:prstGeom>
+          <a:noFill/>
+          <a:ln/>
+        </p:spPr>
+        <p:txBody>
+          <a:bodyPr wrap="square" rtlCol="0" anchor="ctr"/>
+          <a:lstStyle/>
+          <a:p>
+            <a:pPr indent="0" marL="0">
+              <a:buNone/>
+            </a:pPr>
+            <a:r>
+              <a:rPr lang="en-US" sz="1250" b="1" dirty="0">
+                <a:solidFill>
+                  <a:srgbClr val="1E2235"/>
+                </a:solidFill>
+                <a:latin typeface="Microsoft JhengHei" pitchFamily="34" charset="0"/>
+                <a:ea typeface="Microsoft JhengHei" pitchFamily="34" charset="-122"/>
+                <a:cs typeface="Microsoft JhengHei" pitchFamily="34" charset="-120"/>
+              </a:rPr>
+              <a:t>⚠️ Deep Research 很慢也很貴，示範前先試跑</a:t>
+            </a:r>
+            <a:endParaRPr lang="en-US" sz="1250" dirty="0"/>
+          </a:p>
+        </p:txBody>
+      </p:sp>
+      <p:sp>
+        <p:nvSpPr>
+          <p:cNvPr id="15" name="Text 13"/>
+          <p:cNvSpPr/>
+          <p:nvPr/>
+        </p:nvSpPr>
+        <p:spPr>
+          <a:xfrm>
+            <a:off x="6882232" y="2194560"/>
+            <a:ext cx="4495648" cy="548640"/>
+          </a:xfrm>
+          <a:prstGeom prst="rect">
+            <a:avLst/>
+          </a:prstGeom>
+          <a:noFill/>
+          <a:ln/>
+        </p:spPr>
+        <p:txBody>
+          <a:bodyPr wrap="square" rtlCol="0" anchor="ctr"/>
+          <a:lstStyle/>
+          <a:p>
+            <a:pPr indent="0" marL="0">
+              <a:lnSpc>
+                <a:spcPct val="112000"/>
+              </a:lnSpc>
+              <a:buNone/>
+            </a:pPr>
+            <a:r>
+              <a:rPr lang="en-US" sz="1050" dirty="0">
+                <a:solidFill>
+                  <a:srgbClr val="5B6079"/>
+                </a:solidFill>
+                <a:latin typeface="Microsoft JhengHei" pitchFamily="34" charset="0"/>
+                <a:ea typeface="Microsoft JhengHei" pitchFamily="34" charset="-122"/>
+                <a:cs typeface="Microsoft JhengHei" pitchFamily="34" charset="-120"/>
+              </a:rPr>
+              <a:t>有情境會用到 Deep Research。</a:t>
+            </a:r>
+            <a:endParaRPr lang="en-US" sz="1050" dirty="0"/>
+          </a:p>
+        </p:txBody>
+      </p:sp>
+      <p:sp>
+        <p:nvSpPr>
+          <p:cNvPr id="16" name="Shape 14"/>
+          <p:cNvSpPr/>
+          <p:nvPr/>
+        </p:nvSpPr>
+        <p:spPr>
+          <a:xfrm>
+            <a:off x="640080" y="2916936"/>
+            <a:ext cx="5272888" cy="914400"/>
+          </a:xfrm>
+          <a:prstGeom prst="rect">
+            <a:avLst/>
+          </a:prstGeom>
+          <a:solidFill>
+            <a:srgbClr val="FFFFFF"/>
+          </a:solidFill>
+          <a:ln w="12700">
+            <a:solidFill>
+              <a:srgbClr val="E4E7F2"/>
+            </a:solidFill>
+            <a:prstDash val="solid"/>
+          </a:ln>
+        </p:spPr>
+      </p:sp>
+      <p:sp>
+        <p:nvSpPr>
+          <p:cNvPr id="17" name="Shape 15"/>
+          <p:cNvSpPr/>
+          <p:nvPr/>
+        </p:nvSpPr>
+        <p:spPr>
+          <a:xfrm>
+            <a:off x="640080" y="2916936"/>
+            <a:ext cx="68580" cy="914400"/>
+          </a:xfrm>
+          <a:prstGeom prst="rect">
+            <a:avLst/>
+          </a:prstGeom>
+          <a:solidFill>
+            <a:srgbClr val="6366F1"/>
+          </a:solidFill>
+          <a:ln/>
+        </p:spPr>
+      </p:sp>
+      <p:sp>
+        <p:nvSpPr>
+          <p:cNvPr id="18" name="Text 16"/>
+          <p:cNvSpPr/>
+          <p:nvPr/>
+        </p:nvSpPr>
+        <p:spPr>
+          <a:xfrm>
+            <a:off x="804672" y="2971800"/>
+            <a:ext cx="411480" cy="329184"/>
+          </a:xfrm>
+          <a:prstGeom prst="rect">
+            <a:avLst/>
+          </a:prstGeom>
+          <a:noFill/>
+          <a:ln/>
+        </p:spPr>
+        <p:txBody>
+          <a:bodyPr wrap="square" rtlCol="0" anchor="ctr"/>
+          <a:lstStyle/>
+          <a:p>
+            <a:pPr algn="ctr" indent="0" marL="0">
+              <a:buNone/>
+            </a:pPr>
+            <a:r>
+              <a:rPr lang="en-US" sz="1500" dirty="0">
+                <a:solidFill>
+                  <a:srgbClr val="000000"/>
+                </a:solidFill>
+                <a:latin typeface="Microsoft JhengHei" pitchFamily="34" charset="0"/>
+                <a:ea typeface="Microsoft JhengHei" pitchFamily="34" charset="-122"/>
+                <a:cs typeface="Microsoft JhengHei" pitchFamily="34" charset="-120"/>
+              </a:rPr>
+              <a:t>📧</a:t>
+            </a:r>
+            <a:endParaRPr lang="en-US" sz="1500" dirty="0"/>
+          </a:p>
+        </p:txBody>
+      </p:sp>
+      <p:sp>
+        <p:nvSpPr>
+          <p:cNvPr id="19" name="Text 17"/>
+          <p:cNvSpPr/>
+          <p:nvPr/>
+        </p:nvSpPr>
+        <p:spPr>
+          <a:xfrm>
+            <a:off x="1243584" y="2962656"/>
+            <a:ext cx="4495648" cy="292608"/>
+          </a:xfrm>
+          <a:prstGeom prst="rect">
+            <a:avLst/>
+          </a:prstGeom>
+          <a:noFill/>
+          <a:ln/>
+        </p:spPr>
+        <p:txBody>
+          <a:bodyPr wrap="square" rtlCol="0" anchor="ctr"/>
+          <a:lstStyle/>
+          <a:p>
+            <a:pPr indent="0" marL="0">
+              <a:buNone/>
+            </a:pPr>
+            <a:r>
+              <a:rPr lang="en-US" sz="1250" b="1" dirty="0">
+                <a:solidFill>
+                  <a:srgbClr val="1E2235"/>
+                </a:solidFill>
+                <a:latin typeface="Microsoft JhengHei" pitchFamily="34" charset="0"/>
+                <a:ea typeface="Microsoft JhengHei" pitchFamily="34" charset="-122"/>
+                <a:cs typeface="Microsoft JhengHei" pitchFamily="34" charset="-120"/>
+              </a:rPr>
+              <a:t>信箱：它會建立草稿，不會擅自寄出</a:t>
+            </a:r>
+            <a:endParaRPr lang="en-US" sz="1250" dirty="0"/>
+          </a:p>
+        </p:txBody>
+      </p:sp>
+      <p:sp>
+        <p:nvSpPr>
+          <p:cNvPr id="20" name="Text 18"/>
+          <p:cNvSpPr/>
+          <p:nvPr/>
+        </p:nvSpPr>
+        <p:spPr>
+          <a:xfrm>
+            <a:off x="1243584" y="3236976"/>
+            <a:ext cx="4495648" cy="548640"/>
+          </a:xfrm>
+          <a:prstGeom prst="rect">
+            <a:avLst/>
+          </a:prstGeom>
+          <a:noFill/>
+          <a:ln/>
+        </p:spPr>
+        <p:txBody>
+          <a:bodyPr wrap="square" rtlCol="0" anchor="ctr"/>
+          <a:lstStyle/>
+          <a:p>
+            <a:pPr indent="0" marL="0">
+              <a:lnSpc>
+                <a:spcPct val="112000"/>
+              </a:lnSpc>
+              <a:buNone/>
+            </a:pPr>
+            <a:r>
+              <a:rPr lang="en-US" sz="1050" dirty="0">
+                <a:solidFill>
+                  <a:srgbClr val="5B6079"/>
+                </a:solidFill>
+                <a:latin typeface="Microsoft JhengHei" pitchFamily="34" charset="0"/>
+                <a:ea typeface="Microsoft JhengHei" pitchFamily="34" charset="-122"/>
+                <a:cs typeface="Microsoft JhengHei" pitchFamily="34" charset="-120"/>
+              </a:rPr>
+              <a:t>有幾個情境會請 Cowork 草擬信件。</a:t>
+            </a:r>
+            <a:endParaRPr lang="en-US" sz="1050" dirty="0"/>
+          </a:p>
+        </p:txBody>
+      </p:sp>
+      <p:sp>
+        <p:nvSpPr>
+          <p:cNvPr id="21" name="Shape 19"/>
+          <p:cNvSpPr/>
+          <p:nvPr/>
+        </p:nvSpPr>
+        <p:spPr>
+          <a:xfrm>
+            <a:off x="6278728" y="2916936"/>
+            <a:ext cx="5272888" cy="914400"/>
+          </a:xfrm>
+          <a:prstGeom prst="rect">
+            <a:avLst/>
+          </a:prstGeom>
+          <a:solidFill>
+            <a:srgbClr val="FFFFFF"/>
+          </a:solidFill>
+          <a:ln w="12700">
+            <a:solidFill>
+              <a:srgbClr val="E4E7F2"/>
+            </a:solidFill>
+            <a:prstDash val="solid"/>
+          </a:ln>
+        </p:spPr>
+      </p:sp>
+      <p:sp>
+        <p:nvSpPr>
+          <p:cNvPr id="22" name="Shape 20"/>
+          <p:cNvSpPr/>
+          <p:nvPr/>
+        </p:nvSpPr>
+        <p:spPr>
+          <a:xfrm>
+            <a:off x="6278728" y="2916936"/>
+            <a:ext cx="68580" cy="914400"/>
+          </a:xfrm>
+          <a:prstGeom prst="rect">
+            <a:avLst/>
+          </a:prstGeom>
+          <a:solidFill>
+            <a:srgbClr val="6366F1"/>
+          </a:solidFill>
+          <a:ln/>
+        </p:spPr>
+      </p:sp>
+      <p:sp>
+        <p:nvSpPr>
+          <p:cNvPr id="23" name="Text 21"/>
+          <p:cNvSpPr/>
+          <p:nvPr/>
+        </p:nvSpPr>
+        <p:spPr>
+          <a:xfrm>
+            <a:off x="6443320" y="2971800"/>
+            <a:ext cx="411480" cy="329184"/>
+          </a:xfrm>
+          <a:prstGeom prst="rect">
+            <a:avLst/>
+          </a:prstGeom>
+          <a:noFill/>
+          <a:ln/>
+        </p:spPr>
+        <p:txBody>
+          <a:bodyPr wrap="square" rtlCol="0" anchor="ctr"/>
+          <a:lstStyle/>
+          <a:p>
+            <a:pPr algn="ctr" indent="0" marL="0">
+              <a:buNone/>
+            </a:pPr>
+            <a:r>
+              <a:rPr lang="en-US" sz="1500" dirty="0">
+                <a:solidFill>
+                  <a:srgbClr val="000000"/>
+                </a:solidFill>
+                <a:latin typeface="Microsoft JhengHei" pitchFamily="34" charset="0"/>
+                <a:ea typeface="Microsoft JhengHei" pitchFamily="34" charset="-122"/>
+                <a:cs typeface="Microsoft JhengHei" pitchFamily="34" charset="-120"/>
+              </a:rPr>
+              <a:t>💬</a:t>
+            </a:r>
+            <a:endParaRPr lang="en-US" sz="1500" dirty="0"/>
+          </a:p>
+        </p:txBody>
+      </p:sp>
+      <p:sp>
+        <p:nvSpPr>
+          <p:cNvPr id="24" name="Text 22"/>
+          <p:cNvSpPr/>
+          <p:nvPr/>
+        </p:nvSpPr>
+        <p:spPr>
+          <a:xfrm>
+            <a:off x="6882232" y="2962656"/>
+            <a:ext cx="4495648" cy="292608"/>
+          </a:xfrm>
+          <a:prstGeom prst="rect">
+            <a:avLst/>
+          </a:prstGeom>
+          <a:noFill/>
+          <a:ln/>
+        </p:spPr>
+        <p:txBody>
+          <a:bodyPr wrap="square" rtlCol="0" anchor="ctr"/>
+          <a:lstStyle/>
+          <a:p>
+            <a:pPr indent="0" marL="0">
+              <a:buNone/>
+            </a:pPr>
+            <a:r>
+              <a:rPr lang="en-US" sz="1250" b="1" dirty="0">
+                <a:solidFill>
+                  <a:srgbClr val="1E2235"/>
+                </a:solidFill>
+                <a:latin typeface="Microsoft JhengHei" pitchFamily="34" charset="0"/>
+                <a:ea typeface="Microsoft JhengHei" pitchFamily="34" charset="-122"/>
+                <a:cs typeface="Microsoft JhengHei" pitchFamily="34" charset="-120"/>
+              </a:rPr>
+              <a:t>Teams：先想好要貼到哪裡</a:t>
+            </a:r>
+            <a:endParaRPr lang="en-US" sz="1250" dirty="0"/>
+          </a:p>
+        </p:txBody>
+      </p:sp>
+      <p:sp>
+        <p:nvSpPr>
+          <p:cNvPr id="25" name="Text 23"/>
+          <p:cNvSpPr/>
+          <p:nvPr/>
+        </p:nvSpPr>
+        <p:spPr>
+          <a:xfrm>
+            <a:off x="6882232" y="3236976"/>
+            <a:ext cx="4495648" cy="548640"/>
+          </a:xfrm>
+          <a:prstGeom prst="rect">
+            <a:avLst/>
+          </a:prstGeom>
+          <a:noFill/>
+          <a:ln/>
+        </p:spPr>
+        <p:txBody>
+          <a:bodyPr wrap="square" rtlCol="0" anchor="ctr"/>
+          <a:lstStyle/>
+          <a:p>
+            <a:pPr indent="0" marL="0">
+              <a:lnSpc>
+                <a:spcPct val="112000"/>
+              </a:lnSpc>
+              <a:buNone/>
+            </a:pPr>
+            <a:r>
+              <a:rPr lang="en-US" sz="1050" dirty="0">
+                <a:solidFill>
+                  <a:srgbClr val="5B6079"/>
+                </a:solidFill>
+                <a:latin typeface="Microsoft JhengHei" pitchFamily="34" charset="0"/>
+                <a:ea typeface="Microsoft JhengHei" pitchFamily="34" charset="-122"/>
+                <a:cs typeface="Microsoft JhengHei" pitchFamily="34" charset="-120"/>
+              </a:rPr>
+              <a:t>有情境會請 Cowork 張貼 Teams 訊息。</a:t>
+            </a:r>
+            <a:endParaRPr lang="en-US" sz="1050" dirty="0"/>
+          </a:p>
+        </p:txBody>
+      </p:sp>
+      <p:sp>
+        <p:nvSpPr>
+          <p:cNvPr id="26" name="Shape 24"/>
+          <p:cNvSpPr/>
+          <p:nvPr/>
+        </p:nvSpPr>
+        <p:spPr>
+          <a:xfrm>
+            <a:off x="640080" y="3959352"/>
+            <a:ext cx="5272888" cy="914400"/>
+          </a:xfrm>
+          <a:prstGeom prst="rect">
+            <a:avLst/>
+          </a:prstGeom>
+          <a:solidFill>
+            <a:srgbClr val="FFFFFF"/>
+          </a:solidFill>
+          <a:ln w="12700">
+            <a:solidFill>
+              <a:srgbClr val="E4E7F2"/>
+            </a:solidFill>
+            <a:prstDash val="solid"/>
+          </a:ln>
+        </p:spPr>
+      </p:sp>
+      <p:sp>
+        <p:nvSpPr>
+          <p:cNvPr id="27" name="Shape 25"/>
+          <p:cNvSpPr/>
+          <p:nvPr/>
+        </p:nvSpPr>
+        <p:spPr>
+          <a:xfrm>
+            <a:off x="640080" y="3959352"/>
+            <a:ext cx="68580" cy="914400"/>
+          </a:xfrm>
+          <a:prstGeom prst="rect">
+            <a:avLst/>
+          </a:prstGeom>
+          <a:solidFill>
+            <a:srgbClr val="6366F1"/>
+          </a:solidFill>
+          <a:ln/>
+        </p:spPr>
+      </p:sp>
+      <p:sp>
+        <p:nvSpPr>
+          <p:cNvPr id="28" name="Text 26"/>
+          <p:cNvSpPr/>
+          <p:nvPr/>
+        </p:nvSpPr>
+        <p:spPr>
+          <a:xfrm>
+            <a:off x="804672" y="4014216"/>
+            <a:ext cx="411480" cy="329184"/>
+          </a:xfrm>
+          <a:prstGeom prst="rect">
+            <a:avLst/>
+          </a:prstGeom>
+          <a:noFill/>
+          <a:ln/>
+        </p:spPr>
+        <p:txBody>
+          <a:bodyPr wrap="square" rtlCol="0" anchor="ctr"/>
+          <a:lstStyle/>
+          <a:p>
+            <a:pPr algn="ctr" indent="0" marL="0">
+              <a:buNone/>
+            </a:pPr>
+            <a:r>
+              <a:rPr lang="en-US" sz="1500" dirty="0">
+                <a:solidFill>
+                  <a:srgbClr val="000000"/>
+                </a:solidFill>
+                <a:latin typeface="Microsoft JhengHei" pitchFamily="34" charset="0"/>
+                <a:ea typeface="Microsoft JhengHei" pitchFamily="34" charset="-122"/>
+                <a:cs typeface="Microsoft JhengHei" pitchFamily="34" charset="-120"/>
+              </a:rPr>
+              <a:t>📁</a:t>
+            </a:r>
+            <a:endParaRPr lang="en-US" sz="1500" dirty="0"/>
+          </a:p>
+        </p:txBody>
+      </p:sp>
+      <p:sp>
+        <p:nvSpPr>
+          <p:cNvPr id="29" name="Text 27"/>
+          <p:cNvSpPr/>
+          <p:nvPr/>
+        </p:nvSpPr>
+        <p:spPr>
+          <a:xfrm>
+            <a:off x="1243584" y="4005072"/>
+            <a:ext cx="4495648" cy="292608"/>
+          </a:xfrm>
+          <a:prstGeom prst="rect">
+            <a:avLst/>
+          </a:prstGeom>
+          <a:noFill/>
+          <a:ln/>
+        </p:spPr>
+        <p:txBody>
+          <a:bodyPr wrap="square" rtlCol="0" anchor="ctr"/>
+          <a:lstStyle/>
+          <a:p>
+            <a:pPr indent="0" marL="0">
+              <a:buNone/>
+            </a:pPr>
+            <a:r>
+              <a:rPr lang="en-US" sz="1250" b="1" dirty="0">
+                <a:solidFill>
+                  <a:srgbClr val="1E2235"/>
+                </a:solidFill>
+                <a:latin typeface="Microsoft JhengHei" pitchFamily="34" charset="0"/>
+                <a:ea typeface="Microsoft JhengHei" pitchFamily="34" charset="-122"/>
+                <a:cs typeface="Microsoft JhengHei" pitchFamily="34" charset="-120"/>
+              </a:rPr>
+              <a:t>產出會存到你的 OneDrive</a:t>
+            </a:r>
+            <a:endParaRPr lang="en-US" sz="1250" dirty="0"/>
+          </a:p>
+        </p:txBody>
+      </p:sp>
+      <p:sp>
+        <p:nvSpPr>
+          <p:cNvPr id="30" name="Text 28"/>
+          <p:cNvSpPr/>
+          <p:nvPr/>
+        </p:nvSpPr>
+        <p:spPr>
+          <a:xfrm>
+            <a:off x="1243584" y="4279392"/>
+            <a:ext cx="4495648" cy="548640"/>
+          </a:xfrm>
+          <a:prstGeom prst="rect">
+            <a:avLst/>
+          </a:prstGeom>
+          <a:noFill/>
+          <a:ln/>
+        </p:spPr>
+        <p:txBody>
+          <a:bodyPr wrap="square" rtlCol="0" anchor="ctr"/>
+          <a:lstStyle/>
+          <a:p>
+            <a:pPr indent="0" marL="0">
+              <a:lnSpc>
+                <a:spcPct val="112000"/>
+              </a:lnSpc>
+              <a:buNone/>
+            </a:pPr>
+            <a:r>
+              <a:rPr lang="en-US" sz="1050" dirty="0">
+                <a:solidFill>
+                  <a:srgbClr val="5B6079"/>
+                </a:solidFill>
+                <a:latin typeface="Microsoft JhengHei" pitchFamily="34" charset="0"/>
+                <a:ea typeface="Microsoft JhengHei" pitchFamily="34" charset="-122"/>
+                <a:cs typeface="Microsoft JhengHei" pitchFamily="34" charset="-120"/>
+              </a:rPr>
+              <a:t>Cowork 產生的檔案會存進你自己的 OneDrive，也可以在對話右側的側邊欄直接預覽或下載。</a:t>
+            </a:r>
+            <a:endParaRPr lang="en-US" sz="1050" dirty="0"/>
+          </a:p>
+        </p:txBody>
+      </p:sp>
+      <p:sp>
+        <p:nvSpPr>
+          <p:cNvPr id="31" name="Shape 29"/>
+          <p:cNvSpPr/>
+          <p:nvPr/>
+        </p:nvSpPr>
+        <p:spPr>
+          <a:xfrm>
+            <a:off x="6278728" y="3959352"/>
+            <a:ext cx="5272888" cy="914400"/>
+          </a:xfrm>
+          <a:prstGeom prst="rect">
+            <a:avLst/>
+          </a:prstGeom>
+          <a:solidFill>
+            <a:srgbClr val="FFFFFF"/>
+          </a:solidFill>
+          <a:ln w="12700">
+            <a:solidFill>
+              <a:srgbClr val="E4E7F2"/>
+            </a:solidFill>
+            <a:prstDash val="solid"/>
+          </a:ln>
+        </p:spPr>
+      </p:sp>
+      <p:sp>
+        <p:nvSpPr>
+          <p:cNvPr id="32" name="Shape 30"/>
+          <p:cNvSpPr/>
+          <p:nvPr/>
+        </p:nvSpPr>
+        <p:spPr>
+          <a:xfrm>
+            <a:off x="6278728" y="3959352"/>
+            <a:ext cx="68580" cy="914400"/>
+          </a:xfrm>
+          <a:prstGeom prst="rect">
+            <a:avLst/>
+          </a:prstGeom>
+          <a:solidFill>
+            <a:srgbClr val="6366F1"/>
+          </a:solidFill>
+          <a:ln/>
+        </p:spPr>
+      </p:sp>
+      <p:sp>
+        <p:nvSpPr>
+          <p:cNvPr id="33" name="Text 31"/>
+          <p:cNvSpPr/>
+          <p:nvPr/>
+        </p:nvSpPr>
+        <p:spPr>
+          <a:xfrm>
+            <a:off x="6443320" y="4014216"/>
+            <a:ext cx="411480" cy="329184"/>
+          </a:xfrm>
+          <a:prstGeom prst="rect">
+            <a:avLst/>
+          </a:prstGeom>
+          <a:noFill/>
+          <a:ln/>
+        </p:spPr>
+        <p:txBody>
+          <a:bodyPr wrap="square" rtlCol="0" anchor="ctr"/>
+          <a:lstStyle/>
+          <a:p>
+            <a:pPr algn="ctr" indent="0" marL="0">
+              <a:buNone/>
+            </a:pPr>
+            <a:r>
+              <a:rPr lang="en-US" sz="1500" dirty="0">
+                <a:solidFill>
+                  <a:srgbClr val="000000"/>
+                </a:solidFill>
+                <a:latin typeface="Microsoft JhengHei" pitchFamily="34" charset="0"/>
+                <a:ea typeface="Microsoft JhengHei" pitchFamily="34" charset="-122"/>
+                <a:cs typeface="Microsoft JhengHei" pitchFamily="34" charset="-120"/>
+              </a:rPr>
+              <a:t>🧩</a:t>
+            </a:r>
+            <a:endParaRPr lang="en-US" sz="1500" dirty="0"/>
+          </a:p>
+        </p:txBody>
+      </p:sp>
+      <p:sp>
+        <p:nvSpPr>
+          <p:cNvPr id="34" name="Text 32"/>
+          <p:cNvSpPr/>
+          <p:nvPr/>
+        </p:nvSpPr>
+        <p:spPr>
+          <a:xfrm>
+            <a:off x="6882232" y="4005072"/>
+            <a:ext cx="4495648" cy="292608"/>
+          </a:xfrm>
+          <a:prstGeom prst="rect">
+            <a:avLst/>
+          </a:prstGeom>
+          <a:noFill/>
+          <a:ln/>
+        </p:spPr>
+        <p:txBody>
+          <a:bodyPr wrap="square" rtlCol="0" anchor="ctr"/>
+          <a:lstStyle/>
+          <a:p>
+            <a:pPr indent="0" marL="0">
+              <a:buNone/>
+            </a:pPr>
+            <a:r>
+              <a:rPr lang="en-US" sz="1250" b="1" dirty="0">
+                <a:solidFill>
+                  <a:srgbClr val="1E2235"/>
+                </a:solidFill>
+                <a:latin typeface="Microsoft JhengHei" pitchFamily="34" charset="0"/>
+                <a:ea typeface="Microsoft JhengHei" pitchFamily="34" charset="-122"/>
+                <a:cs typeface="Microsoft JhengHei" pitchFamily="34" charset="-120"/>
+              </a:rPr>
+              <a:t>技能資料夾：現場建立，不要先放進去</a:t>
+            </a:r>
+            <a:endParaRPr lang="en-US" sz="1250" dirty="0"/>
+          </a:p>
+        </p:txBody>
+      </p:sp>
+      <p:sp>
+        <p:nvSpPr>
+          <p:cNvPr id="35" name="Text 33"/>
+          <p:cNvSpPr/>
+          <p:nvPr/>
+        </p:nvSpPr>
+        <p:spPr>
+          <a:xfrm>
+            <a:off x="6882232" y="4279392"/>
+            <a:ext cx="4495648" cy="548640"/>
+          </a:xfrm>
+          <a:prstGeom prst="rect">
+            <a:avLst/>
+          </a:prstGeom>
+          <a:noFill/>
+          <a:ln/>
+        </p:spPr>
+        <p:txBody>
+          <a:bodyPr wrap="square" rtlCol="0" anchor="ctr"/>
+          <a:lstStyle/>
+          <a:p>
+            <a:pPr indent="0" marL="0">
+              <a:lnSpc>
+                <a:spcPct val="112000"/>
+              </a:lnSpc>
+              <a:buNone/>
+            </a:pPr>
+            <a:r>
+              <a:rPr lang="en-US" sz="1050" dirty="0">
+                <a:solidFill>
+                  <a:srgbClr val="5B6079"/>
+                </a:solidFill>
+                <a:latin typeface="Microsoft JhengHei" pitchFamily="34" charset="0"/>
+                <a:ea typeface="Microsoft JhengHei" pitchFamily="34" charset="-122"/>
+                <a:cs typeface="Microsoft JhengHei" pitchFamily="34" charset="-120"/>
+              </a:rPr>
+              <a:t>有情境會示範現場建立自訂技能。</a:t>
+            </a:r>
+            <a:endParaRPr lang="en-US" sz="1050" dirty="0"/>
+          </a:p>
+        </p:txBody>
+      </p:sp>
+      <p:sp>
+        <p:nvSpPr>
+          <p:cNvPr id="36" name="Shape 34"/>
+          <p:cNvSpPr/>
+          <p:nvPr/>
+        </p:nvSpPr>
+        <p:spPr>
+          <a:xfrm>
+            <a:off x="640080" y="5532120"/>
+            <a:ext cx="10911535" cy="749808"/>
+          </a:xfrm>
+          <a:prstGeom prst="rect">
+            <a:avLst/>
+          </a:prstGeom>
+          <a:solidFill>
+            <a:srgbClr val="FFFFFF"/>
+          </a:solidFill>
+          <a:ln w="12700">
+            <a:solidFill>
+              <a:srgbClr val="E4E7F2"/>
+            </a:solidFill>
+            <a:prstDash val="solid"/>
+          </a:ln>
+        </p:spPr>
+      </p:sp>
+      <p:sp>
+        <p:nvSpPr>
+          <p:cNvPr id="37" name="Shape 35"/>
+          <p:cNvSpPr/>
+          <p:nvPr/>
+        </p:nvSpPr>
+        <p:spPr>
+          <a:xfrm>
+            <a:off x="640080" y="5532120"/>
+            <a:ext cx="91440" cy="749808"/>
+          </a:xfrm>
+          <a:prstGeom prst="rect">
+            <a:avLst/>
+          </a:prstGeom>
+          <a:solidFill>
+            <a:srgbClr val="6366F1"/>
+          </a:solidFill>
+          <a:ln/>
+        </p:spPr>
+      </p:sp>
+      <p:sp>
+        <p:nvSpPr>
+          <p:cNvPr id="38" name="Text 36"/>
+          <p:cNvSpPr/>
+          <p:nvPr/>
+        </p:nvSpPr>
+        <p:spPr>
+          <a:xfrm>
+            <a:off x="914400" y="5614416"/>
+            <a:ext cx="1828800" cy="274320"/>
+          </a:xfrm>
+          <a:prstGeom prst="rect">
+            <a:avLst/>
+          </a:prstGeom>
+          <a:noFill/>
+          <a:ln/>
+        </p:spPr>
+        <p:txBody>
+          <a:bodyPr wrap="square" rtlCol="0" anchor="ctr"/>
+          <a:lstStyle/>
+          <a:p>
+            <a:pPr indent="0" marL="0">
+              <a:buNone/>
+            </a:pPr>
+            <a:r>
+              <a:rPr lang="en-US" sz="1200" b="1" dirty="0">
+                <a:solidFill>
+                  <a:srgbClr val="1E2235"/>
+                </a:solidFill>
+                <a:latin typeface="Microsoft JhengHei" pitchFamily="34" charset="0"/>
+                <a:ea typeface="Microsoft JhengHei" pitchFamily="34" charset="-122"/>
+                <a:cs typeface="Microsoft JhengHei" pitchFamily="34" charset="-120"/>
+              </a:rPr>
+              <a:t>開課前最後檢查</a:t>
+            </a:r>
+            <a:endParaRPr lang="en-US" sz="1200" dirty="0"/>
+          </a:p>
+        </p:txBody>
+      </p:sp>
+      <p:pic>
+        <p:nvPicPr>
+          <p:cNvPr id="39" name="Image 0" descr="preencoded.png">    </p:cNvPr>
+          <p:cNvPicPr>
+            <a:picLocks noChangeAspect="1"/>
+          </p:cNvPicPr>
+          <p:nvPr/>
+        </p:nvPicPr>
+        <p:blipFill>
+          <a:blip r:embed="rId1"/>
+          <a:stretch>
+            <a:fillRect/>
+          </a:stretch>
+        </p:blipFill>
+        <p:spPr>
+          <a:xfrm>
+            <a:off x="2743200" y="5641848"/>
+            <a:ext cx="155448" cy="155448"/>
+          </a:xfrm>
+          <a:prstGeom prst="rect">
+            <a:avLst/>
+          </a:prstGeom>
+        </p:spPr>
+      </p:pic>
+      <p:sp>
+        <p:nvSpPr>
+          <p:cNvPr id="40" name="Text 37"/>
+          <p:cNvSpPr/>
+          <p:nvPr/>
+        </p:nvSpPr>
+        <p:spPr>
+          <a:xfrm>
+            <a:off x="2999232" y="5586984"/>
+            <a:ext cx="8259775" cy="237744"/>
+          </a:xfrm>
+          <a:prstGeom prst="rect">
+            <a:avLst/>
+          </a:prstGeom>
+          <a:noFill/>
+          <a:ln/>
+        </p:spPr>
+        <p:txBody>
+          <a:bodyPr wrap="square" rtlCol="0" anchor="ctr"/>
+          <a:lstStyle/>
+          <a:p>
+            <a:pPr indent="0" marL="0">
+              <a:buNone/>
+            </a:pPr>
+            <a:r>
+              <a:rPr lang="en-US" sz="1050" dirty="0">
+                <a:solidFill>
+                  <a:srgbClr val="1E2235"/>
+                </a:solidFill>
+                <a:latin typeface="Microsoft JhengHei" pitchFamily="34" charset="0"/>
+                <a:ea typeface="Microsoft JhengHei" pitchFamily="34" charset="-122"/>
+                <a:cs typeface="Microsoft JhengHei" pitchFamily="34" charset="-120"/>
+              </a:rPr>
+              <a:t>要練的情境，它的參考檔案都已下載到你的電腦</a:t>
+            </a:r>
+            <a:endParaRPr lang="en-US" sz="1050" dirty="0"/>
+          </a:p>
+        </p:txBody>
+      </p:sp>
+      <p:pic>
+        <p:nvPicPr>
+          <p:cNvPr id="41" name="Image 1" descr="preencoded.png">    </p:cNvPr>
+          <p:cNvPicPr>
+            <a:picLocks noChangeAspect="1"/>
+          </p:cNvPicPr>
+          <p:nvPr/>
+        </p:nvPicPr>
+        <p:blipFill>
+          <a:blip r:embed="rId2"/>
+          <a:stretch>
+            <a:fillRect/>
+          </a:stretch>
+        </p:blipFill>
+        <p:spPr>
+          <a:xfrm>
+            <a:off x="2743200" y="5852160"/>
+            <a:ext cx="155448" cy="155448"/>
+          </a:xfrm>
+          <a:prstGeom prst="rect">
+            <a:avLst/>
+          </a:prstGeom>
+        </p:spPr>
+      </p:pic>
+      <p:sp>
+        <p:nvSpPr>
+          <p:cNvPr id="42" name="Text 38"/>
+          <p:cNvSpPr/>
+          <p:nvPr/>
+        </p:nvSpPr>
+        <p:spPr>
+          <a:xfrm>
+            <a:off x="2999232" y="5797296"/>
+            <a:ext cx="8259775" cy="237744"/>
+          </a:xfrm>
+          <a:prstGeom prst="rect">
+            <a:avLst/>
+          </a:prstGeom>
+          <a:noFill/>
+          <a:ln/>
+        </p:spPr>
+        <p:txBody>
+          <a:bodyPr wrap="square" rtlCol="0" anchor="ctr"/>
+          <a:lstStyle/>
+          <a:p>
+            <a:pPr indent="0" marL="0">
+              <a:buNone/>
+            </a:pPr>
+            <a:r>
+              <a:rPr lang="en-US" sz="1050" dirty="0">
+                <a:solidFill>
+                  <a:srgbClr val="1E2235"/>
+                </a:solidFill>
+                <a:latin typeface="Microsoft JhengHei" pitchFamily="34" charset="0"/>
+                <a:ea typeface="Microsoft JhengHei" pitchFamily="34" charset="-122"/>
+                <a:cs typeface="Microsoft JhengHei" pitchFamily="34" charset="-120"/>
+              </a:rPr>
+              <a:t>清楚核准卡出現時要逐格檢查收件者，練習信不會寄給真實對象</a:t>
+            </a:r>
+            <a:endParaRPr lang="en-US" sz="1050" dirty="0"/>
+          </a:p>
+        </p:txBody>
+      </p:sp>
+      <p:pic>
+        <p:nvPicPr>
+          <p:cNvPr id="43" name="Image 2" descr="preencoded.png">    </p:cNvPr>
+          <p:cNvPicPr>
+            <a:picLocks noChangeAspect="1"/>
+          </p:cNvPicPr>
+          <p:nvPr/>
+        </p:nvPicPr>
+        <p:blipFill>
+          <a:blip r:embed="rId3"/>
+          <a:stretch>
+            <a:fillRect/>
+          </a:stretch>
+        </p:blipFill>
+        <p:spPr>
+          <a:xfrm>
+            <a:off x="2743200" y="6062472"/>
+            <a:ext cx="155448" cy="155448"/>
+          </a:xfrm>
+          <a:prstGeom prst="rect">
+            <a:avLst/>
+          </a:prstGeom>
+        </p:spPr>
+      </p:pic>
+      <p:sp>
+        <p:nvSpPr>
+          <p:cNvPr id="44" name="Text 39"/>
+          <p:cNvSpPr/>
+          <p:nvPr/>
+        </p:nvSpPr>
+        <p:spPr>
+          <a:xfrm>
+            <a:off x="2999232" y="6007608"/>
+            <a:ext cx="8259775" cy="237744"/>
+          </a:xfrm>
+          <a:prstGeom prst="rect">
+            <a:avLst/>
+          </a:prstGeom>
+          <a:noFill/>
+          <a:ln/>
+        </p:spPr>
+        <p:txBody>
+          <a:bodyPr wrap="square" rtlCol="0" anchor="ctr"/>
+          <a:lstStyle/>
+          <a:p>
+            <a:pPr indent="0" marL="0">
+              <a:buNone/>
+            </a:pPr>
+            <a:r>
+              <a:rPr lang="en-US" sz="1050" dirty="0">
+                <a:solidFill>
+                  <a:srgbClr val="1E2235"/>
+                </a:solidFill>
+                <a:latin typeface="Microsoft JhengHei" pitchFamily="34" charset="0"/>
+                <a:ea typeface="Microsoft JhengHei" pitchFamily="34" charset="-122"/>
+                <a:cs typeface="Microsoft JhengHei" pitchFamily="34" charset="-120"/>
+              </a:rPr>
+              <a:t>已選好一個測試用的 Teams 頻道或與自己的聊天，不是真的工作頻道</a:t>
+            </a:r>
+            <a:endParaRPr lang="en-US" sz="1050" dirty="0"/>
+          </a:p>
+        </p:txBody>
+      </p:sp>
+      <p:sp>
+        <p:nvSpPr>
+          <p:cNvPr id="45" name="Text 40"/>
+          <p:cNvSpPr/>
+          <p:nvPr/>
+        </p:nvSpPr>
+        <p:spPr>
+          <a:xfrm>
+            <a:off x="640080" y="6473952"/>
+            <a:ext cx="5486400" cy="274320"/>
+          </a:xfrm>
+          <a:prstGeom prst="rect">
+            <a:avLst/>
+          </a:prstGeom>
+          <a:noFill/>
+          <a:ln/>
+        </p:spPr>
+        <p:txBody>
+          <a:bodyPr wrap="square" rtlCol="0" anchor="ctr"/>
+          <a:lstStyle/>
+          <a:p>
+            <a:pPr algn="l" indent="0" marL="0">
+              <a:buNone/>
+            </a:pPr>
+            <a:r>
+              <a:rPr lang="en-US" sz="900" dirty="0">
+                <a:solidFill>
+                  <a:srgbClr val="5B6079"/>
+                </a:solidFill>
+                <a:latin typeface="Microsoft JhengHei" pitchFamily="34" charset="0"/>
+                <a:ea typeface="Microsoft JhengHei" pitchFamily="34" charset="-122"/>
+                <a:cs typeface="Microsoft JhengHei" pitchFamily="34" charset="-120"/>
+              </a:rPr>
+              <a:t>Microsoft 365 Copilot Cowork</a:t>
+            </a:r>
+            <a:endParaRPr lang="en-US" sz="900" dirty="0"/>
+          </a:p>
+        </p:txBody>
+      </p:sp>
+      <p:sp>
+        <p:nvSpPr>
+          <p:cNvPr id="46" name="Text 41"/>
+          <p:cNvSpPr/>
+          <p:nvPr/>
+        </p:nvSpPr>
+        <p:spPr>
+          <a:xfrm>
+            <a:off x="11002975" y="6473952"/>
+            <a:ext cx="548640" cy="274320"/>
+          </a:xfrm>
+          <a:prstGeom prst="rect">
+            <a:avLst/>
+          </a:prstGeom>
+          <a:noFill/>
+          <a:ln/>
+        </p:spPr>
+        <p:txBody>
+          <a:bodyPr wrap="square" rtlCol="0" anchor="ctr"/>
+          <a:lstStyle/>
+          <a:p>
+            <a:pPr algn="r" indent="0" marL="0">
+              <a:buNone/>
+            </a:pPr>
+            <a:r>
+              <a:rPr lang="en-US" sz="900" dirty="0">
+                <a:solidFill>
+                  <a:srgbClr val="5B6079"/>
+                </a:solidFill>
+                <a:latin typeface="Microsoft JhengHei" pitchFamily="34" charset="0"/>
+                <a:ea typeface="Microsoft JhengHei" pitchFamily="34" charset="-122"/>
+                <a:cs typeface="Microsoft JhengHei" pitchFamily="34" charset="-120"/>
+              </a:rPr>
+              <a:t>6</a:t>
+            </a:r>
+            <a:endParaRPr lang="en-US" sz="900" dirty="0"/>
+          </a:p>
+        </p:txBody>
+      </p:sp>
+    </p:spTree>
+  </p:cSld>
+  <p:clrMapOvr>
+    <a:masterClrMapping/>
+  </p:clrMapOvr>
+</p:sld>
+</file>
+
+<file path=ppt/slides/slide8.xml><?xml version="1.0" encoding="utf-8"?>
+<p:sld xmlns:a="http://schemas.openxmlformats.org/drawingml/2006/main" xmlns:r="http://schemas.openxmlformats.org/officeDocument/2006/relationships" xmlns:p="http://schemas.openxmlformats.org/presentationml/2006/main">
+  <p:cSld name="Slide 8">
+    <p:bg>
+      <p:bgPr>
+        <a:solidFill>
+          <a:srgbClr val="F7F8FC"/>
+        </a:solidFill>
+      </p:bgPr>
+    </p:bg>
+    <p:spTree>
+      <p:nvGrpSpPr>
+        <p:cNvPr id="1" name=""/>
+        <p:cNvGrpSpPr/>
+        <p:nvPr/>
+      </p:nvGrpSpPr>
+      <p:grpSpPr>
+        <a:xfrm>
+          <a:off x="0" y="0"/>
+          <a:ext cx="0" cy="0"/>
+          <a:chOff x="0" y="0"/>
+          <a:chExt cx="0" cy="0"/>
+        </a:xfrm>
+      </p:grpSpPr>
+      <p:sp>
+        <p:nvSpPr>
+          <p:cNvPr id="2" name="Shape 0"/>
+          <p:cNvSpPr/>
+          <p:nvPr/>
+        </p:nvSpPr>
+        <p:spPr>
+          <a:xfrm>
+            <a:off x="640080" y="566928"/>
+            <a:ext cx="384048" cy="128016"/>
+          </a:xfrm>
+          <a:prstGeom prst="rect">
+            <a:avLst/>
+          </a:prstGeom>
+          <a:solidFill>
+            <a:srgbClr val="6366F1"/>
+          </a:solidFill>
+          <a:ln/>
+        </p:spPr>
+      </p:sp>
+      <p:sp>
+        <p:nvSpPr>
+          <p:cNvPr id="3" name="Text 1"/>
+          <p:cNvSpPr/>
+          <p:nvPr/>
+        </p:nvSpPr>
+        <p:spPr>
+          <a:xfrm>
+            <a:off x="1143000" y="457200"/>
+            <a:ext cx="8229600" cy="310896"/>
+          </a:xfrm>
+          <a:prstGeom prst="rect">
+            <a:avLst/>
+          </a:prstGeom>
+          <a:noFill/>
+          <a:ln/>
+        </p:spPr>
+        <p:txBody>
+          <a:bodyPr wrap="square" rtlCol="0" anchor="ctr"/>
+          <a:lstStyle/>
+          <a:p>
+            <a:pPr indent="0" marL="0">
+              <a:buNone/>
+            </a:pPr>
+            <a:r>
+              <a:rPr lang="en-US" sz="1200" b="1" spc="200" kern="0" dirty="0">
+                <a:solidFill>
+                  <a:srgbClr val="6366F1"/>
+                </a:solidFill>
+                <a:latin typeface="Microsoft JhengHei" pitchFamily="34" charset="0"/>
+                <a:ea typeface="Microsoft JhengHei" pitchFamily="34" charset="-122"/>
+                <a:cs typeface="Microsoft JhengHei" pitchFamily="34" charset="-120"/>
+              </a:rPr>
               <a:t>5 SCENARIOS</a:t>
             </a:r>
             <a:endParaRPr lang="en-US" sz="1200" dirty="0"/>
@@ -19372,7 +21759,7 @@
                 <a:ea typeface="Microsoft JhengHei" pitchFamily="34" charset="-122"/>
                 <a:cs typeface="Microsoft JhengHei" pitchFamily="34" charset="-120"/>
               </a:rPr>
-              <a:t>6</a:t>
+              <a:t>7</a:t>
             </a:r>
             <a:endParaRPr lang="en-US" sz="900" dirty="0"/>
           </a:p>
@@ -19386,9 +21773,9 @@
 </p:sld>
 </file>
 
-<file path=ppt/slides/slide8.xml><?xml version="1.0" encoding="utf-8"?>
+<file path=ppt/slides/slide9.xml><?xml version="1.0" encoding="utf-8"?>
 <p:sld xmlns:a="http://schemas.openxmlformats.org/drawingml/2006/main" xmlns:r="http://schemas.openxmlformats.org/officeDocument/2006/relationships" xmlns:p="http://schemas.openxmlformats.org/presentationml/2006/main">
-  <p:cSld name="Slide 8">
+  <p:cSld name="Slide 9">
     <p:bg>
       <p:bgPr>
         <a:solidFill>
@@ -19994,7 +22381,7 @@
                 <a:ea typeface="Microsoft JhengHei" pitchFamily="34" charset="-122"/>
                 <a:cs typeface="Microsoft JhengHei" pitchFamily="34" charset="-120"/>
               </a:rPr>
-              <a:t>上傳簡報大綱後，直接把工作拆法講清楚：先針對宏觀經濟、央行政策、股債與匯率主題做深度研究…</a:t>
+              <a:t>把 F1_投資展望簡報大綱.md 上傳到聊天框，送出下面的提示詞。</a:t>
             </a:r>
             <a:endParaRPr lang="en-US" sz="1300" dirty="0"/>
           </a:p>
@@ -20141,7 +22528,7 @@
                 <a:ea typeface="Microsoft JhengHei" pitchFamily="34" charset="-122"/>
                 <a:cs typeface="Microsoft JhengHei" pitchFamily="34" charset="-120"/>
               </a:rPr>
-              <a:t>送出後，Cowork 會先載入 Deep Research 技能，查找可驗證的總經與市場來源…</a:t>
+              <a:t>這一步不必再下指令。</a:t>
             </a:r>
             <a:endParaRPr lang="en-US" sz="1300" dirty="0"/>
           </a:p>
@@ -20288,7 +22675,7 @@
                 <a:ea typeface="Microsoft JhengHei" pitchFamily="34" charset="-122"/>
                 <a:cs typeface="Microsoft JhengHei" pitchFamily="34" charset="-120"/>
               </a:rPr>
-              <a:t>完成後檢查簡報是否真的符合財管對客口徑：封面、宏觀總覽、股市觀點、債市觀點、資產配置…</a:t>
+              <a:t>打開產出的簡報，對照大綱逐頁檢查。</a:t>
             </a:r>
             <a:endParaRPr lang="en-US" sz="1300" dirty="0"/>
           </a:p>
@@ -20493,677 +22880,6 @@
               <a:rPr lang="en-US" sz="900" dirty="0">
                 <a:solidFill>
                   <a:srgbClr val="8A8FB5"/>
-                </a:solidFill>
-                <a:latin typeface="Microsoft JhengHei" pitchFamily="34" charset="0"/>
-                <a:ea typeface="Microsoft JhengHei" pitchFamily="34" charset="-122"/>
-                <a:cs typeface="Microsoft JhengHei" pitchFamily="34" charset="-120"/>
-              </a:rPr>
-              <a:t>7</a:t>
-            </a:r>
-            <a:endParaRPr lang="en-US" sz="900" dirty="0"/>
-          </a:p>
-        </p:txBody>
-      </p:sp>
-    </p:spTree>
-  </p:cSld>
-  <p:clrMapOvr>
-    <a:masterClrMapping/>
-  </p:clrMapOvr>
-</p:sld>
-</file>
-
-<file path=ppt/slides/slide9.xml><?xml version="1.0" encoding="utf-8"?>
-<p:sld xmlns:a="http://schemas.openxmlformats.org/drawingml/2006/main" xmlns:r="http://schemas.openxmlformats.org/officeDocument/2006/relationships" xmlns:p="http://schemas.openxmlformats.org/presentationml/2006/main">
-  <p:cSld name="Slide 9">
-    <p:bg>
-      <p:bgPr>
-        <a:solidFill>
-          <a:srgbClr val="F7F8FC"/>
-        </a:solidFill>
-      </p:bgPr>
-    </p:bg>
-    <p:spTree>
-      <p:nvGrpSpPr>
-        <p:cNvPr id="1" name=""/>
-        <p:cNvGrpSpPr/>
-        <p:nvPr/>
-      </p:nvGrpSpPr>
-      <p:grpSpPr>
-        <a:xfrm>
-          <a:off x="0" y="0"/>
-          <a:ext cx="0" cy="0"/>
-          <a:chOff x="0" y="0"/>
-          <a:chExt cx="0" cy="0"/>
-        </a:xfrm>
-      </p:grpSpPr>
-      <p:sp>
-        <p:nvSpPr>
-          <p:cNvPr id="2" name="Shape 0"/>
-          <p:cNvSpPr/>
-          <p:nvPr/>
-        </p:nvSpPr>
-        <p:spPr>
-          <a:xfrm>
-            <a:off x="640080" y="566928"/>
-            <a:ext cx="384048" cy="128016"/>
-          </a:xfrm>
-          <a:prstGeom prst="rect">
-            <a:avLst/>
-          </a:prstGeom>
-          <a:solidFill>
-            <a:srgbClr val="0A7C4A"/>
-          </a:solidFill>
-          <a:ln/>
-        </p:spPr>
-      </p:sp>
-      <p:sp>
-        <p:nvSpPr>
-          <p:cNvPr id="3" name="Text 1"/>
-          <p:cNvSpPr/>
-          <p:nvPr/>
-        </p:nvSpPr>
-        <p:spPr>
-          <a:xfrm>
-            <a:off x="1143000" y="457200"/>
-            <a:ext cx="8229600" cy="310896"/>
-          </a:xfrm>
-          <a:prstGeom prst="rect">
-            <a:avLst/>
-          </a:prstGeom>
-          <a:noFill/>
-          <a:ln/>
-        </p:spPr>
-        <p:txBody>
-          <a:bodyPr wrap="square" rtlCol="0" anchor="ctr"/>
-          <a:lstStyle/>
-          <a:p>
-            <a:pPr indent="0" marL="0">
-              <a:buNone/>
-            </a:pPr>
-            <a:r>
-              <a:rPr lang="en-US" sz="1200" b="1" spc="200" kern="0" dirty="0">
-                <a:solidFill>
-                  <a:srgbClr val="0A7C4A"/>
-                </a:solidFill>
-                <a:latin typeface="Microsoft JhengHei" pitchFamily="34" charset="0"/>
-                <a:ea typeface="Microsoft JhengHei" pitchFamily="34" charset="-122"/>
-                <a:cs typeface="Microsoft JhengHei" pitchFamily="34" charset="-120"/>
-              </a:rPr>
-              <a:t>情境 01 · 實機示範</a:t>
-            </a:r>
-            <a:endParaRPr lang="en-US" sz="1200" dirty="0"/>
-          </a:p>
-        </p:txBody>
-      </p:sp>
-      <p:sp>
-        <p:nvSpPr>
-          <p:cNvPr id="4" name="Text 2"/>
-          <p:cNvSpPr/>
-          <p:nvPr/>
-        </p:nvSpPr>
-        <p:spPr>
-          <a:xfrm>
-            <a:off x="640080" y="786384"/>
-            <a:ext cx="10972800" cy="640080"/>
-          </a:xfrm>
-          <a:prstGeom prst="rect">
-            <a:avLst/>
-          </a:prstGeom>
-          <a:noFill/>
-          <a:ln/>
-        </p:spPr>
-        <p:txBody>
-          <a:bodyPr wrap="square" rtlCol="0" anchor="ctr"/>
-          <a:lstStyle/>
-          <a:p>
-            <a:pPr indent="0" marL="0">
-              <a:buNone/>
-            </a:pPr>
-            <a:r>
-              <a:rPr lang="en-US" sz="3000" b="1" dirty="0">
-                <a:solidFill>
-                  <a:srgbClr val="1E2235"/>
-                </a:solidFill>
-                <a:latin typeface="Microsoft JhengHei" pitchFamily="34" charset="0"/>
-                <a:ea typeface="Microsoft JhengHei" pitchFamily="34" charset="-122"/>
-                <a:cs typeface="Microsoft JhengHei" pitchFamily="34" charset="-120"/>
-              </a:rPr>
-              <a:t>看 Cowork 怎麼做、產出什麼</a:t>
-            </a:r>
-            <a:endParaRPr lang="en-US" sz="3000" dirty="0"/>
-          </a:p>
-        </p:txBody>
-      </p:sp>
-      <p:sp>
-        <p:nvSpPr>
-          <p:cNvPr id="5" name="Shape 3"/>
-          <p:cNvSpPr/>
-          <p:nvPr/>
-        </p:nvSpPr>
-        <p:spPr>
-          <a:xfrm>
-            <a:off x="585216" y="1773936"/>
-            <a:ext cx="5184648" cy="3433186"/>
-          </a:xfrm>
-          <a:prstGeom prst="rect">
-            <a:avLst/>
-          </a:prstGeom>
-          <a:solidFill>
-            <a:srgbClr val="FFFFFF"/>
-          </a:solidFill>
-          <a:ln w="12700">
-            <a:solidFill>
-              <a:srgbClr val="E4E7F2"/>
-            </a:solidFill>
-            <a:prstDash val="solid"/>
-          </a:ln>
-          <a:effectLst>
-            <a:outerShdw sx="100000" sy="100000" kx="0" ky="0" algn="bl" rotWithShape="0" blurRad="114300" dist="38100" dir="5400000">
-              <a:srgbClr val="8A90B5">
-                <a:alpha val="22000"/>
-              </a:srgbClr>
-            </a:outerShdw>
-          </a:effectLst>
-        </p:spPr>
-      </p:sp>
-      <p:pic>
-        <p:nvPicPr>
-          <p:cNvPr id="6" name="Image 0" descr="C:\temp\CoworkLab\v2\_working\screenshots\fin1_01_input.png">    </p:cNvPr>
-          <p:cNvPicPr>
-            <a:picLocks noChangeAspect="1"/>
-          </p:cNvPicPr>
-          <p:nvPr/>
-        </p:nvPicPr>
-        <p:blipFill>
-          <a:blip r:embed="rId1"/>
-          <a:stretch>
-            <a:fillRect/>
-          </a:stretch>
-        </p:blipFill>
-        <p:spPr>
-          <a:xfrm>
-            <a:off x="640080" y="1828800"/>
-            <a:ext cx="5074920" cy="3323458"/>
-          </a:xfrm>
-          <a:prstGeom prst="rect">
-            <a:avLst/>
-          </a:prstGeom>
-        </p:spPr>
-      </p:pic>
-      <p:sp>
-        <p:nvSpPr>
-          <p:cNvPr id="7" name="Text 4"/>
-          <p:cNvSpPr/>
-          <p:nvPr/>
-        </p:nvSpPr>
-        <p:spPr>
-          <a:xfrm>
-            <a:off x="640080" y="5261986"/>
-            <a:ext cx="5074920" cy="320040"/>
-          </a:xfrm>
-          <a:prstGeom prst="rect">
-            <a:avLst/>
-          </a:prstGeom>
-          <a:noFill/>
-          <a:ln/>
-        </p:spPr>
-        <p:txBody>
-          <a:bodyPr wrap="square" rtlCol="0" anchor="ctr"/>
-          <a:lstStyle/>
-          <a:p>
-            <a:pPr algn="ctr" indent="0" marL="0">
-              <a:buNone/>
-            </a:pPr>
-            <a:r>
-              <a:rPr lang="en-US" sz="1350" b="1" dirty="0">
-                <a:solidFill>
-                  <a:srgbClr val="0A7C4A"/>
-                </a:solidFill>
-                <a:latin typeface="Microsoft JhengHei" pitchFamily="34" charset="0"/>
-                <a:ea typeface="Microsoft JhengHei" pitchFamily="34" charset="-122"/>
-                <a:cs typeface="Microsoft JhengHei" pitchFamily="34" charset="-120"/>
-              </a:rPr>
-              <a:t>① 你的輸入與指令</a:t>
-            </a:r>
-            <a:endParaRPr lang="en-US" sz="1350" dirty="0"/>
-          </a:p>
-        </p:txBody>
-      </p:sp>
-      <p:sp>
-        <p:nvSpPr>
-          <p:cNvPr id="8" name="Shape 5"/>
-          <p:cNvSpPr/>
-          <p:nvPr/>
-        </p:nvSpPr>
-        <p:spPr>
-          <a:xfrm>
-            <a:off x="6163056" y="1773936"/>
-            <a:ext cx="5184648" cy="3433186"/>
-          </a:xfrm>
-          <a:prstGeom prst="rect">
-            <a:avLst/>
-          </a:prstGeom>
-          <a:solidFill>
-            <a:srgbClr val="FFFFFF"/>
-          </a:solidFill>
-          <a:ln w="12700">
-            <a:solidFill>
-              <a:srgbClr val="E4E7F2"/>
-            </a:solidFill>
-            <a:prstDash val="solid"/>
-          </a:ln>
-          <a:effectLst>
-            <a:outerShdw sx="100000" sy="100000" kx="0" ky="0" algn="bl" rotWithShape="0" blurRad="114300" dist="38100" dir="5400000">
-              <a:srgbClr val="8A90B5">
-                <a:alpha val="22000"/>
-              </a:srgbClr>
-            </a:outerShdw>
-          </a:effectLst>
-        </p:spPr>
-      </p:sp>
-      <p:pic>
-        <p:nvPicPr>
-          <p:cNvPr id="9" name="Image 1" descr="C:\temp\CoworkLab\v2\_working\screenshots\fin1_03_deck_done.png">    </p:cNvPr>
-          <p:cNvPicPr>
-            <a:picLocks noChangeAspect="1"/>
-          </p:cNvPicPr>
-          <p:nvPr/>
-        </p:nvPicPr>
-        <p:blipFill>
-          <a:blip r:embed="rId2"/>
-          <a:stretch>
-            <a:fillRect/>
-          </a:stretch>
-        </p:blipFill>
-        <p:spPr>
-          <a:xfrm>
-            <a:off x="6217920" y="1828800"/>
-            <a:ext cx="5074920" cy="3323458"/>
-          </a:xfrm>
-          <a:prstGeom prst="rect">
-            <a:avLst/>
-          </a:prstGeom>
-        </p:spPr>
-      </p:pic>
-      <p:sp>
-        <p:nvSpPr>
-          <p:cNvPr id="10" name="Text 6"/>
-          <p:cNvSpPr/>
-          <p:nvPr/>
-        </p:nvSpPr>
-        <p:spPr>
-          <a:xfrm>
-            <a:off x="6217920" y="5261986"/>
-            <a:ext cx="5074920" cy="320040"/>
-          </a:xfrm>
-          <a:prstGeom prst="rect">
-            <a:avLst/>
-          </a:prstGeom>
-          <a:noFill/>
-          <a:ln/>
-        </p:spPr>
-        <p:txBody>
-          <a:bodyPr wrap="square" rtlCol="0" anchor="ctr"/>
-          <a:lstStyle/>
-          <a:p>
-            <a:pPr algn="ctr" indent="0" marL="0">
-              <a:buNone/>
-            </a:pPr>
-            <a:r>
-              <a:rPr lang="en-US" sz="1350" b="1" dirty="0">
-                <a:solidFill>
-                  <a:srgbClr val="0A7C4A"/>
-                </a:solidFill>
-                <a:latin typeface="Microsoft JhengHei" pitchFamily="34" charset="0"/>
-                <a:ea typeface="Microsoft JhengHei" pitchFamily="34" charset="-122"/>
-                <a:cs typeface="Microsoft JhengHei" pitchFamily="34" charset="-120"/>
-              </a:rPr>
-              <a:t>② 產出成果</a:t>
-            </a:r>
-            <a:endParaRPr lang="en-US" sz="1350" dirty="0"/>
-          </a:p>
-        </p:txBody>
-      </p:sp>
-      <p:sp>
-        <p:nvSpPr>
-          <p:cNvPr id="11" name="Shape 7"/>
-          <p:cNvSpPr/>
-          <p:nvPr/>
-        </p:nvSpPr>
-        <p:spPr>
-          <a:xfrm>
-            <a:off x="640080" y="5074920"/>
-            <a:ext cx="10911535" cy="1143000"/>
-          </a:xfrm>
-          <a:prstGeom prst="rect">
-            <a:avLst/>
-          </a:prstGeom>
-          <a:solidFill>
-            <a:srgbClr val="FFFFFF"/>
-          </a:solidFill>
-          <a:ln w="12700">
-            <a:solidFill>
-              <a:srgbClr val="E4E7F2"/>
-            </a:solidFill>
-            <a:prstDash val="solid"/>
-          </a:ln>
-        </p:spPr>
-      </p:sp>
-      <p:sp>
-        <p:nvSpPr>
-          <p:cNvPr id="12" name="Shape 8"/>
-          <p:cNvSpPr/>
-          <p:nvPr/>
-        </p:nvSpPr>
-        <p:spPr>
-          <a:xfrm>
-            <a:off x="640080" y="5074920"/>
-            <a:ext cx="91440" cy="1143000"/>
-          </a:xfrm>
-          <a:prstGeom prst="rect">
-            <a:avLst/>
-          </a:prstGeom>
-          <a:solidFill>
-            <a:srgbClr val="0A7C4A"/>
-          </a:solidFill>
-          <a:ln/>
-        </p:spPr>
-      </p:sp>
-      <p:sp>
-        <p:nvSpPr>
-          <p:cNvPr id="13" name="Text 9"/>
-          <p:cNvSpPr/>
-          <p:nvPr/>
-        </p:nvSpPr>
-        <p:spPr>
-          <a:xfrm>
-            <a:off x="914400" y="5184648"/>
-            <a:ext cx="1828800" cy="320040"/>
-          </a:xfrm>
-          <a:prstGeom prst="rect">
-            <a:avLst/>
-          </a:prstGeom>
-          <a:noFill/>
-          <a:ln/>
-        </p:spPr>
-        <p:txBody>
-          <a:bodyPr wrap="square" rtlCol="0" anchor="ctr"/>
-          <a:lstStyle/>
-          <a:p>
-            <a:pPr indent="0" marL="0">
-              <a:buNone/>
-            </a:pPr>
-            <a:r>
-              <a:rPr lang="en-US" sz="1400" b="1" dirty="0">
-                <a:solidFill>
-                  <a:srgbClr val="1E2235"/>
-                </a:solidFill>
-                <a:latin typeface="Microsoft JhengHei" pitchFamily="34" charset="0"/>
-                <a:ea typeface="Microsoft JhengHei" pitchFamily="34" charset="-122"/>
-                <a:cs typeface="Microsoft JhengHei" pitchFamily="34" charset="-120"/>
-              </a:rPr>
-              <a:t>產出驗收</a:t>
-            </a:r>
-            <a:endParaRPr lang="en-US" sz="1400" dirty="0"/>
-          </a:p>
-        </p:txBody>
-      </p:sp>
-      <p:pic>
-        <p:nvPicPr>
-          <p:cNvPr id="14" name="Image 2" descr="preencoded.png">    </p:cNvPr>
-          <p:cNvPicPr>
-            <a:picLocks noChangeAspect="1"/>
-          </p:cNvPicPr>
-          <p:nvPr/>
-        </p:nvPicPr>
-        <p:blipFill>
-          <a:blip r:embed="rId3"/>
-          <a:stretch>
-            <a:fillRect/>
-          </a:stretch>
-        </p:blipFill>
-        <p:spPr>
-          <a:xfrm>
-            <a:off x="2834640" y="5221224"/>
-            <a:ext cx="182880" cy="182880"/>
-          </a:xfrm>
-          <a:prstGeom prst="rect">
-            <a:avLst/>
-          </a:prstGeom>
-        </p:spPr>
-      </p:pic>
-      <p:sp>
-        <p:nvSpPr>
-          <p:cNvPr id="15" name="Text 10"/>
-          <p:cNvSpPr/>
-          <p:nvPr/>
-        </p:nvSpPr>
-        <p:spPr>
-          <a:xfrm>
-            <a:off x="3108960" y="5166360"/>
-            <a:ext cx="8168335" cy="310896"/>
-          </a:xfrm>
-          <a:prstGeom prst="rect">
-            <a:avLst/>
-          </a:prstGeom>
-          <a:noFill/>
-          <a:ln/>
-        </p:spPr>
-        <p:txBody>
-          <a:bodyPr wrap="square" rtlCol="0" anchor="ctr"/>
-          <a:lstStyle/>
-          <a:p>
-            <a:pPr indent="0" marL="0">
-              <a:buNone/>
-            </a:pPr>
-            <a:r>
-              <a:rPr lang="en-US" sz="1300" dirty="0">
-                <a:solidFill>
-                  <a:srgbClr val="1E2235"/>
-                </a:solidFill>
-                <a:latin typeface="Microsoft JhengHei" pitchFamily="34" charset="0"/>
-                <a:ea typeface="Microsoft JhengHei" pitchFamily="34" charset="-122"/>
-                <a:cs typeface="Microsoft JhengHei" pitchFamily="34" charset="-120"/>
-              </a:rPr>
-              <a:t>Cowork 先執行 Deep Research，再由 PowerPoint 技能接手完成簡報</a:t>
-            </a:r>
-            <a:endParaRPr lang="en-US" sz="1300" dirty="0"/>
-          </a:p>
-        </p:txBody>
-      </p:sp>
-      <p:pic>
-        <p:nvPicPr>
-          <p:cNvPr id="16" name="Image 3" descr="preencoded.png">    </p:cNvPr>
-          <p:cNvPicPr>
-            <a:picLocks noChangeAspect="1"/>
-          </p:cNvPicPr>
-          <p:nvPr/>
-        </p:nvPicPr>
-        <p:blipFill>
-          <a:blip r:embed="rId4"/>
-          <a:stretch>
-            <a:fillRect/>
-          </a:stretch>
-        </p:blipFill>
-        <p:spPr>
-          <a:xfrm>
-            <a:off x="2834640" y="5559552"/>
-            <a:ext cx="182880" cy="182880"/>
-          </a:xfrm>
-          <a:prstGeom prst="rect">
-            <a:avLst/>
-          </a:prstGeom>
-        </p:spPr>
-      </p:pic>
-      <p:sp>
-        <p:nvSpPr>
-          <p:cNvPr id="17" name="Text 11"/>
-          <p:cNvSpPr/>
-          <p:nvPr/>
-        </p:nvSpPr>
-        <p:spPr>
-          <a:xfrm>
-            <a:off x="3108960" y="5504688"/>
-            <a:ext cx="8168335" cy="310896"/>
-          </a:xfrm>
-          <a:prstGeom prst="rect">
-            <a:avLst/>
-          </a:prstGeom>
-          <a:noFill/>
-          <a:ln/>
-        </p:spPr>
-        <p:txBody>
-          <a:bodyPr wrap="square" rtlCol="0" anchor="ctr"/>
-          <a:lstStyle/>
-          <a:p>
-            <a:pPr indent="0" marL="0">
-              <a:buNone/>
-            </a:pPr>
-            <a:r>
-              <a:rPr lang="en-US" sz="1300" dirty="0">
-                <a:solidFill>
-                  <a:srgbClr val="1E2235"/>
-                </a:solidFill>
-                <a:latin typeface="Microsoft JhengHei" pitchFamily="34" charset="0"/>
-                <a:ea typeface="Microsoft JhengHei" pitchFamily="34" charset="-122"/>
-                <a:cs typeface="Microsoft JhengHei" pitchFamily="34" charset="-120"/>
-              </a:rPr>
-              <a:t>產出為 8 頁季度投資展望簡報，內容對應附件大綱</a:t>
-            </a:r>
-            <a:endParaRPr lang="en-US" sz="1300" dirty="0"/>
-          </a:p>
-        </p:txBody>
-      </p:sp>
-      <p:pic>
-        <p:nvPicPr>
-          <p:cNvPr id="18" name="Image 4" descr="preencoded.png">    </p:cNvPr>
-          <p:cNvPicPr>
-            <a:picLocks noChangeAspect="1"/>
-          </p:cNvPicPr>
-          <p:nvPr/>
-        </p:nvPicPr>
-        <p:blipFill>
-          <a:blip r:embed="rId5"/>
-          <a:stretch>
-            <a:fillRect/>
-          </a:stretch>
-        </p:blipFill>
-        <p:spPr>
-          <a:xfrm>
-            <a:off x="2834640" y="5897880"/>
-            <a:ext cx="182880" cy="182880"/>
-          </a:xfrm>
-          <a:prstGeom prst="rect">
-            <a:avLst/>
-          </a:prstGeom>
-        </p:spPr>
-      </p:pic>
-      <p:sp>
-        <p:nvSpPr>
-          <p:cNvPr id="19" name="Text 12"/>
-          <p:cNvSpPr/>
-          <p:nvPr/>
-        </p:nvSpPr>
-        <p:spPr>
-          <a:xfrm>
-            <a:off x="3108960" y="5843016"/>
-            <a:ext cx="8168335" cy="310896"/>
-          </a:xfrm>
-          <a:prstGeom prst="rect">
-            <a:avLst/>
-          </a:prstGeom>
-          <a:noFill/>
-          <a:ln/>
-        </p:spPr>
-        <p:txBody>
-          <a:bodyPr wrap="square" rtlCol="0" anchor="ctr"/>
-          <a:lstStyle/>
-          <a:p>
-            <a:pPr indent="0" marL="0">
-              <a:buNone/>
-            </a:pPr>
-            <a:r>
-              <a:rPr lang="en-US" sz="1300" dirty="0">
-                <a:solidFill>
-                  <a:srgbClr val="1E2235"/>
-                </a:solidFill>
-                <a:latin typeface="Microsoft JhengHei" pitchFamily="34" charset="0"/>
-                <a:ea typeface="Microsoft JhengHei" pitchFamily="34" charset="-122"/>
-                <a:cs typeface="Microsoft JhengHei" pitchFamily="34" charset="-120"/>
-              </a:rPr>
-              <a:t>簡報用語維持合規安全，未出現保證報酬或過度確定陳述</a:t>
-            </a:r>
-            <a:endParaRPr lang="en-US" sz="1300" dirty="0"/>
-          </a:p>
-        </p:txBody>
-      </p:sp>
-      <p:sp>
-        <p:nvSpPr>
-          <p:cNvPr id="20" name="Text 13"/>
-          <p:cNvSpPr/>
-          <p:nvPr/>
-        </p:nvSpPr>
-        <p:spPr>
-          <a:xfrm>
-            <a:off x="640080" y="6473952"/>
-            <a:ext cx="5486400" cy="274320"/>
-          </a:xfrm>
-          <a:prstGeom prst="rect">
-            <a:avLst/>
-          </a:prstGeom>
-          <a:noFill/>
-          <a:ln/>
-        </p:spPr>
-        <p:txBody>
-          <a:bodyPr wrap="square" rtlCol="0" anchor="ctr"/>
-          <a:lstStyle/>
-          <a:p>
-            <a:pPr algn="l" indent="0" marL="0">
-              <a:buNone/>
-            </a:pPr>
-            <a:r>
-              <a:rPr lang="en-US" sz="900" dirty="0">
-                <a:solidFill>
-                  <a:srgbClr val="5B6079"/>
-                </a:solidFill>
-                <a:latin typeface="Microsoft JhengHei" pitchFamily="34" charset="0"/>
-                <a:ea typeface="Microsoft JhengHei" pitchFamily="34" charset="-122"/>
-                <a:cs typeface="Microsoft JhengHei" pitchFamily="34" charset="-120"/>
-              </a:rPr>
-              <a:t>Microsoft 365 Copilot Cowork</a:t>
-            </a:r>
-            <a:endParaRPr lang="en-US" sz="900" dirty="0"/>
-          </a:p>
-        </p:txBody>
-      </p:sp>
-      <p:sp>
-        <p:nvSpPr>
-          <p:cNvPr id="21" name="Text 14"/>
-          <p:cNvSpPr/>
-          <p:nvPr/>
-        </p:nvSpPr>
-        <p:spPr>
-          <a:xfrm>
-            <a:off x="11002975" y="6473952"/>
-            <a:ext cx="548640" cy="274320"/>
-          </a:xfrm>
-          <a:prstGeom prst="rect">
-            <a:avLst/>
-          </a:prstGeom>
-          <a:noFill/>
-          <a:ln/>
-        </p:spPr>
-        <p:txBody>
-          <a:bodyPr wrap="square" rtlCol="0" anchor="ctr"/>
-          <a:lstStyle/>
-          <a:p>
-            <a:pPr algn="r" indent="0" marL="0">
-              <a:buNone/>
-            </a:pPr>
-            <a:r>
-              <a:rPr lang="en-US" sz="900" dirty="0">
-                <a:solidFill>
-                  <a:srgbClr val="5B6079"/>
                 </a:solidFill>
                 <a:latin typeface="Microsoft JhengHei" pitchFamily="34" charset="0"/>
                 <a:ea typeface="Microsoft JhengHei" pitchFamily="34" charset="-122"/>
